--- a/Slides/CSC6103/VT-01 Virtualization Introduction.pptx
+++ b/Slides/CSC6103/VT-01 Virtualization Introduction.pptx
@@ -266,7 +266,7 @@
             <a:fld id="{45BDCE37-E9BE-4280-8D68-34E43D66CEDB}" type="datetimeFigureOut">
               <a:rPr lang="zh-TW" altLang="en-US" smtClean="0"/>
               <a:pPr/>
-              <a:t>2026/4/27</a:t>
+              <a:t>2026/9/7</a:t>
             </a:fld>
             <a:endParaRPr lang="zh-TW" altLang="en-US"/>
           </a:p>
@@ -433,7 +433,7 @@
             <a:fld id="{FBFBA883-381C-409E-9635-BB54B21745E4}" type="datetimeFigureOut">
               <a:rPr lang="zh-TW" altLang="en-US" smtClean="0"/>
               <a:pPr/>
-              <a:t>2026/4/27</a:t>
+              <a:t>2026/9/7</a:t>
             </a:fld>
             <a:endParaRPr lang="zh-TW" altLang="en-US"/>
           </a:p>
@@ -8016,8 +8016,8 @@
         </p:nvSpPr>
         <p:spPr>
           <a:xfrm>
-            <a:off x="798286" y="844153"/>
-            <a:ext cx="7779657" cy="3671888"/>
+            <a:off x="798286" y="903421"/>
+            <a:ext cx="7779657" cy="3380714"/>
           </a:xfrm>
         </p:spPr>
         <p:txBody>
@@ -8222,10 +8222,10 @@
         </p:nvGrpSpPr>
         <p:grpSpPr>
           <a:xfrm>
-            <a:off x="1287127" y="792791"/>
-            <a:ext cx="6274816" cy="3879735"/>
+            <a:off x="1363327" y="854293"/>
+            <a:ext cx="6274816" cy="3671986"/>
             <a:chOff x="1458686" y="1380954"/>
-            <a:chExt cx="6274816" cy="3879735"/>
+            <a:chExt cx="6274816" cy="3671986"/>
           </a:xfrm>
         </p:grpSpPr>
         <p:sp>
@@ -9533,8 +9533,8 @@
           </p:nvSpPr>
           <p:spPr>
             <a:xfrm>
-              <a:off x="2267958" y="4129610"/>
-              <a:ext cx="5465544" cy="1131079"/>
+              <a:off x="1873359" y="4129610"/>
+              <a:ext cx="5860143" cy="923330"/>
             </a:xfrm>
             <a:prstGeom prst="rect">
               <a:avLst/>
@@ -10163,7 +10163,7 @@
         </p:blipFill>
         <p:spPr bwMode="auto">
           <a:xfrm>
-            <a:off x="1095510" y="1786896"/>
+            <a:off x="1240880" y="1778989"/>
             <a:ext cx="6656933" cy="2754306"/>
           </a:xfrm>
           <a:prstGeom prst="rect">
@@ -11870,8 +11870,8 @@
         </p:nvSpPr>
         <p:spPr>
           <a:xfrm>
-            <a:off x="1105736" y="897391"/>
-            <a:ext cx="6932528" cy="2286076"/>
+            <a:off x="1046467" y="829657"/>
+            <a:ext cx="7115400" cy="1888143"/>
           </a:xfrm>
         </p:spPr>
         <p:txBody>
@@ -12268,18 +12268,23 @@
               <a:t>rocessing Unit </a:t>
             </a:r>
             <a:r>
-              <a:rPr lang="zh-CN" altLang="en-US" dirty="0"/>
-              <a:t>（</a:t>
-            </a:r>
-            <a:r>
-              <a:rPr lang="en-US" altLang="zh-CN" dirty="0"/>
-              <a:t>GPU</a:t>
-            </a:r>
-            <a:r>
-              <a:rPr lang="zh-CN" altLang="en-US" dirty="0"/>
-              <a:t>）</a:t>
-            </a:r>
-            <a:endParaRPr lang="zh-TW" altLang="en-US" dirty="0"/>
+              <a:rPr lang="en-US" altLang="zh-TW" dirty="0">
+                <a:latin typeface="Times New Roman" panose="02020603050405020304" pitchFamily="18" charset="0"/>
+                <a:cs typeface="Times New Roman" panose="02020603050405020304" pitchFamily="18" charset="0"/>
+              </a:rPr>
+              <a:t>(</a:t>
+            </a:r>
+            <a:r>
+              <a:rPr lang="en-US" altLang="zh-CN" dirty="0">
+                <a:latin typeface="Times New Roman" panose="02020603050405020304" pitchFamily="18" charset="0"/>
+                <a:cs typeface="Times New Roman" panose="02020603050405020304" pitchFamily="18" charset="0"/>
+              </a:rPr>
+              <a:t>GPU)</a:t>
+            </a:r>
+            <a:endParaRPr lang="zh-TW" altLang="en-US" dirty="0">
+              <a:latin typeface="Times New Roman" panose="02020603050405020304" pitchFamily="18" charset="0"/>
+              <a:cs typeface="Times New Roman" panose="02020603050405020304" pitchFamily="18" charset="0"/>
+            </a:endParaRPr>
           </a:p>
         </p:txBody>
       </p:sp>
@@ -14049,8 +14054,8 @@
         </p:nvSpPr>
         <p:spPr>
           <a:xfrm>
-            <a:off x="806777" y="858608"/>
-            <a:ext cx="4164368" cy="3394472"/>
+            <a:off x="943429" y="858608"/>
+            <a:ext cx="4027716" cy="3394472"/>
           </a:xfrm>
         </p:spPr>
         <p:txBody>
@@ -14244,8 +14249,8 @@
         </p:nvSpPr>
         <p:spPr>
           <a:xfrm>
-            <a:off x="609600" y="779354"/>
-            <a:ext cx="8355013" cy="2043675"/>
+            <a:off x="986971" y="833596"/>
+            <a:ext cx="7170057" cy="2043675"/>
           </a:xfrm>
         </p:spPr>
         <p:txBody>
@@ -14254,6 +14259,11 @@
           </a:bodyPr>
           <a:lstStyle/>
           <a:p>
+            <a:pPr>
+              <a:spcBef>
+                <a:spcPts val="0"/>
+              </a:spcBef>
+            </a:pPr>
             <a:r>
               <a:rPr lang="en-US" altLang="zh-TW" sz="2000" dirty="0">
                 <a:latin typeface="Times New Roman" panose="02020603050405020304" pitchFamily="18" charset="0"/>
@@ -14263,6 +14273,11 @@
             </a:r>
           </a:p>
           <a:p>
+            <a:pPr>
+              <a:spcBef>
+                <a:spcPts val="0"/>
+              </a:spcBef>
+            </a:pPr>
             <a:r>
               <a:rPr lang="en-US" altLang="zh-TW" sz="2000" dirty="0">
                 <a:latin typeface="Times New Roman" panose="02020603050405020304" pitchFamily="18" charset="0"/>
@@ -14272,7 +14287,11 @@
             </a:r>
           </a:p>
           <a:p>
-            <a:pPr lvl="1"/>
+            <a:pPr lvl="1">
+              <a:spcBef>
+                <a:spcPts val="0"/>
+              </a:spcBef>
+            </a:pPr>
             <a:r>
               <a:rPr lang="en-US" altLang="zh-TW" sz="1600" dirty="0">
                 <a:latin typeface="Times New Roman" panose="02020603050405020304" pitchFamily="18" charset="0"/>
@@ -14282,7 +14301,11 @@
             </a:r>
           </a:p>
           <a:p>
-            <a:pPr lvl="1"/>
+            <a:pPr lvl="1">
+              <a:spcBef>
+                <a:spcPts val="0"/>
+              </a:spcBef>
+            </a:pPr>
             <a:r>
               <a:rPr lang="en-US" altLang="zh-TW" sz="1600" dirty="0" err="1">
                 <a:latin typeface="Times New Roman" panose="02020603050405020304" pitchFamily="18" charset="0"/>
@@ -14299,7 +14322,11 @@
             </a:r>
           </a:p>
           <a:p>
-            <a:pPr lvl="1"/>
+            <a:pPr lvl="1">
+              <a:spcBef>
+                <a:spcPts val="0"/>
+              </a:spcBef>
+            </a:pPr>
             <a:r>
               <a:rPr lang="en-US" altLang="zh-TW" sz="1600" dirty="0">
                 <a:latin typeface="Times New Roman" panose="02020603050405020304" pitchFamily="18" charset="0"/>
@@ -14309,6 +14336,11 @@
             </a:r>
           </a:p>
           <a:p>
+            <a:pPr>
+              <a:spcBef>
+                <a:spcPts val="0"/>
+              </a:spcBef>
+            </a:pPr>
             <a:r>
               <a:rPr lang="en-US" altLang="zh-TW" sz="2000" dirty="0">
                 <a:latin typeface="Times New Roman" panose="02020603050405020304" pitchFamily="18" charset="0"/>
@@ -14458,7 +14490,12 @@
             <p:ph type="title"/>
           </p:nvPr>
         </p:nvSpPr>
-        <p:spPr/>
+        <p:spPr>
+          <a:xfrm>
+            <a:off x="880532" y="108349"/>
+            <a:ext cx="7795158" cy="519113"/>
+          </a:xfrm>
+        </p:spPr>
         <p:txBody>
           <a:bodyPr/>
           <a:lstStyle/>
@@ -14483,8 +14520,8 @@
         </p:nvSpPr>
         <p:spPr>
           <a:xfrm>
-            <a:off x="656548" y="787385"/>
-            <a:ext cx="8019142" cy="1048671"/>
+            <a:off x="880532" y="769392"/>
+            <a:ext cx="6747935" cy="1048671"/>
           </a:xfrm>
         </p:spPr>
         <p:txBody>
@@ -17509,8 +17546,8 @@
         </p:blipFill>
         <p:spPr bwMode="auto">
           <a:xfrm>
-            <a:off x="1898703" y="937387"/>
-            <a:ext cx="5346594" cy="3326771"/>
+            <a:off x="1729740" y="937387"/>
+            <a:ext cx="5768340" cy="3589191"/>
           </a:xfrm>
           <a:prstGeom prst="rect">
             <a:avLst/>
@@ -17527,36 +17564,6 @@
           </a:extLst>
         </p:spPr>
       </p:pic>
-      <p:sp>
-        <p:nvSpPr>
-          <p:cNvPr id="3" name="矩形 2"/>
-          <p:cNvSpPr/>
-          <p:nvPr/>
-        </p:nvSpPr>
-        <p:spPr>
-          <a:xfrm>
-            <a:off x="1261699" y="4264158"/>
-            <a:ext cx="7163843" cy="300082"/>
-          </a:xfrm>
-          <a:prstGeom prst="rect">
-            <a:avLst/>
-          </a:prstGeom>
-        </p:spPr>
-        <p:txBody>
-          <a:bodyPr wrap="square">
-            <a:spAutoFit/>
-          </a:bodyPr>
-          <a:lstStyle/>
-          <a:p>
-            <a:pPr algn="ctr"/>
-            <a:r>
-              <a:rPr lang="en-US" altLang="zh-TW" sz="1350" dirty="0"/>
-              <a:t>http://www.energystar.gov/index.cfm?c=power_mgt.datacenter_efficiency_virtualization</a:t>
-            </a:r>
-            <a:endParaRPr lang="zh-TW" altLang="en-US" sz="1350" dirty="0"/>
-          </a:p>
-        </p:txBody>
-      </p:sp>
       <p:sp>
         <p:nvSpPr>
           <p:cNvPr id="4" name="灯片编号占位符 1">

--- a/Slides/CSC6103/VT-01 Virtualization Introduction.pptx
+++ b/Slides/CSC6103/VT-01 Virtualization Introduction.pptx
@@ -5,10 +5,10 @@
     <p:sldMasterId id="2147483660" r:id="rId1"/>
   </p:sldMasterIdLst>
   <p:notesMasterIdLst>
-    <p:notesMasterId r:id="rId49"/>
+    <p:notesMasterId r:id="rId47"/>
   </p:notesMasterIdLst>
   <p:handoutMasterIdLst>
-    <p:handoutMasterId r:id="rId50"/>
+    <p:handoutMasterId r:id="rId48"/>
   </p:handoutMasterIdLst>
   <p:sldIdLst>
     <p:sldId id="256" r:id="rId2"/>
@@ -36,28 +36,26 @@
     <p:sldId id="451" r:id="rId24"/>
     <p:sldId id="450" r:id="rId25"/>
     <p:sldId id="452" r:id="rId26"/>
-    <p:sldId id="453" r:id="rId27"/>
-    <p:sldId id="459" r:id="rId28"/>
-    <p:sldId id="415" r:id="rId29"/>
-    <p:sldId id="454" r:id="rId30"/>
-    <p:sldId id="460" r:id="rId31"/>
-    <p:sldId id="455" r:id="rId32"/>
-    <p:sldId id="456" r:id="rId33"/>
-    <p:sldId id="457" r:id="rId34"/>
-    <p:sldId id="416" r:id="rId35"/>
-    <p:sldId id="461" r:id="rId36"/>
-    <p:sldId id="462" r:id="rId37"/>
-    <p:sldId id="463" r:id="rId38"/>
-    <p:sldId id="464" r:id="rId39"/>
-    <p:sldId id="417" r:id="rId40"/>
-    <p:sldId id="465" r:id="rId41"/>
-    <p:sldId id="448" r:id="rId42"/>
-    <p:sldId id="449" r:id="rId43"/>
-    <p:sldId id="418" r:id="rId44"/>
-    <p:sldId id="441" r:id="rId45"/>
-    <p:sldId id="447" r:id="rId46"/>
-    <p:sldId id="443" r:id="rId47"/>
-    <p:sldId id="446" r:id="rId48"/>
+    <p:sldId id="459" r:id="rId27"/>
+    <p:sldId id="415" r:id="rId28"/>
+    <p:sldId id="454" r:id="rId29"/>
+    <p:sldId id="460" r:id="rId30"/>
+    <p:sldId id="455" r:id="rId31"/>
+    <p:sldId id="457" r:id="rId32"/>
+    <p:sldId id="416" r:id="rId33"/>
+    <p:sldId id="461" r:id="rId34"/>
+    <p:sldId id="462" r:id="rId35"/>
+    <p:sldId id="463" r:id="rId36"/>
+    <p:sldId id="464" r:id="rId37"/>
+    <p:sldId id="417" r:id="rId38"/>
+    <p:sldId id="465" r:id="rId39"/>
+    <p:sldId id="448" r:id="rId40"/>
+    <p:sldId id="449" r:id="rId41"/>
+    <p:sldId id="418" r:id="rId42"/>
+    <p:sldId id="441" r:id="rId43"/>
+    <p:sldId id="447" r:id="rId44"/>
+    <p:sldId id="443" r:id="rId45"/>
+    <p:sldId id="446" r:id="rId46"/>
   </p:sldIdLst>
   <p:sldSz cx="9144000" cy="5143500" type="screen16x9"/>
   <p:notesSz cx="6858000" cy="9144000"/>
@@ -266,7 +264,7 @@
             <a:fld id="{45BDCE37-E9BE-4280-8D68-34E43D66CEDB}" type="datetimeFigureOut">
               <a:rPr lang="zh-TW" altLang="en-US" smtClean="0"/>
               <a:pPr/>
-              <a:t>2026/9/7</a:t>
+              <a:t>2026/9/9</a:t>
             </a:fld>
             <a:endParaRPr lang="zh-TW" altLang="en-US"/>
           </a:p>
@@ -433,7 +431,7 @@
             <a:fld id="{FBFBA883-381C-409E-9635-BB54B21745E4}" type="datetimeFigureOut">
               <a:rPr lang="zh-TW" altLang="en-US" smtClean="0"/>
               <a:pPr/>
-              <a:t>2026/9/7</a:t>
+              <a:t>2026/9/9</a:t>
             </a:fld>
             <a:endParaRPr lang="zh-TW" altLang="en-US"/>
           </a:p>
@@ -1016,7 +1014,7 @@
             <a:fld id="{7320D120-4707-426F-9B85-873E256A6635}" type="slidenum">
               <a:rPr lang="zh-TW" altLang="en-US" smtClean="0"/>
               <a:pPr/>
-              <a:t>28</a:t>
+              <a:t>27</a:t>
             </a:fld>
             <a:endParaRPr lang="zh-TW" altLang="en-US"/>
           </a:p>
@@ -1098,7 +1096,7 @@
             <a:fld id="{7320D120-4707-426F-9B85-873E256A6635}" type="slidenum">
               <a:rPr lang="zh-TW" altLang="en-US" smtClean="0"/>
               <a:pPr/>
-              <a:t>34</a:t>
+              <a:t>32</a:t>
             </a:fld>
             <a:endParaRPr lang="zh-TW" altLang="en-US"/>
           </a:p>
@@ -1180,7 +1178,7 @@
             <a:fld id="{7320D120-4707-426F-9B85-873E256A6635}" type="slidenum">
               <a:rPr lang="zh-TW" altLang="en-US" smtClean="0"/>
               <a:pPr/>
-              <a:t>39</a:t>
+              <a:t>37</a:t>
             </a:fld>
             <a:endParaRPr lang="zh-TW" altLang="en-US"/>
           </a:p>
@@ -1262,7 +1260,7 @@
             <a:fld id="{7320D120-4707-426F-9B85-873E256A6635}" type="slidenum">
               <a:rPr lang="zh-TW" altLang="en-US" smtClean="0"/>
               <a:pPr/>
-              <a:t>43</a:t>
+              <a:t>41</a:t>
             </a:fld>
             <a:endParaRPr lang="zh-TW" altLang="en-US"/>
           </a:p>
@@ -1306,10 +1304,17 @@
         <p:spPr/>
         <p:txBody>
           <a:bodyPr/>
-          <a:lstStyle/>
-          <a:p>
-            <a:r>
-              <a:rPr lang="en-US" altLang="zh-TW"/>
+          <a:lstStyle>
+            <a:lvl1pPr>
+              <a:defRPr>
+                <a:latin typeface="Times New Roman" panose="02020603050405020304" pitchFamily="18" charset="0"/>
+                <a:cs typeface="Times New Roman" panose="02020603050405020304" pitchFamily="18" charset="0"/>
+              </a:defRPr>
+            </a:lvl1pPr>
+          </a:lstStyle>
+          <a:p>
+            <a:r>
+              <a:rPr lang="en-US" altLang="zh-TW" dirty="0"/>
               <a:t>Click to edit Master title style</a:t>
             </a:r>
             <a:endParaRPr lang="zh-TW" altLang="en-US" dirty="0"/>
@@ -3926,9 +3931,9 @@
           <a:solidFill>
             <a:schemeClr val="tx2"/>
           </a:solidFill>
-          <a:latin typeface="Calibri" pitchFamily="34" charset="0"/>
-          <a:ea typeface="標楷體" pitchFamily="65" charset="-120"/>
-          <a:cs typeface="+mj-cs"/>
+          <a:latin typeface="Times New Roman" panose="02020603050405020304" pitchFamily="18" charset="0"/>
+          <a:ea typeface="Times New Roman" panose="02020603050405020304" pitchFamily="18" charset="0"/>
+          <a:cs typeface="Times New Roman" panose="02020603050405020304" pitchFamily="18" charset="0"/>
         </a:defRPr>
       </a:lvl1pPr>
       <a:lvl2pPr algn="l" rtl="0" eaLnBrk="1" fontAlgn="base" hangingPunct="1">
@@ -4078,9 +4083,9 @@
           <a:solidFill>
             <a:schemeClr val="tx1"/>
           </a:solidFill>
-          <a:latin typeface="Calibri" pitchFamily="34" charset="0"/>
-          <a:ea typeface="標楷體" pitchFamily="65" charset="-120"/>
-          <a:cs typeface="+mn-cs"/>
+          <a:latin typeface="Times New Roman" panose="02020603050405020304" pitchFamily="18" charset="0"/>
+          <a:ea typeface="Times New Roman" panose="02020603050405020304" pitchFamily="18" charset="0"/>
+          <a:cs typeface="Times New Roman" panose="02020603050405020304" pitchFamily="18" charset="0"/>
         </a:defRPr>
       </a:lvl1pPr>
       <a:lvl2pPr marL="557199" indent="-214308" algn="l" rtl="0" eaLnBrk="1" fontAlgn="base" hangingPunct="1">
@@ -4100,8 +4105,9 @@
           <a:solidFill>
             <a:schemeClr val="tx1"/>
           </a:solidFill>
-          <a:latin typeface="Calibri" pitchFamily="34" charset="0"/>
-          <a:ea typeface="標楷體" pitchFamily="65" charset="-120"/>
+          <a:latin typeface="Times New Roman" panose="02020603050405020304" pitchFamily="18" charset="0"/>
+          <a:ea typeface="Times New Roman" panose="02020603050405020304" pitchFamily="18" charset="0"/>
+          <a:cs typeface="Times New Roman" panose="02020603050405020304" pitchFamily="18" charset="0"/>
         </a:defRPr>
       </a:lvl2pPr>
       <a:lvl3pPr marL="857229" indent="-171446" algn="l" rtl="0" eaLnBrk="1" fontAlgn="base" hangingPunct="1">
@@ -4402,29 +4408,6 @@
               </a:rPr>
               <a:t>Techniques</a:t>
             </a:r>
-            <a:br>
-              <a:rPr lang="en-US" altLang="zh-CN" sz="3600" dirty="0">
-                <a:effectLst>
-                  <a:outerShdw blurRad="38100" dist="38100" dir="2700000" algn="tl">
-                    <a:srgbClr val="000000">
-                      <a:alpha val="43137"/>
-                    </a:srgbClr>
-                  </a:outerShdw>
-                </a:effectLst>
-              </a:rPr>
-            </a:br>
-            <a:r>
-              <a:rPr lang="en-US" altLang="zh-CN" sz="3600" dirty="0">
-                <a:effectLst>
-                  <a:outerShdw blurRad="38100" dist="38100" dir="2700000" algn="tl">
-                    <a:srgbClr val="000000">
-                      <a:alpha val="43137"/>
-                    </a:srgbClr>
-                  </a:outerShdw>
-                </a:effectLst>
-              </a:rPr>
-              <a:t>Introduction</a:t>
-            </a:r>
             <a:endParaRPr lang="zh-TW" altLang="en-US" sz="3600" dirty="0">
               <a:effectLst>
                 <a:outerShdw blurRad="38100" dist="38100" dir="2700000" algn="tl">
@@ -4458,7 +4441,7 @@
           <a:lstStyle/>
           <a:p>
             <a:r>
-              <a:rPr lang="en-US" altLang="zh-TW" sz="2400">
+              <a:rPr lang="en-US" altLang="zh-TW" sz="2400" dirty="0">
                 <a:effectLst>
                   <a:outerShdw blurRad="38100" dist="38100" dir="2700000" algn="tl">
                     <a:srgbClr val="000000">
@@ -4471,7 +4454,7 @@
             </a:r>
           </a:p>
           <a:p>
-            <a:endParaRPr lang="en-US" altLang="zh-TW" sz="2400">
+            <a:endParaRPr lang="en-US" altLang="zh-TW" sz="2400" dirty="0">
               <a:effectLst>
                 <a:outerShdw blurRad="38100" dist="38100" dir="2700000" algn="tl">
                   <a:srgbClr val="000000">
@@ -4497,10 +4480,9 @@
           </a:p>
           <a:p>
             <a:r>
-              <a:rPr lang="en-US" altLang="zh-TW" sz="2400"/>
+              <a:rPr lang="en-US" altLang="zh-TW" sz="2400" dirty="0"/>
               <a:t>Chinese University of Hong Kong, Shenzhen</a:t>
             </a:r>
-            <a:endParaRPr lang="en-US" altLang="zh-TW" sz="2400" dirty="0"/>
           </a:p>
         </p:txBody>
       </p:sp>
@@ -4926,8 +4908,8 @@
         </p:nvGrpSpPr>
         <p:grpSpPr>
           <a:xfrm>
-            <a:off x="5302707" y="2649280"/>
-            <a:ext cx="3334659" cy="1653141"/>
+            <a:off x="4986867" y="2649280"/>
+            <a:ext cx="3650499" cy="1880387"/>
             <a:chOff x="5302707" y="2649280"/>
             <a:chExt cx="3334659" cy="1653141"/>
           </a:xfrm>
@@ -7992,7 +7974,7 @@
         </p:spPr>
         <p:txBody>
           <a:bodyPr>
-            <a:normAutofit/>
+            <a:normAutofit fontScale="90000"/>
           </a:bodyPr>
           <a:lstStyle/>
           <a:p>
@@ -8016,8 +7998,8 @@
         </p:nvSpPr>
         <p:spPr>
           <a:xfrm>
-            <a:off x="798286" y="903421"/>
-            <a:ext cx="7779657" cy="3380714"/>
+            <a:off x="798286" y="844153"/>
+            <a:ext cx="7779657" cy="3671888"/>
           </a:xfrm>
         </p:spPr>
         <p:txBody>
@@ -8222,7 +8204,7 @@
         </p:nvGrpSpPr>
         <p:grpSpPr>
           <a:xfrm>
-            <a:off x="1363327" y="854293"/>
+            <a:off x="1363327" y="818191"/>
             <a:ext cx="6274816" cy="3671986"/>
             <a:chOff x="1458686" y="1380954"/>
             <a:chExt cx="6274816" cy="3671986"/>
@@ -8765,14 +8747,14 @@
             <a:p>
               <a:pPr algn="ctr"/>
               <a:r>
-                <a:rPr lang="en-US" altLang="zh-TW" sz="1350">
+                <a:rPr lang="en-US" altLang="zh-TW" sz="1350" dirty="0">
                   <a:latin typeface="Lucida Grande" charset="0"/>
                   <a:ea typeface="新細明體" charset="-120"/>
                   <a:sym typeface="Lucida Grande" charset="0"/>
                 </a:rPr>
                 <a:t>I/O</a:t>
               </a:r>
-              <a:endParaRPr lang="en-US" altLang="zh-TW" sz="1350">
+              <a:endParaRPr lang="en-US" altLang="zh-TW" sz="1350" dirty="0">
                 <a:solidFill>
                   <a:srgbClr val="FFFFFF"/>
                 </a:solidFill>
@@ -8784,7 +8766,7 @@
             <a:p>
               <a:pPr algn="ctr"/>
               <a:r>
-                <a:rPr lang="en-US" altLang="zh-TW" sz="1350">
+                <a:rPr lang="en-US" altLang="zh-TW" sz="1350" dirty="0">
                   <a:latin typeface="Lucida Grande" charset="0"/>
                   <a:ea typeface="新細明體" charset="-120"/>
                   <a:sym typeface="Lucida Grande" charset="0"/>
@@ -9533,8 +9515,8 @@
           </p:nvSpPr>
           <p:spPr>
             <a:xfrm>
-              <a:off x="1873359" y="4129610"/>
-              <a:ext cx="5860143" cy="923330"/>
+              <a:off x="1822559" y="4129610"/>
+              <a:ext cx="5910943" cy="923330"/>
             </a:xfrm>
             <a:prstGeom prst="rect">
               <a:avLst/>
@@ -9899,7 +9881,7 @@
                 <a:latin typeface="Times New Roman" panose="02020603050405020304" pitchFamily="18" charset="0"/>
                 <a:cs typeface="Times New Roman" panose="02020603050405020304" pitchFamily="18" charset="0"/>
               </a:rPr>
-              <a:t> is a logical volume manager for the Linux kernel</a:t>
+              <a:t> (logical Volume Manager) is a logical volume manager for the Linux kernel</a:t>
             </a:r>
           </a:p>
           <a:p>
@@ -9932,8 +9914,8 @@
         </p:nvGrpSpPr>
         <p:grpSpPr>
           <a:xfrm>
-            <a:off x="2829720" y="1596571"/>
-            <a:ext cx="3360623" cy="2992215"/>
+            <a:off x="3110895" y="1972733"/>
+            <a:ext cx="2922210" cy="2582186"/>
             <a:chOff x="2802194" y="1275607"/>
             <a:chExt cx="3834426" cy="3442013"/>
           </a:xfrm>
@@ -10163,7 +10145,7 @@
         </p:blipFill>
         <p:spPr bwMode="auto">
           <a:xfrm>
-            <a:off x="1240880" y="1778989"/>
+            <a:off x="1095510" y="1786896"/>
             <a:ext cx="6656933" cy="2754306"/>
           </a:xfrm>
           <a:prstGeom prst="rect">
@@ -10288,8 +10270,8 @@
         </p:nvSpPr>
         <p:spPr>
           <a:xfrm>
-            <a:off x="936171" y="840178"/>
-            <a:ext cx="7150100" cy="2672280"/>
+            <a:off x="851011" y="794739"/>
+            <a:ext cx="3923696" cy="3554022"/>
           </a:xfrm>
         </p:spPr>
         <p:txBody>
@@ -10299,7 +10281,7 @@
           <a:lstStyle/>
           <a:p>
             <a:r>
-              <a:rPr lang="en-US" altLang="zh-TW" sz="2400" dirty="0">
+              <a:rPr lang="en-US" altLang="zh-TW" sz="2000" dirty="0">
                 <a:latin typeface="Times New Roman" panose="02020603050405020304" pitchFamily="18" charset="0"/>
                 <a:cs typeface="Times New Roman" panose="02020603050405020304" pitchFamily="18" charset="0"/>
               </a:rPr>
@@ -10308,13 +10290,13 @@
           </a:p>
           <a:p>
             <a:r>
-              <a:rPr lang="en-US" altLang="zh-TW" sz="2400" dirty="0">
+              <a:rPr lang="en-US" altLang="zh-TW" sz="2000" dirty="0">
                 <a:latin typeface="Times New Roman" panose="02020603050405020304" pitchFamily="18" charset="0"/>
                 <a:cs typeface="Times New Roman" panose="02020603050405020304" pitchFamily="18" charset="0"/>
               </a:rPr>
               <a:t>Data is distributed across the drives in one of several ways called "RAID levels“, such as RAID0, RAID1, etc., depending on the level of redundancy and performance required</a:t>
             </a:r>
-            <a:endParaRPr lang="zh-TW" altLang="en-US" sz="2400" dirty="0">
+            <a:endParaRPr lang="zh-TW" altLang="en-US" sz="2000" dirty="0">
               <a:latin typeface="Times New Roman" panose="02020603050405020304" pitchFamily="18" charset="0"/>
               <a:cs typeface="Times New Roman" panose="02020603050405020304" pitchFamily="18" charset="0"/>
             </a:endParaRPr>
@@ -10356,6 +10338,224 @@
           </a:p>
         </p:txBody>
       </p:sp>
+      <p:grpSp>
+        <p:nvGrpSpPr>
+          <p:cNvPr id="5" name="组合 4">
+            <a:extLst>
+              <a:ext uri="{FF2B5EF4-FFF2-40B4-BE49-F238E27FC236}">
+                <a16:creationId xmlns:a16="http://schemas.microsoft.com/office/drawing/2014/main" id="{4E7FC961-5406-3CF7-5E03-355C16E44F65}"/>
+              </a:ext>
+            </a:extLst>
+          </p:cNvPr>
+          <p:cNvGrpSpPr/>
+          <p:nvPr/>
+        </p:nvGrpSpPr>
+        <p:grpSpPr>
+          <a:xfrm>
+            <a:off x="4805930" y="1092285"/>
+            <a:ext cx="2343116" cy="3018929"/>
+            <a:chOff x="687308" y="1389473"/>
+            <a:chExt cx="2690675" cy="3018929"/>
+          </a:xfrm>
+        </p:grpSpPr>
+        <p:pic>
+          <p:nvPicPr>
+            <p:cNvPr id="6" name="Picture 2" descr="File:RAID 0.svg">
+              <a:extLst>
+                <a:ext uri="{FF2B5EF4-FFF2-40B4-BE49-F238E27FC236}">
+                  <a16:creationId xmlns:a16="http://schemas.microsoft.com/office/drawing/2014/main" id="{DF90C7F2-9BEF-D9C6-579F-EDC8BBA21D9D}"/>
+                </a:ext>
+              </a:extLst>
+            </p:cNvPr>
+            <p:cNvPicPr>
+              <a:picLocks noChangeAspect="1" noChangeArrowheads="1"/>
+            </p:cNvPicPr>
+            <p:nvPr/>
+          </p:nvPicPr>
+          <p:blipFill>
+            <a:blip r:embed="rId2">
+              <a:extLst>
+                <a:ext uri="{28A0092B-C50C-407E-A947-70E740481C1C}">
+                  <a14:useLocalDpi xmlns:a14="http://schemas.microsoft.com/office/drawing/2010/main" val="0"/>
+                </a:ext>
+              </a:extLst>
+            </a:blip>
+            <a:srcRect/>
+            <a:stretch>
+              <a:fillRect/>
+            </a:stretch>
+          </p:blipFill>
+          <p:spPr bwMode="auto">
+            <a:xfrm>
+              <a:off x="1076731" y="1389473"/>
+              <a:ext cx="1527937" cy="2246742"/>
+            </a:xfrm>
+            <a:prstGeom prst="rect">
+              <a:avLst/>
+            </a:prstGeom>
+            <a:noFill/>
+            <a:extLst>
+              <a:ext uri="{909E8E84-426E-40DD-AFC4-6F175D3DCCD1}">
+                <a14:hiddenFill xmlns:a14="http://schemas.microsoft.com/office/drawing/2010/main">
+                  <a:solidFill>
+                    <a:srgbClr val="FFFFFF"/>
+                  </a:solidFill>
+                </a14:hiddenFill>
+              </a:ext>
+            </a:extLst>
+          </p:spPr>
+        </p:pic>
+        <p:sp>
+          <p:nvSpPr>
+            <p:cNvPr id="7" name="矩形 6">
+              <a:extLst>
+                <a:ext uri="{FF2B5EF4-FFF2-40B4-BE49-F238E27FC236}">
+                  <a16:creationId xmlns:a16="http://schemas.microsoft.com/office/drawing/2014/main" id="{E5DEBA80-4219-C0D3-1D2C-F25C0D1B0546}"/>
+                </a:ext>
+              </a:extLst>
+            </p:cNvPr>
+            <p:cNvSpPr/>
+            <p:nvPr/>
+          </p:nvSpPr>
+          <p:spPr>
+            <a:xfrm>
+              <a:off x="687308" y="3577405"/>
+              <a:ext cx="2690675" cy="830997"/>
+            </a:xfrm>
+            <a:prstGeom prst="rect">
+              <a:avLst/>
+            </a:prstGeom>
+          </p:spPr>
+          <p:txBody>
+            <a:bodyPr wrap="square">
+              <a:spAutoFit/>
+            </a:bodyPr>
+            <a:lstStyle/>
+            <a:p>
+              <a:r>
+                <a:rPr lang="en-US" altLang="zh-TW" sz="1200" dirty="0">
+                  <a:latin typeface="Times New Roman" panose="02020603050405020304" pitchFamily="18" charset="0"/>
+                  <a:cs typeface="Times New Roman" panose="02020603050405020304" pitchFamily="18" charset="0"/>
+                </a:rPr>
+                <a:t>It provides improved performance and additional storage but no fault tolerance (block-level striping without parity or mirroring) . </a:t>
+              </a:r>
+              <a:endParaRPr lang="zh-TW" altLang="en-US" sz="1200" dirty="0">
+                <a:latin typeface="Times New Roman" panose="02020603050405020304" pitchFamily="18" charset="0"/>
+                <a:cs typeface="Times New Roman" panose="02020603050405020304" pitchFamily="18" charset="0"/>
+              </a:endParaRPr>
+            </a:p>
+          </p:txBody>
+        </p:sp>
+      </p:grpSp>
+      <p:grpSp>
+        <p:nvGrpSpPr>
+          <p:cNvPr id="8" name="组合 7">
+            <a:extLst>
+              <a:ext uri="{FF2B5EF4-FFF2-40B4-BE49-F238E27FC236}">
+                <a16:creationId xmlns:a16="http://schemas.microsoft.com/office/drawing/2014/main" id="{A1D1FEA1-1ABF-5B57-3EF0-B8DD111E8CAE}"/>
+              </a:ext>
+            </a:extLst>
+          </p:cNvPr>
+          <p:cNvGrpSpPr/>
+          <p:nvPr/>
+        </p:nvGrpSpPr>
+        <p:grpSpPr>
+          <a:xfrm>
+            <a:off x="7198624" y="1092284"/>
+            <a:ext cx="1477066" cy="2777336"/>
+            <a:chOff x="5161871" y="1164370"/>
+            <a:chExt cx="1750907" cy="3013102"/>
+          </a:xfrm>
+        </p:grpSpPr>
+        <p:pic>
+          <p:nvPicPr>
+            <p:cNvPr id="9" name="Picture 4" descr="File:RAID 1.svg">
+              <a:extLst>
+                <a:ext uri="{FF2B5EF4-FFF2-40B4-BE49-F238E27FC236}">
+                  <a16:creationId xmlns:a16="http://schemas.microsoft.com/office/drawing/2014/main" id="{1211AE67-6B9B-EE03-1D2E-220352A391CD}"/>
+                </a:ext>
+              </a:extLst>
+            </p:cNvPr>
+            <p:cNvPicPr>
+              <a:picLocks noChangeAspect="1" noChangeArrowheads="1"/>
+            </p:cNvPicPr>
+            <p:nvPr/>
+          </p:nvPicPr>
+          <p:blipFill>
+            <a:blip r:embed="rId3">
+              <a:extLst>
+                <a:ext uri="{28A0092B-C50C-407E-A947-70E740481C1C}">
+                  <a14:useLocalDpi xmlns:a14="http://schemas.microsoft.com/office/drawing/2010/main" val="0"/>
+                </a:ext>
+              </a:extLst>
+            </a:blip>
+            <a:srcRect/>
+            <a:stretch>
+              <a:fillRect/>
+            </a:stretch>
+          </p:blipFill>
+          <p:spPr bwMode="auto">
+            <a:xfrm>
+              <a:off x="5161871" y="1164370"/>
+              <a:ext cx="1577253" cy="2426544"/>
+            </a:xfrm>
+            <a:prstGeom prst="rect">
+              <a:avLst/>
+            </a:prstGeom>
+            <a:noFill/>
+            <a:extLst>
+              <a:ext uri="{909E8E84-426E-40DD-AFC4-6F175D3DCCD1}">
+                <a14:hiddenFill xmlns:a14="http://schemas.microsoft.com/office/drawing/2010/main">
+                  <a:solidFill>
+                    <a:srgbClr val="FFFFFF"/>
+                  </a:solidFill>
+                </a14:hiddenFill>
+              </a:ext>
+            </a:extLst>
+          </p:spPr>
+        </p:pic>
+        <p:sp>
+          <p:nvSpPr>
+            <p:cNvPr id="10" name="矩形 9">
+              <a:extLst>
+                <a:ext uri="{FF2B5EF4-FFF2-40B4-BE49-F238E27FC236}">
+                  <a16:creationId xmlns:a16="http://schemas.microsoft.com/office/drawing/2014/main" id="{76CE6178-D49F-FF46-A7A4-6D207BE32960}"/>
+                </a:ext>
+              </a:extLst>
+            </p:cNvPr>
+            <p:cNvSpPr/>
+            <p:nvPr/>
+          </p:nvSpPr>
+          <p:spPr>
+            <a:xfrm>
+              <a:off x="5161871" y="3626532"/>
+              <a:ext cx="1750907" cy="550940"/>
+            </a:xfrm>
+            <a:prstGeom prst="rect">
+              <a:avLst/>
+            </a:prstGeom>
+          </p:spPr>
+          <p:txBody>
+            <a:bodyPr wrap="square">
+              <a:spAutoFit/>
+            </a:bodyPr>
+            <a:lstStyle/>
+            <a:p>
+              <a:r>
+                <a:rPr lang="en-US" altLang="zh-TW" sz="1350" dirty="0">
+                  <a:latin typeface="Times New Roman" panose="02020603050405020304" pitchFamily="18" charset="0"/>
+                  <a:cs typeface="Times New Roman" panose="02020603050405020304" pitchFamily="18" charset="0"/>
+                </a:rPr>
+                <a:t>Mirroring without parity or striping</a:t>
+              </a:r>
+              <a:endParaRPr lang="zh-TW" altLang="en-US" sz="1350" dirty="0">
+                <a:latin typeface="Times New Roman" panose="02020603050405020304" pitchFamily="18" charset="0"/>
+                <a:cs typeface="Times New Roman" panose="02020603050405020304" pitchFamily="18" charset="0"/>
+              </a:endParaRPr>
+            </a:p>
+          </p:txBody>
+        </p:sp>
+      </p:grpSp>
     </p:spTree>
     <p:extLst>
       <p:ext uri="{BB962C8B-B14F-4D97-AF65-F5344CB8AC3E}">
@@ -10398,8 +10598,8 @@
         </p:nvSpPr>
         <p:spPr>
           <a:xfrm>
-            <a:off x="957943" y="108349"/>
-            <a:ext cx="7717747" cy="519113"/>
+            <a:off x="994229" y="108349"/>
+            <a:ext cx="7681461" cy="519113"/>
           </a:xfrm>
         </p:spPr>
         <p:txBody>
@@ -10408,212 +10608,70 @@
           <a:p>
             <a:r>
               <a:rPr lang="en-US" altLang="zh-TW" dirty="0"/>
-              <a:t>Example - RAID 0 and RAID 1</a:t>
+              <a:t>LVM and RIAD for Virtualization</a:t>
             </a:r>
             <a:endParaRPr lang="zh-TW" altLang="en-US" dirty="0"/>
           </a:p>
         </p:txBody>
       </p:sp>
-      <p:grpSp>
-        <p:nvGrpSpPr>
-          <p:cNvPr id="7" name="组合 6">
+      <p:sp>
+        <p:nvSpPr>
+          <p:cNvPr id="3" name="內容版面配置區 2"/>
+          <p:cNvSpPr>
+            <a:spLocks noGrp="1"/>
+          </p:cNvSpPr>
+          <p:nvPr>
+            <p:ph idx="1"/>
+          </p:nvPr>
+        </p:nvSpPr>
+        <p:spPr>
+          <a:xfrm>
+            <a:off x="994229" y="844153"/>
+            <a:ext cx="7286171" cy="2957380"/>
+          </a:xfrm>
+        </p:spPr>
+        <p:txBody>
+          <a:bodyPr/>
+          <a:lstStyle/>
+          <a:p>
+            <a:r>
+              <a:rPr lang="en-US" altLang="zh-TW" sz="2400" dirty="0">
+                <a:latin typeface="Times New Roman" panose="02020603050405020304" pitchFamily="18" charset="0"/>
+                <a:cs typeface="Times New Roman" panose="02020603050405020304" pitchFamily="18" charset="0"/>
+              </a:rPr>
+              <a:t>LVM provides a virtual storage systems which is flexible to partition and allocate logical volumes to virtual machines</a:t>
+            </a:r>
+          </a:p>
+          <a:p>
+            <a:r>
+              <a:rPr lang="en-US" altLang="zh-TW" sz="2400" dirty="0">
+                <a:latin typeface="Times New Roman" panose="02020603050405020304" pitchFamily="18" charset="0"/>
+                <a:cs typeface="Times New Roman" panose="02020603050405020304" pitchFamily="18" charset="0"/>
+              </a:rPr>
+              <a:t>RAID not only improves storage performance but has fault tolerance capability</a:t>
+            </a:r>
+          </a:p>
+          <a:p>
+            <a:r>
+              <a:rPr lang="en-US" altLang="zh-TW" sz="2400" dirty="0">
+                <a:latin typeface="Times New Roman" panose="02020603050405020304" pitchFamily="18" charset="0"/>
+                <a:cs typeface="Times New Roman" panose="02020603050405020304" pitchFamily="18" charset="0"/>
+              </a:rPr>
+              <a:t>Leaning how to configure LVM and RAID in the virtualization system </a:t>
+            </a:r>
+            <a:endParaRPr lang="zh-TW" altLang="en-US" sz="2400" dirty="0">
+              <a:latin typeface="Times New Roman" panose="02020603050405020304" pitchFamily="18" charset="0"/>
+              <a:cs typeface="Times New Roman" panose="02020603050405020304" pitchFamily="18" charset="0"/>
+            </a:endParaRPr>
+          </a:p>
+        </p:txBody>
+      </p:sp>
+      <p:sp>
+        <p:nvSpPr>
+          <p:cNvPr id="4" name="灯片编号占位符 1">
             <a:extLst>
               <a:ext uri="{FF2B5EF4-FFF2-40B4-BE49-F238E27FC236}">
-                <a16:creationId xmlns:a16="http://schemas.microsoft.com/office/drawing/2014/main" id="{6D6BA773-F20A-6338-3AD4-C8C71AF76373}"/>
-              </a:ext>
-            </a:extLst>
-          </p:cNvPr>
-          <p:cNvGrpSpPr/>
-          <p:nvPr/>
-        </p:nvGrpSpPr>
-        <p:grpSpPr>
-          <a:xfrm>
-            <a:off x="311109" y="833448"/>
-            <a:ext cx="4505707" cy="3665290"/>
-            <a:chOff x="515257" y="739105"/>
-            <a:chExt cx="4505707" cy="3665290"/>
-          </a:xfrm>
-        </p:grpSpPr>
-        <p:pic>
-          <p:nvPicPr>
-            <p:cNvPr id="18434" name="Picture 2" descr="File:RAID 0.svg"/>
-            <p:cNvPicPr>
-              <a:picLocks noChangeAspect="1" noChangeArrowheads="1"/>
-            </p:cNvPicPr>
-            <p:nvPr/>
-          </p:nvPicPr>
-          <p:blipFill>
-            <a:blip r:embed="rId2">
-              <a:extLst>
-                <a:ext uri="{28A0092B-C50C-407E-A947-70E740481C1C}">
-                  <a14:useLocalDpi xmlns:a14="http://schemas.microsoft.com/office/drawing/2010/main" val="0"/>
-                </a:ext>
-              </a:extLst>
-            </a:blip>
-            <a:srcRect/>
-            <a:stretch>
-              <a:fillRect/>
-            </a:stretch>
-          </p:blipFill>
-          <p:spPr bwMode="auto">
-            <a:xfrm>
-              <a:off x="1546902" y="739105"/>
-              <a:ext cx="2000922" cy="3078342"/>
-            </a:xfrm>
-            <a:prstGeom prst="rect">
-              <a:avLst/>
-            </a:prstGeom>
-            <a:noFill/>
-            <a:extLst>
-              <a:ext uri="{909E8E84-426E-40DD-AFC4-6F175D3DCCD1}">
-                <a14:hiddenFill xmlns:a14="http://schemas.microsoft.com/office/drawing/2010/main">
-                  <a:solidFill>
-                    <a:srgbClr val="FFFFFF"/>
-                  </a:solidFill>
-                </a14:hiddenFill>
-              </a:ext>
-            </a:extLst>
-          </p:spPr>
-        </p:pic>
-        <p:sp>
-          <p:nvSpPr>
-            <p:cNvPr id="5" name="矩形 4"/>
-            <p:cNvSpPr/>
-            <p:nvPr/>
-          </p:nvSpPr>
-          <p:spPr>
-            <a:xfrm>
-              <a:off x="515257" y="3688814"/>
-              <a:ext cx="4505707" cy="715581"/>
-            </a:xfrm>
-            <a:prstGeom prst="rect">
-              <a:avLst/>
-            </a:prstGeom>
-          </p:spPr>
-          <p:txBody>
-            <a:bodyPr wrap="square">
-              <a:spAutoFit/>
-            </a:bodyPr>
-            <a:lstStyle/>
-            <a:p>
-              <a:r>
-                <a:rPr lang="en-US" altLang="zh-TW" sz="1350" dirty="0">
-                  <a:latin typeface="Times New Roman" panose="02020603050405020304" pitchFamily="18" charset="0"/>
-                  <a:cs typeface="Times New Roman" panose="02020603050405020304" pitchFamily="18" charset="0"/>
-                </a:rPr>
-                <a:t>It provides improved performance and additional storage but no fault tolerance (block-level striping without parity or mirroring) . </a:t>
-              </a:r>
-              <a:endParaRPr lang="zh-TW" altLang="en-US" sz="1350" dirty="0">
-                <a:latin typeface="Times New Roman" panose="02020603050405020304" pitchFamily="18" charset="0"/>
-                <a:cs typeface="Times New Roman" panose="02020603050405020304" pitchFamily="18" charset="0"/>
-              </a:endParaRPr>
-            </a:p>
-          </p:txBody>
-        </p:sp>
-      </p:grpSp>
-      <p:grpSp>
-        <p:nvGrpSpPr>
-          <p:cNvPr id="8" name="组合 7">
-            <a:extLst>
-              <a:ext uri="{FF2B5EF4-FFF2-40B4-BE49-F238E27FC236}">
-                <a16:creationId xmlns:a16="http://schemas.microsoft.com/office/drawing/2014/main" id="{C5C04029-B0FA-A9D7-508A-51E9D212BA67}"/>
-              </a:ext>
-            </a:extLst>
-          </p:cNvPr>
-          <p:cNvGrpSpPr/>
-          <p:nvPr/>
-        </p:nvGrpSpPr>
-        <p:grpSpPr>
-          <a:xfrm>
-            <a:off x="5407984" y="833448"/>
-            <a:ext cx="2627642" cy="3313799"/>
-            <a:chOff x="5052385" y="1042657"/>
-            <a:chExt cx="2627642" cy="3313799"/>
-          </a:xfrm>
-        </p:grpSpPr>
-        <p:pic>
-          <p:nvPicPr>
-            <p:cNvPr id="18436" name="Picture 4" descr="File:RAID 1.svg"/>
-            <p:cNvPicPr>
-              <a:picLocks noChangeAspect="1" noChangeArrowheads="1"/>
-            </p:cNvPicPr>
-            <p:nvPr/>
-          </p:nvPicPr>
-          <p:blipFill>
-            <a:blip r:embed="rId3">
-              <a:extLst>
-                <a:ext uri="{28A0092B-C50C-407E-A947-70E740481C1C}">
-                  <a14:useLocalDpi xmlns:a14="http://schemas.microsoft.com/office/drawing/2010/main" val="0"/>
-                </a:ext>
-              </a:extLst>
-            </a:blip>
-            <a:srcRect/>
-            <a:stretch>
-              <a:fillRect/>
-            </a:stretch>
-          </p:blipFill>
-          <p:spPr bwMode="auto">
-            <a:xfrm>
-              <a:off x="5395692" y="1042657"/>
-              <a:ext cx="2056443" cy="3163758"/>
-            </a:xfrm>
-            <a:prstGeom prst="rect">
-              <a:avLst/>
-            </a:prstGeom>
-            <a:noFill/>
-            <a:extLst>
-              <a:ext uri="{909E8E84-426E-40DD-AFC4-6F175D3DCCD1}">
-                <a14:hiddenFill xmlns:a14="http://schemas.microsoft.com/office/drawing/2010/main">
-                  <a:solidFill>
-                    <a:srgbClr val="FFFFFF"/>
-                  </a:solidFill>
-                </a14:hiddenFill>
-              </a:ext>
-            </a:extLst>
-          </p:spPr>
-        </p:pic>
-        <p:sp>
-          <p:nvSpPr>
-            <p:cNvPr id="6" name="矩形 5"/>
-            <p:cNvSpPr/>
-            <p:nvPr/>
-          </p:nvSpPr>
-          <p:spPr>
-            <a:xfrm>
-              <a:off x="5052385" y="4056374"/>
-              <a:ext cx="2627642" cy="300082"/>
-            </a:xfrm>
-            <a:prstGeom prst="rect">
-              <a:avLst/>
-            </a:prstGeom>
-          </p:spPr>
-          <p:txBody>
-            <a:bodyPr wrap="none">
-              <a:spAutoFit/>
-            </a:bodyPr>
-            <a:lstStyle/>
-            <a:p>
-              <a:r>
-                <a:rPr lang="en-US" altLang="zh-TW" sz="1350" dirty="0">
-                  <a:latin typeface="Times New Roman" panose="02020603050405020304" pitchFamily="18" charset="0"/>
-                  <a:cs typeface="Times New Roman" panose="02020603050405020304" pitchFamily="18" charset="0"/>
-                </a:rPr>
-                <a:t>mirroring without parity or striping</a:t>
-              </a:r>
-              <a:endParaRPr lang="zh-TW" altLang="en-US" sz="1350" dirty="0">
-                <a:latin typeface="Times New Roman" panose="02020603050405020304" pitchFamily="18" charset="0"/>
-                <a:cs typeface="Times New Roman" panose="02020603050405020304" pitchFamily="18" charset="0"/>
-              </a:endParaRPr>
-            </a:p>
-          </p:txBody>
-        </p:sp>
-      </p:grpSp>
-      <p:sp>
-        <p:nvSpPr>
-          <p:cNvPr id="3" name="灯片编号占位符 1">
-            <a:extLst>
-              <a:ext uri="{FF2B5EF4-FFF2-40B4-BE49-F238E27FC236}">
-                <a16:creationId xmlns:a16="http://schemas.microsoft.com/office/drawing/2014/main" id="{687BA76D-8DE7-0E9C-F79A-3927E9393E73}"/>
+                <a16:creationId xmlns:a16="http://schemas.microsoft.com/office/drawing/2014/main" id="{DEF16210-DB97-34D3-2D8E-4446AE6223E5}"/>
               </a:ext>
             </a:extLst>
           </p:cNvPr>
@@ -10646,7 +10704,7 @@
     </p:spTree>
     <p:extLst>
       <p:ext uri="{BB962C8B-B14F-4D97-AF65-F5344CB8AC3E}">
-        <p14:creationId xmlns:p14="http://schemas.microsoft.com/office/powerpoint/2010/main" val="1187699727"/>
+        <p14:creationId xmlns:p14="http://schemas.microsoft.com/office/powerpoint/2010/main" val="4177519959"/>
       </p:ext>
     </p:extLst>
   </p:cSld>
@@ -10675,7 +10733,7 @@
       </p:grpSpPr>
       <p:sp>
         <p:nvSpPr>
-          <p:cNvPr id="2" name="標題 1"/>
+          <p:cNvPr id="4" name="標題 3"/>
           <p:cNvSpPr>
             <a:spLocks noGrp="1"/>
           </p:cNvSpPr>
@@ -10683,19 +10741,14 @@
             <p:ph type="title"/>
           </p:nvPr>
         </p:nvSpPr>
-        <p:spPr>
-          <a:xfrm>
-            <a:off x="994229" y="108349"/>
-            <a:ext cx="7681461" cy="519113"/>
-          </a:xfrm>
-        </p:spPr>
+        <p:spPr/>
         <p:txBody>
           <a:bodyPr/>
           <a:lstStyle/>
           <a:p>
             <a:r>
               <a:rPr lang="en-US" altLang="zh-TW" dirty="0"/>
-              <a:t>LVM and RIAD for Virtualization</a:t>
+              <a:t>Virtualization Techniques</a:t>
             </a:r>
             <a:endParaRPr lang="zh-TW" altLang="en-US" dirty="0"/>
           </a:p>
@@ -10703,62 +10756,103 @@
       </p:sp>
       <p:sp>
         <p:nvSpPr>
-          <p:cNvPr id="3" name="內容版面配置區 2"/>
+          <p:cNvPr id="5" name="文字版面配置區 4"/>
           <p:cNvSpPr>
             <a:spLocks noGrp="1"/>
           </p:cNvSpPr>
           <p:nvPr>
-            <p:ph idx="1"/>
+            <p:ph type="body" idx="1"/>
           </p:nvPr>
         </p:nvSpPr>
         <p:spPr>
           <a:xfrm>
-            <a:off x="914399" y="844153"/>
-            <a:ext cx="7561944" cy="3671888"/>
-          </a:xfrm>
-        </p:spPr>
-        <p:txBody>
-          <a:bodyPr/>
+            <a:off x="1684735" y="1383618"/>
+            <a:ext cx="5829300" cy="1921558"/>
+          </a:xfrm>
+        </p:spPr>
+        <p:txBody>
+          <a:bodyPr>
+            <a:normAutofit fontScale="70000" lnSpcReduction="20000"/>
+          </a:bodyPr>
           <a:lstStyle/>
           <a:p>
             <a:r>
-              <a:rPr lang="en-US" altLang="zh-TW" sz="2400" dirty="0">
-                <a:latin typeface="Times New Roman" panose="02020603050405020304" pitchFamily="18" charset="0"/>
-                <a:cs typeface="Times New Roman" panose="02020603050405020304" pitchFamily="18" charset="0"/>
-              </a:rPr>
-              <a:t>LVM provides a virtual storage systems which is flexible to partition and allocate logical volumes to virtual machines</a:t>
-            </a:r>
-          </a:p>
-          <a:p>
-            <a:r>
-              <a:rPr lang="en-US" altLang="zh-TW" sz="2400" dirty="0">
-                <a:latin typeface="Times New Roman" panose="02020603050405020304" pitchFamily="18" charset="0"/>
-                <a:cs typeface="Times New Roman" panose="02020603050405020304" pitchFamily="18" charset="0"/>
-              </a:rPr>
-              <a:t>RAID not only improves storage performance but has fault tolerance capability</a:t>
-            </a:r>
-          </a:p>
-          <a:p>
-            <a:r>
-              <a:rPr lang="en-US" altLang="zh-TW" sz="2400" dirty="0">
-                <a:latin typeface="Times New Roman" panose="02020603050405020304" pitchFamily="18" charset="0"/>
-                <a:cs typeface="Times New Roman" panose="02020603050405020304" pitchFamily="18" charset="0"/>
-              </a:rPr>
-              <a:t>Leaning how to configure LVM and RAID in the virtualization system </a:t>
-            </a:r>
-            <a:endParaRPr lang="zh-TW" altLang="en-US" sz="2400" dirty="0">
-              <a:latin typeface="Times New Roman" panose="02020603050405020304" pitchFamily="18" charset="0"/>
-              <a:cs typeface="Times New Roman" panose="02020603050405020304" pitchFamily="18" charset="0"/>
-            </a:endParaRPr>
-          </a:p>
-        </p:txBody>
-      </p:sp>
-      <p:sp>
-        <p:nvSpPr>
-          <p:cNvPr id="4" name="灯片编号占位符 1">
+              <a:rPr lang="en-US" altLang="zh-TW" dirty="0">
+                <a:solidFill>
+                  <a:schemeClr val="bg1">
+                    <a:lumMod val="50000"/>
+                  </a:schemeClr>
+                </a:solidFill>
+              </a:rPr>
+              <a:t>System Virtualization</a:t>
+            </a:r>
+          </a:p>
+          <a:p>
+            <a:r>
+              <a:rPr lang="en-US" altLang="zh-TW" dirty="0">
+                <a:solidFill>
+                  <a:schemeClr val="bg1">
+                    <a:lumMod val="50000"/>
+                  </a:schemeClr>
+                </a:solidFill>
+              </a:rPr>
+              <a:t>Storage Virtualization</a:t>
+            </a:r>
+          </a:p>
+          <a:p>
+            <a:r>
+              <a:rPr lang="en-US" altLang="zh-TW" b="1" dirty="0">
+                <a:solidFill>
+                  <a:srgbClr val="FF0000"/>
+                </a:solidFill>
+              </a:rPr>
+              <a:t>Network Virtualization	</a:t>
+            </a:r>
+          </a:p>
+          <a:p>
+            <a:r>
+              <a:rPr lang="en-US" altLang="zh-TW" dirty="0">
+                <a:solidFill>
+                  <a:schemeClr val="bg1">
+                    <a:lumMod val="50000"/>
+                  </a:schemeClr>
+                </a:solidFill>
+              </a:rPr>
+              <a:t>GPU Virtualization</a:t>
+            </a:r>
+          </a:p>
+          <a:p>
+            <a:r>
+              <a:rPr lang="en-US" altLang="zh-TW" dirty="0">
+                <a:solidFill>
+                  <a:schemeClr val="bg1">
+                    <a:lumMod val="50000"/>
+                  </a:schemeClr>
+                </a:solidFill>
+              </a:rPr>
+              <a:t>Software Virtualization</a:t>
+            </a:r>
+          </a:p>
+          <a:p>
+            <a:r>
+              <a:rPr lang="en-US" altLang="zh-TW" dirty="0">
+                <a:solidFill>
+                  <a:schemeClr val="bg1">
+                    <a:lumMod val="50000"/>
+                  </a:schemeClr>
+                </a:solidFill>
+              </a:rPr>
+              <a:t>Hardware Support  Virtualization</a:t>
+            </a:r>
+          </a:p>
+        </p:txBody>
+      </p:sp>
+      <p:sp>
+        <p:nvSpPr>
+          <p:cNvPr id="2" name="灯片编号占位符 1">
             <a:extLst>
               <a:ext uri="{FF2B5EF4-FFF2-40B4-BE49-F238E27FC236}">
-                <a16:creationId xmlns:a16="http://schemas.microsoft.com/office/drawing/2014/main" id="{DEF16210-DB97-34D3-2D8E-4446AE6223E5}"/>
+                <a16:creationId xmlns:a16="http://schemas.microsoft.com/office/drawing/2014/main" id="{5A81C3F9-8066-9960-AAF3-7CAA26130C9E}"/>
               </a:ext>
             </a:extLst>
           </p:cNvPr>
@@ -10791,7 +10885,7 @@
     </p:spTree>
     <p:extLst>
       <p:ext uri="{BB962C8B-B14F-4D97-AF65-F5344CB8AC3E}">
-        <p14:creationId xmlns:p14="http://schemas.microsoft.com/office/powerpoint/2010/main" val="4177519959"/>
+        <p14:creationId xmlns:p14="http://schemas.microsoft.com/office/powerpoint/2010/main" val="788891836"/>
       </p:ext>
     </p:extLst>
   </p:cSld>
@@ -10820,7 +10914,7 @@
       </p:grpSpPr>
       <p:sp>
         <p:nvSpPr>
-          <p:cNvPr id="4" name="標題 3"/>
+          <p:cNvPr id="2" name="標題 1"/>
           <p:cNvSpPr>
             <a:spLocks noGrp="1"/>
           </p:cNvSpPr>
@@ -10828,118 +10922,73 @@
             <p:ph type="title"/>
           </p:nvPr>
         </p:nvSpPr>
-        <p:spPr/>
-        <p:txBody>
-          <a:bodyPr/>
-          <a:lstStyle/>
-          <a:p>
-            <a:r>
-              <a:rPr lang="en-US" altLang="zh-TW" dirty="0"/>
-              <a:t>Virtualization Techniques</a:t>
-            </a:r>
-            <a:endParaRPr lang="zh-TW" altLang="en-US" dirty="0"/>
-          </a:p>
-        </p:txBody>
-      </p:sp>
-      <p:sp>
-        <p:nvSpPr>
-          <p:cNvPr id="5" name="文字版面配置區 4"/>
-          <p:cNvSpPr>
-            <a:spLocks noGrp="1"/>
-          </p:cNvSpPr>
-          <p:nvPr>
-            <p:ph type="body" idx="1"/>
-          </p:nvPr>
-        </p:nvSpPr>
         <p:spPr>
           <a:xfrm>
-            <a:off x="1684735" y="1383618"/>
-            <a:ext cx="5829300" cy="1921558"/>
+            <a:off x="907143" y="108349"/>
+            <a:ext cx="7768547" cy="519113"/>
           </a:xfrm>
         </p:spPr>
         <p:txBody>
           <a:bodyPr>
-            <a:normAutofit fontScale="70000" lnSpcReduction="20000"/>
+            <a:noAutofit/>
           </a:bodyPr>
           <a:lstStyle/>
           <a:p>
             <a:r>
-              <a:rPr lang="en-US" altLang="zh-TW" dirty="0">
-                <a:solidFill>
-                  <a:schemeClr val="bg1">
-                    <a:lumMod val="50000"/>
-                  </a:schemeClr>
-                </a:solidFill>
-              </a:rPr>
-              <a:t>System Virtualization</a:t>
-            </a:r>
-          </a:p>
-          <a:p>
-            <a:r>
-              <a:rPr lang="en-US" altLang="zh-TW" dirty="0">
-                <a:solidFill>
-                  <a:schemeClr val="bg1">
-                    <a:lumMod val="50000"/>
-                  </a:schemeClr>
-                </a:solidFill>
-              </a:rPr>
-              <a:t>Storage Virtualization</a:t>
-            </a:r>
-          </a:p>
-          <a:p>
-            <a:r>
-              <a:rPr lang="en-US" altLang="zh-TW" b="1" dirty="0">
-                <a:solidFill>
-                  <a:srgbClr val="FF0000"/>
-                </a:solidFill>
-              </a:rPr>
-              <a:t>Network Virtualization	</a:t>
-            </a:r>
-          </a:p>
-          <a:p>
-            <a:r>
-              <a:rPr lang="en-US" altLang="zh-TW" dirty="0">
-                <a:solidFill>
-                  <a:schemeClr val="bg1">
-                    <a:lumMod val="50000"/>
-                  </a:schemeClr>
-                </a:solidFill>
-              </a:rPr>
-              <a:t>GPU Virtualization</a:t>
-            </a:r>
-          </a:p>
-          <a:p>
-            <a:r>
-              <a:rPr lang="en-US" altLang="zh-TW" dirty="0">
-                <a:solidFill>
-                  <a:schemeClr val="bg1">
-                    <a:lumMod val="50000"/>
-                  </a:schemeClr>
-                </a:solidFill>
-              </a:rPr>
-              <a:t>Software Virtualization</a:t>
-            </a:r>
-          </a:p>
-          <a:p>
-            <a:r>
-              <a:rPr lang="en-US" altLang="zh-TW" dirty="0">
-                <a:solidFill>
-                  <a:schemeClr val="bg1">
-                    <a:lumMod val="50000"/>
-                  </a:schemeClr>
-                </a:solidFill>
-              </a:rPr>
-              <a:t>Hardware Support  Virtualization</a:t>
-            </a:r>
-          </a:p>
-        </p:txBody>
-      </p:sp>
-      <p:sp>
-        <p:nvSpPr>
-          <p:cNvPr id="2" name="灯片编号占位符 1">
+              <a:rPr lang="en-US" altLang="zh-TW" dirty="0"/>
+              <a:t>Software Defined Network (1) </a:t>
+            </a:r>
+            <a:endParaRPr lang="zh-TW" altLang="en-US" dirty="0"/>
+          </a:p>
+        </p:txBody>
+      </p:sp>
+      <p:sp>
+        <p:nvSpPr>
+          <p:cNvPr id="3" name="內容版面配置區 2"/>
+          <p:cNvSpPr>
+            <a:spLocks noGrp="1"/>
+          </p:cNvSpPr>
+          <p:nvPr>
+            <p:ph idx="1"/>
+          </p:nvPr>
+        </p:nvSpPr>
+        <p:spPr>
+          <a:xfrm>
+            <a:off x="1000172" y="827314"/>
+            <a:ext cx="4689428" cy="3600753"/>
+          </a:xfrm>
+        </p:spPr>
+        <p:txBody>
+          <a:bodyPr>
+            <a:normAutofit/>
+          </a:bodyPr>
+          <a:lstStyle/>
+          <a:p>
+            <a:r>
+              <a:rPr lang="en-US" altLang="zh-TW" sz="2200" dirty="0">
+                <a:latin typeface="Times New Roman" panose="02020603050405020304" pitchFamily="18" charset="0"/>
+                <a:cs typeface="Times New Roman" panose="02020603050405020304" pitchFamily="18" charset="0"/>
+              </a:rPr>
+              <a:t>Software defined networking (SDN) is an approach to building computer networks that separates and abstracts elements of these systems </a:t>
+            </a:r>
+          </a:p>
+          <a:p>
+            <a:r>
+              <a:rPr lang="en-US" altLang="zh-TW" sz="2200" dirty="0">
+                <a:latin typeface="Times New Roman" panose="02020603050405020304" pitchFamily="18" charset="0"/>
+                <a:cs typeface="Times New Roman" panose="02020603050405020304" pitchFamily="18" charset="0"/>
+              </a:rPr>
+              <a:t>SDN decouples the system that makes decisions about where traffic is sent (the control plane) from the underlying system that forwards traffic to the selected destination (the data plane)</a:t>
+            </a:r>
+          </a:p>
+        </p:txBody>
+      </p:sp>
+      <p:sp>
+        <p:nvSpPr>
+          <p:cNvPr id="4" name="灯片编号占位符 1">
             <a:extLst>
               <a:ext uri="{FF2B5EF4-FFF2-40B4-BE49-F238E27FC236}">
-                <a16:creationId xmlns:a16="http://schemas.microsoft.com/office/drawing/2014/main" id="{5A81C3F9-8066-9960-AAF3-7CAA26130C9E}"/>
+                <a16:creationId xmlns:a16="http://schemas.microsoft.com/office/drawing/2014/main" id="{CF786560-52AA-099B-AB2A-3392F23035DE}"/>
               </a:ext>
             </a:extLst>
           </p:cNvPr>
@@ -10969,10 +11018,57 @@
           </a:p>
         </p:txBody>
       </p:sp>
+      <p:pic>
+        <p:nvPicPr>
+          <p:cNvPr id="1026" name="Picture 2" descr="Software defined networks Images - Free Download on Magnific (formerly Freepik)">
+            <a:extLst>
+              <a:ext uri="{FF2B5EF4-FFF2-40B4-BE49-F238E27FC236}">
+                <a16:creationId xmlns:a16="http://schemas.microsoft.com/office/drawing/2014/main" id="{686D791C-5770-5B69-DDA7-1B6838D74866}"/>
+              </a:ext>
+            </a:extLst>
+          </p:cNvPr>
+          <p:cNvPicPr>
+            <a:picLocks noChangeAspect="1" noChangeArrowheads="1"/>
+          </p:cNvPicPr>
+          <p:nvPr/>
+        </p:nvPicPr>
+        <p:blipFill>
+          <a:blip r:embed="rId2">
+            <a:extLst>
+              <a:ext uri="{28A0092B-C50C-407E-A947-70E740481C1C}">
+                <a14:useLocalDpi xmlns:a14="http://schemas.microsoft.com/office/drawing/2010/main" val="0"/>
+              </a:ext>
+            </a:extLst>
+          </a:blip>
+          <a:srcRect/>
+          <a:stretch>
+            <a:fillRect/>
+          </a:stretch>
+        </p:blipFill>
+        <p:spPr bwMode="auto">
+          <a:xfrm>
+            <a:off x="6131456" y="1223433"/>
+            <a:ext cx="2696633" cy="2696633"/>
+          </a:xfrm>
+          <a:prstGeom prst="rect">
+            <a:avLst/>
+          </a:prstGeom>
+          <a:noFill/>
+          <a:extLst>
+            <a:ext uri="{909E8E84-426E-40DD-AFC4-6F175D3DCCD1}">
+              <a14:hiddenFill xmlns:a14="http://schemas.microsoft.com/office/drawing/2010/main">
+                <a:solidFill>
+                  <a:srgbClr val="FFFFFF"/>
+                </a:solidFill>
+              </a14:hiddenFill>
+            </a:ext>
+          </a:extLst>
+        </p:spPr>
+      </p:pic>
     </p:spTree>
     <p:extLst>
       <p:ext uri="{BB962C8B-B14F-4D97-AF65-F5344CB8AC3E}">
-        <p14:creationId xmlns:p14="http://schemas.microsoft.com/office/powerpoint/2010/main" val="788891836"/>
+        <p14:creationId xmlns:p14="http://schemas.microsoft.com/office/powerpoint/2010/main" val="4151779566"/>
       </p:ext>
     </p:extLst>
   </p:cSld>
@@ -11011,8 +11107,8 @@
         </p:nvSpPr>
         <p:spPr>
           <a:xfrm>
-            <a:off x="907143" y="108349"/>
-            <a:ext cx="7768547" cy="519113"/>
+            <a:off x="878114" y="108349"/>
+            <a:ext cx="7797576" cy="519113"/>
           </a:xfrm>
         </p:spPr>
         <p:txBody>
@@ -11023,7 +11119,7 @@
           <a:p>
             <a:r>
               <a:rPr lang="en-US" altLang="zh-TW" dirty="0"/>
-              <a:t>Software Defined Network (1) </a:t>
+              <a:t>Software Defined Network (2) </a:t>
             </a:r>
             <a:endParaRPr lang="zh-TW" altLang="en-US" dirty="0"/>
           </a:p>
@@ -11041,8 +11137,8 @@
         </p:nvSpPr>
         <p:spPr>
           <a:xfrm>
-            <a:off x="1000172" y="827314"/>
-            <a:ext cx="6975428" cy="3164115"/>
+            <a:off x="878114" y="831346"/>
+            <a:ext cx="7178628" cy="2685949"/>
           </a:xfrm>
         </p:spPr>
         <p:txBody>
@@ -11056,17 +11152,22 @@
                 <a:latin typeface="Times New Roman" panose="02020603050405020304" pitchFamily="18" charset="0"/>
                 <a:cs typeface="Times New Roman" panose="02020603050405020304" pitchFamily="18" charset="0"/>
               </a:rPr>
-              <a:t>Software defined networking (SDN) is an approach to building computer networks that separates and abstracts elements of these systems </a:t>
-            </a:r>
-          </a:p>
-          <a:p>
-            <a:r>
-              <a:rPr lang="en-US" altLang="zh-TW" sz="2400" dirty="0">
+              <a:t>The inventors and vendors of these systems claim that this technology simplifies networking and enables new applications, such as </a:t>
+            </a:r>
+          </a:p>
+          <a:p>
+            <a:pPr lvl="1"/>
+            <a:r>
+              <a:rPr lang="en-US" altLang="zh-TW" sz="2000" dirty="0">
                 <a:latin typeface="Times New Roman" panose="02020603050405020304" pitchFamily="18" charset="0"/>
                 <a:cs typeface="Times New Roman" panose="02020603050405020304" pitchFamily="18" charset="0"/>
               </a:rPr>
-              <a:t>SDN decouples the system that makes decisions about where traffic is sent (the control plane) from the underlying system that forwards traffic to the selected destination (the data plane)</a:t>
-            </a:r>
+              <a:t>Network virtualization in which the control plane is separated from the data plane and implemented in a software application.</a:t>
+            </a:r>
+            <a:endParaRPr lang="zh-TW" altLang="en-US" sz="2000" dirty="0">
+              <a:latin typeface="Times New Roman" panose="02020603050405020304" pitchFamily="18" charset="0"/>
+              <a:cs typeface="Times New Roman" panose="02020603050405020304" pitchFamily="18" charset="0"/>
+            </a:endParaRPr>
           </a:p>
         </p:txBody>
       </p:sp>
@@ -11075,7 +11176,7 @@
           <p:cNvPr id="4" name="灯片编号占位符 1">
             <a:extLst>
               <a:ext uri="{FF2B5EF4-FFF2-40B4-BE49-F238E27FC236}">
-                <a16:creationId xmlns:a16="http://schemas.microsoft.com/office/drawing/2014/main" id="{CF786560-52AA-099B-AB2A-3392F23035DE}"/>
+                <a16:creationId xmlns:a16="http://schemas.microsoft.com/office/drawing/2014/main" id="{96ADBB87-3AFA-D0E3-436D-4FD89B29844B}"/>
               </a:ext>
             </a:extLst>
           </p:cNvPr>
@@ -11108,7 +11209,7 @@
     </p:spTree>
     <p:extLst>
       <p:ext uri="{BB962C8B-B14F-4D97-AF65-F5344CB8AC3E}">
-        <p14:creationId xmlns:p14="http://schemas.microsoft.com/office/powerpoint/2010/main" val="4151779566"/>
+        <p14:creationId xmlns:p14="http://schemas.microsoft.com/office/powerpoint/2010/main" val="966174359"/>
       </p:ext>
     </p:extLst>
   </p:cSld>
@@ -11289,67 +11390,23 @@
         </p:nvSpPr>
         <p:spPr>
           <a:xfrm>
-            <a:off x="878114" y="108349"/>
-            <a:ext cx="7797576" cy="519113"/>
-          </a:xfrm>
-        </p:spPr>
-        <p:txBody>
-          <a:bodyPr>
-            <a:noAutofit/>
-          </a:bodyPr>
+            <a:off x="856343" y="108349"/>
+            <a:ext cx="7819347" cy="519113"/>
+          </a:xfrm>
+        </p:spPr>
+        <p:txBody>
+          <a:bodyPr/>
           <a:lstStyle/>
           <a:p>
             <a:r>
               <a:rPr lang="en-US" altLang="zh-TW" dirty="0"/>
-              <a:t>Software Defined Network (2) </a:t>
+              <a:t>Open </a:t>
+            </a:r>
+            <a:r>
+              <a:rPr lang="en-US" altLang="zh-TW" dirty="0" err="1"/>
+              <a:t>vSwitch</a:t>
             </a:r>
             <a:endParaRPr lang="zh-TW" altLang="en-US" dirty="0"/>
-          </a:p>
-        </p:txBody>
-      </p:sp>
-      <p:sp>
-        <p:nvSpPr>
-          <p:cNvPr id="3" name="內容版面配置區 2"/>
-          <p:cNvSpPr>
-            <a:spLocks noGrp="1"/>
-          </p:cNvSpPr>
-          <p:nvPr>
-            <p:ph idx="1"/>
-          </p:nvPr>
-        </p:nvSpPr>
-        <p:spPr>
-          <a:xfrm>
-            <a:off x="878114" y="899079"/>
-            <a:ext cx="7178628" cy="2685949"/>
-          </a:xfrm>
-        </p:spPr>
-        <p:txBody>
-          <a:bodyPr>
-            <a:normAutofit/>
-          </a:bodyPr>
-          <a:lstStyle/>
-          <a:p>
-            <a:r>
-              <a:rPr lang="en-US" altLang="zh-TW" sz="2400" dirty="0">
-                <a:latin typeface="Times New Roman" panose="02020603050405020304" pitchFamily="18" charset="0"/>
-                <a:cs typeface="Times New Roman" panose="02020603050405020304" pitchFamily="18" charset="0"/>
-              </a:rPr>
-              <a:t>The inventors and vendors of these systems claim that this technology simplifies networking and enables new applications, such as </a:t>
-            </a:r>
-          </a:p>
-          <a:p>
-            <a:pPr lvl="1"/>
-            <a:r>
-              <a:rPr lang="en-US" altLang="zh-TW" sz="2000" dirty="0">
-                <a:latin typeface="Times New Roman" panose="02020603050405020304" pitchFamily="18" charset="0"/>
-                <a:cs typeface="Times New Roman" panose="02020603050405020304" pitchFamily="18" charset="0"/>
-              </a:rPr>
-              <a:t>Network virtualization in which the control plane is separated from the data plane and implemented in a software application.</a:t>
-            </a:r>
-            <a:endParaRPr lang="zh-TW" altLang="en-US" sz="2000" dirty="0">
-              <a:latin typeface="Times New Roman" panose="02020603050405020304" pitchFamily="18" charset="0"/>
-              <a:cs typeface="Times New Roman" panose="02020603050405020304" pitchFamily="18" charset="0"/>
-            </a:endParaRPr>
           </a:p>
         </p:txBody>
       </p:sp>
@@ -11358,7 +11415,7 @@
           <p:cNvPr id="4" name="灯片编号占位符 1">
             <a:extLst>
               <a:ext uri="{FF2B5EF4-FFF2-40B4-BE49-F238E27FC236}">
-                <a16:creationId xmlns:a16="http://schemas.microsoft.com/office/drawing/2014/main" id="{96ADBB87-3AFA-D0E3-436D-4FD89B29844B}"/>
+                <a16:creationId xmlns:a16="http://schemas.microsoft.com/office/drawing/2014/main" id="{21CBBAE6-408D-D33C-02AE-769EFD3B77E6}"/>
               </a:ext>
             </a:extLst>
           </p:cNvPr>
@@ -11388,10 +11445,169 @@
           </a:p>
         </p:txBody>
       </p:sp>
+      <p:pic>
+        <p:nvPicPr>
+          <p:cNvPr id="5" name="Picture 2" descr="open vswitch">
+            <a:extLst>
+              <a:ext uri="{FF2B5EF4-FFF2-40B4-BE49-F238E27FC236}">
+                <a16:creationId xmlns:a16="http://schemas.microsoft.com/office/drawing/2014/main" id="{3BFB4A3D-CA71-E687-E928-84D1568FE09E}"/>
+              </a:ext>
+            </a:extLst>
+          </p:cNvPr>
+          <p:cNvPicPr>
+            <a:picLocks noChangeAspect="1" noChangeArrowheads="1"/>
+          </p:cNvPicPr>
+          <p:nvPr/>
+        </p:nvPicPr>
+        <p:blipFill>
+          <a:blip r:embed="rId2">
+            <a:extLst>
+              <a:ext uri="{28A0092B-C50C-407E-A947-70E740481C1C}">
+                <a14:useLocalDpi xmlns:a14="http://schemas.microsoft.com/office/drawing/2010/main" val="0"/>
+              </a:ext>
+            </a:extLst>
+          </a:blip>
+          <a:srcRect/>
+          <a:stretch>
+            <a:fillRect/>
+          </a:stretch>
+        </p:blipFill>
+        <p:spPr bwMode="auto">
+          <a:xfrm>
+            <a:off x="5852109" y="1498600"/>
+            <a:ext cx="3271103" cy="2175933"/>
+          </a:xfrm>
+          <a:prstGeom prst="rect">
+            <a:avLst/>
+          </a:prstGeom>
+          <a:noFill/>
+          <a:extLst>
+            <a:ext uri="{909E8E84-426E-40DD-AFC4-6F175D3DCCD1}">
+              <a14:hiddenFill xmlns:a14="http://schemas.microsoft.com/office/drawing/2010/main">
+                <a:solidFill>
+                  <a:srgbClr val="FFFFFF"/>
+                </a:solidFill>
+              </a14:hiddenFill>
+            </a:ext>
+          </a:extLst>
+        </p:spPr>
+      </p:pic>
+      <p:sp>
+        <p:nvSpPr>
+          <p:cNvPr id="3" name="內容版面配置區 2"/>
+          <p:cNvSpPr>
+            <a:spLocks noGrp="1"/>
+          </p:cNvSpPr>
+          <p:nvPr>
+            <p:ph idx="1"/>
+          </p:nvPr>
+        </p:nvSpPr>
+        <p:spPr>
+          <a:xfrm>
+            <a:off x="856342" y="861087"/>
+            <a:ext cx="4985657" cy="3702446"/>
+          </a:xfrm>
+        </p:spPr>
+        <p:txBody>
+          <a:bodyPr>
+            <a:normAutofit lnSpcReduction="10000"/>
+          </a:bodyPr>
+          <a:lstStyle/>
+          <a:p>
+            <a:r>
+              <a:rPr lang="en-US" altLang="zh-TW" sz="1800" dirty="0">
+                <a:latin typeface="Times New Roman" panose="02020603050405020304" pitchFamily="18" charset="0"/>
+                <a:cs typeface="Times New Roman" panose="02020603050405020304" pitchFamily="18" charset="0"/>
+              </a:rPr>
+              <a:t>Open </a:t>
+            </a:r>
+            <a:r>
+              <a:rPr lang="en-US" altLang="zh-TW" sz="1800" dirty="0" err="1">
+                <a:latin typeface="Times New Roman" panose="02020603050405020304" pitchFamily="18" charset="0"/>
+                <a:cs typeface="Times New Roman" panose="02020603050405020304" pitchFamily="18" charset="0"/>
+              </a:rPr>
+              <a:t>vSwitch</a:t>
+            </a:r>
+            <a:r>
+              <a:rPr lang="en-US" altLang="zh-TW" sz="1800" dirty="0">
+                <a:latin typeface="Times New Roman" panose="02020603050405020304" pitchFamily="18" charset="0"/>
+                <a:cs typeface="Times New Roman" panose="02020603050405020304" pitchFamily="18" charset="0"/>
+              </a:rPr>
+              <a:t> is a flexible, multi-layer software network switch. Typically used in virtualization environments as the network switching component in the hypervisor.</a:t>
+            </a:r>
+          </a:p>
+          <a:p>
+            <a:r>
+              <a:rPr lang="en-US" altLang="zh-TW" sz="1800" dirty="0">
+                <a:latin typeface="Times New Roman" panose="02020603050405020304" pitchFamily="18" charset="0"/>
+                <a:cs typeface="Times New Roman" panose="02020603050405020304" pitchFamily="18" charset="0"/>
+              </a:rPr>
+              <a:t>Open </a:t>
+            </a:r>
+            <a:r>
+              <a:rPr lang="en-US" altLang="zh-TW" sz="1800" dirty="0" err="1">
+                <a:latin typeface="Times New Roman" panose="02020603050405020304" pitchFamily="18" charset="0"/>
+                <a:cs typeface="Times New Roman" panose="02020603050405020304" pitchFamily="18" charset="0"/>
+              </a:rPr>
+              <a:t>vSwitch</a:t>
+            </a:r>
+            <a:r>
+              <a:rPr lang="en-US" altLang="zh-TW" sz="1800" dirty="0">
+                <a:latin typeface="Times New Roman" panose="02020603050405020304" pitchFamily="18" charset="0"/>
+                <a:cs typeface="Times New Roman" panose="02020603050405020304" pitchFamily="18" charset="0"/>
+              </a:rPr>
+              <a:t> maintains the logical state of a virtual machine's network connection across physical hosts when a virtual machine is migrated, and it can be managed and monitored by standard protocols such as: OpenFlow, NetFlow, </a:t>
+            </a:r>
+            <a:r>
+              <a:rPr lang="en-US" altLang="zh-TW" sz="1800" dirty="0" err="1">
+                <a:latin typeface="Times New Roman" panose="02020603050405020304" pitchFamily="18" charset="0"/>
+                <a:cs typeface="Times New Roman" panose="02020603050405020304" pitchFamily="18" charset="0"/>
+              </a:rPr>
+              <a:t>sFlow</a:t>
+            </a:r>
+            <a:r>
+              <a:rPr lang="en-US" altLang="zh-TW" sz="1800" dirty="0">
+                <a:latin typeface="Times New Roman" panose="02020603050405020304" pitchFamily="18" charset="0"/>
+                <a:cs typeface="Times New Roman" panose="02020603050405020304" pitchFamily="18" charset="0"/>
+              </a:rPr>
+              <a:t>, SPAN, RSPAN. </a:t>
+            </a:r>
+          </a:p>
+          <a:p>
+            <a:r>
+              <a:rPr lang="en-US" altLang="zh-TW" sz="1800" dirty="0">
+                <a:latin typeface="Times New Roman" panose="02020603050405020304" pitchFamily="18" charset="0"/>
+                <a:cs typeface="Times New Roman" panose="02020603050405020304" pitchFamily="18" charset="0"/>
+              </a:rPr>
+              <a:t>When it comes to virtualization, open </a:t>
+            </a:r>
+            <a:r>
+              <a:rPr lang="en-US" altLang="zh-TW" sz="1800" dirty="0" err="1">
+                <a:latin typeface="Times New Roman" panose="02020603050405020304" pitchFamily="18" charset="0"/>
+                <a:cs typeface="Times New Roman" panose="02020603050405020304" pitchFamily="18" charset="0"/>
+              </a:rPr>
+              <a:t>vSwitch</a:t>
+            </a:r>
+            <a:r>
+              <a:rPr lang="en-US" altLang="zh-TW" sz="1800" dirty="0">
+                <a:latin typeface="Times New Roman" panose="02020603050405020304" pitchFamily="18" charset="0"/>
+                <a:cs typeface="Times New Roman" panose="02020603050405020304" pitchFamily="18" charset="0"/>
+              </a:rPr>
+              <a:t> is attractive because it provides the ability for a single controller to manage your virtual network across all your servers20</a:t>
+            </a:r>
+          </a:p>
+          <a:p>
+            <a:endParaRPr lang="zh-TW" altLang="en-US" sz="1800" dirty="0">
+              <a:latin typeface="Times New Roman" panose="02020603050405020304" pitchFamily="18" charset="0"/>
+              <a:cs typeface="Times New Roman" panose="02020603050405020304" pitchFamily="18" charset="0"/>
+            </a:endParaRPr>
+          </a:p>
+        </p:txBody>
+      </p:sp>
     </p:spTree>
     <p:extLst>
       <p:ext uri="{BB962C8B-B14F-4D97-AF65-F5344CB8AC3E}">
-        <p14:creationId xmlns:p14="http://schemas.microsoft.com/office/powerpoint/2010/main" val="966174359"/>
+        <p14:creationId xmlns:p14="http://schemas.microsoft.com/office/powerpoint/2010/main" val="317920969"/>
       </p:ext>
     </p:extLst>
   </p:cSld>
@@ -11430,8 +11646,8 @@
         </p:nvSpPr>
         <p:spPr>
           <a:xfrm>
-            <a:off x="856343" y="108349"/>
-            <a:ext cx="7819347" cy="519113"/>
+            <a:off x="965200" y="108349"/>
+            <a:ext cx="7710490" cy="519113"/>
           </a:xfrm>
         </p:spPr>
         <p:txBody>
@@ -11439,414 +11655,6 @@
           <a:lstStyle/>
           <a:p>
             <a:r>
-              <a:rPr lang="en-US" altLang="zh-TW" dirty="0"/>
-              <a:t>Open </a:t>
-            </a:r>
-            <a:r>
-              <a:rPr lang="en-US" altLang="zh-TW" dirty="0" err="1"/>
-              <a:t>vSwitch</a:t>
-            </a:r>
-            <a:r>
-              <a:rPr lang="en-US" altLang="zh-TW" dirty="0"/>
-              <a:t> (1)</a:t>
-            </a:r>
-            <a:endParaRPr lang="zh-TW" altLang="en-US" dirty="0"/>
-          </a:p>
-        </p:txBody>
-      </p:sp>
-      <p:sp>
-        <p:nvSpPr>
-          <p:cNvPr id="3" name="內容版面配置區 2"/>
-          <p:cNvSpPr>
-            <a:spLocks noGrp="1"/>
-          </p:cNvSpPr>
-          <p:nvPr>
-            <p:ph idx="1"/>
-          </p:nvPr>
-        </p:nvSpPr>
-        <p:spPr>
-          <a:xfrm>
-            <a:off x="856343" y="844154"/>
-            <a:ext cx="7692572" cy="3277904"/>
-          </a:xfrm>
-        </p:spPr>
-        <p:txBody>
-          <a:bodyPr>
-            <a:normAutofit/>
-          </a:bodyPr>
-          <a:lstStyle/>
-          <a:p>
-            <a:r>
-              <a:rPr lang="en-US" altLang="zh-TW" sz="2400" dirty="0">
-                <a:latin typeface="Times New Roman" panose="02020603050405020304" pitchFamily="18" charset="0"/>
-                <a:cs typeface="Times New Roman" panose="02020603050405020304" pitchFamily="18" charset="0"/>
-              </a:rPr>
-              <a:t>Open </a:t>
-            </a:r>
-            <a:r>
-              <a:rPr lang="en-US" altLang="zh-TW" sz="2400" dirty="0" err="1">
-                <a:latin typeface="Times New Roman" panose="02020603050405020304" pitchFamily="18" charset="0"/>
-                <a:cs typeface="Times New Roman" panose="02020603050405020304" pitchFamily="18" charset="0"/>
-              </a:rPr>
-              <a:t>vSwitch</a:t>
-            </a:r>
-            <a:r>
-              <a:rPr lang="en-US" altLang="zh-TW" sz="2400" dirty="0">
-                <a:latin typeface="Times New Roman" panose="02020603050405020304" pitchFamily="18" charset="0"/>
-                <a:cs typeface="Times New Roman" panose="02020603050405020304" pitchFamily="18" charset="0"/>
-              </a:rPr>
-              <a:t> is a flexible, multi-layer software network switch. Typically used in virtualization environments as the network switching component in the hypervisor.</a:t>
-            </a:r>
-          </a:p>
-          <a:p>
-            <a:r>
-              <a:rPr lang="en-US" altLang="zh-TW" sz="2400" dirty="0">
-                <a:latin typeface="Times New Roman" panose="02020603050405020304" pitchFamily="18" charset="0"/>
-                <a:cs typeface="Times New Roman" panose="02020603050405020304" pitchFamily="18" charset="0"/>
-              </a:rPr>
-              <a:t>Open </a:t>
-            </a:r>
-            <a:r>
-              <a:rPr lang="en-US" altLang="zh-TW" sz="2400" dirty="0" err="1">
-                <a:latin typeface="Times New Roman" panose="02020603050405020304" pitchFamily="18" charset="0"/>
-                <a:cs typeface="Times New Roman" panose="02020603050405020304" pitchFamily="18" charset="0"/>
-              </a:rPr>
-              <a:t>vSwitch</a:t>
-            </a:r>
-            <a:r>
-              <a:rPr lang="en-US" altLang="zh-TW" sz="2400" dirty="0">
-                <a:latin typeface="Times New Roman" panose="02020603050405020304" pitchFamily="18" charset="0"/>
-                <a:cs typeface="Times New Roman" panose="02020603050405020304" pitchFamily="18" charset="0"/>
-              </a:rPr>
-              <a:t> maintains the logical state of a virtual machine's network connection across physical hosts when a virtual machine is migrated, and it can be managed and monitored by standard protocols such as: </a:t>
-            </a:r>
-            <a:r>
-              <a:rPr lang="en-US" altLang="zh-TW" sz="2400" dirty="0" err="1">
-                <a:latin typeface="Times New Roman" panose="02020603050405020304" pitchFamily="18" charset="0"/>
-                <a:cs typeface="Times New Roman" panose="02020603050405020304" pitchFamily="18" charset="0"/>
-              </a:rPr>
-              <a:t>OpenFlow</a:t>
-            </a:r>
-            <a:r>
-              <a:rPr lang="en-US" altLang="zh-TW" sz="2400" dirty="0">
-                <a:latin typeface="Times New Roman" panose="02020603050405020304" pitchFamily="18" charset="0"/>
-                <a:cs typeface="Times New Roman" panose="02020603050405020304" pitchFamily="18" charset="0"/>
-              </a:rPr>
-              <a:t>, </a:t>
-            </a:r>
-            <a:r>
-              <a:rPr lang="en-US" altLang="zh-TW" sz="2400" dirty="0" err="1">
-                <a:latin typeface="Times New Roman" panose="02020603050405020304" pitchFamily="18" charset="0"/>
-                <a:cs typeface="Times New Roman" panose="02020603050405020304" pitchFamily="18" charset="0"/>
-              </a:rPr>
-              <a:t>NetFlow</a:t>
-            </a:r>
-            <a:r>
-              <a:rPr lang="en-US" altLang="zh-TW" sz="2400" dirty="0">
-                <a:latin typeface="Times New Roman" panose="02020603050405020304" pitchFamily="18" charset="0"/>
-                <a:cs typeface="Times New Roman" panose="02020603050405020304" pitchFamily="18" charset="0"/>
-              </a:rPr>
-              <a:t>, </a:t>
-            </a:r>
-            <a:r>
-              <a:rPr lang="en-US" altLang="zh-TW" sz="2400" dirty="0" err="1">
-                <a:latin typeface="Times New Roman" panose="02020603050405020304" pitchFamily="18" charset="0"/>
-                <a:cs typeface="Times New Roman" panose="02020603050405020304" pitchFamily="18" charset="0"/>
-              </a:rPr>
-              <a:t>sFlow</a:t>
-            </a:r>
-            <a:r>
-              <a:rPr lang="en-US" altLang="zh-TW" sz="2400" dirty="0">
-                <a:latin typeface="Times New Roman" panose="02020603050405020304" pitchFamily="18" charset="0"/>
-                <a:cs typeface="Times New Roman" panose="02020603050405020304" pitchFamily="18" charset="0"/>
-              </a:rPr>
-              <a:t>, SPAN, RSPAN. </a:t>
-            </a:r>
-            <a:endParaRPr lang="zh-TW" altLang="en-US" sz="2400" dirty="0">
-              <a:latin typeface="Times New Roman" panose="02020603050405020304" pitchFamily="18" charset="0"/>
-              <a:cs typeface="Times New Roman" panose="02020603050405020304" pitchFamily="18" charset="0"/>
-            </a:endParaRPr>
-          </a:p>
-        </p:txBody>
-      </p:sp>
-      <p:sp>
-        <p:nvSpPr>
-          <p:cNvPr id="4" name="灯片编号占位符 1">
-            <a:extLst>
-              <a:ext uri="{FF2B5EF4-FFF2-40B4-BE49-F238E27FC236}">
-                <a16:creationId xmlns:a16="http://schemas.microsoft.com/office/drawing/2014/main" id="{21CBBAE6-408D-D33C-02AE-769EFD3B77E6}"/>
-              </a:ext>
-            </a:extLst>
-          </p:cNvPr>
-          <p:cNvSpPr>
-            <a:spLocks noGrp="1"/>
-          </p:cNvSpPr>
-          <p:nvPr>
-            <p:ph type="sldNum" sz="quarter" idx="10"/>
-          </p:nvPr>
-        </p:nvSpPr>
-        <p:spPr>
-          <a:xfrm>
-            <a:off x="6831013" y="4893471"/>
-            <a:ext cx="2133600" cy="254794"/>
-          </a:xfrm>
-        </p:spPr>
-        <p:txBody>
-          <a:bodyPr/>
-          <a:lstStyle/>
-          <a:p>
-            <a:fld id="{D9B6BDF2-6896-4B98-8776-C18582F63BA5}" type="slidenum">
-              <a:rPr lang="zh-TW" altLang="en-US" smtClean="0"/>
-              <a:pPr/>
-              <a:t>31</a:t>
-            </a:fld>
-            <a:endParaRPr lang="zh-TW" altLang="en-US"/>
-          </a:p>
-        </p:txBody>
-      </p:sp>
-    </p:spTree>
-    <p:extLst>
-      <p:ext uri="{BB962C8B-B14F-4D97-AF65-F5344CB8AC3E}">
-        <p14:creationId xmlns:p14="http://schemas.microsoft.com/office/powerpoint/2010/main" val="317920969"/>
-      </p:ext>
-    </p:extLst>
-  </p:cSld>
-  <p:clrMapOvr>
-    <a:masterClrMapping/>
-  </p:clrMapOvr>
-</p:sld>
-</file>
-
-<file path=ppt/slides/slide32.xml><?xml version="1.0" encoding="utf-8"?>
-<p:sld xmlns:a="http://schemas.openxmlformats.org/drawingml/2006/main" xmlns:r="http://schemas.openxmlformats.org/officeDocument/2006/relationships" xmlns:p="http://schemas.openxmlformats.org/presentationml/2006/main">
-  <p:cSld>
-    <p:spTree>
-      <p:nvGrpSpPr>
-        <p:cNvPr id="1" name=""/>
-        <p:cNvGrpSpPr/>
-        <p:nvPr/>
-      </p:nvGrpSpPr>
-      <p:grpSpPr>
-        <a:xfrm>
-          <a:off x="0" y="0"/>
-          <a:ext cx="0" cy="0"/>
-          <a:chOff x="0" y="0"/>
-          <a:chExt cx="0" cy="0"/>
-        </a:xfrm>
-      </p:grpSpPr>
-      <p:sp>
-        <p:nvSpPr>
-          <p:cNvPr id="2" name="標題 1"/>
-          <p:cNvSpPr>
-            <a:spLocks noGrp="1"/>
-          </p:cNvSpPr>
-          <p:nvPr>
-            <p:ph type="title"/>
-          </p:nvPr>
-        </p:nvSpPr>
-        <p:spPr>
-          <a:xfrm>
-            <a:off x="863600" y="108349"/>
-            <a:ext cx="7812090" cy="519113"/>
-          </a:xfrm>
-        </p:spPr>
-        <p:txBody>
-          <a:bodyPr/>
-          <a:lstStyle/>
-          <a:p>
-            <a:r>
-              <a:rPr lang="en-US" altLang="zh-TW" dirty="0"/>
-              <a:t>Open </a:t>
-            </a:r>
-            <a:r>
-              <a:rPr lang="en-US" altLang="zh-TW" dirty="0" err="1"/>
-              <a:t>vSwitch</a:t>
-            </a:r>
-            <a:r>
-              <a:rPr lang="en-US" altLang="zh-TW" dirty="0"/>
-              <a:t> (2)</a:t>
-            </a:r>
-            <a:endParaRPr lang="zh-TW" altLang="en-US" dirty="0"/>
-          </a:p>
-        </p:txBody>
-      </p:sp>
-      <p:sp>
-        <p:nvSpPr>
-          <p:cNvPr id="4" name="內容版面配置區 3"/>
-          <p:cNvSpPr>
-            <a:spLocks noGrp="1"/>
-          </p:cNvSpPr>
-          <p:nvPr>
-            <p:ph idx="1"/>
-          </p:nvPr>
-        </p:nvSpPr>
-        <p:spPr>
-          <a:xfrm>
-            <a:off x="718457" y="829616"/>
-            <a:ext cx="7874000" cy="1231413"/>
-          </a:xfrm>
-        </p:spPr>
-        <p:txBody>
-          <a:bodyPr>
-            <a:noAutofit/>
-          </a:bodyPr>
-          <a:lstStyle/>
-          <a:p>
-            <a:r>
-              <a:rPr lang="en-US" altLang="zh-TW" sz="2400" dirty="0">
-                <a:latin typeface="Times New Roman" panose="02020603050405020304" pitchFamily="18" charset="0"/>
-                <a:cs typeface="Times New Roman" panose="02020603050405020304" pitchFamily="18" charset="0"/>
-              </a:rPr>
-              <a:t>When it comes to virtualization, open </a:t>
-            </a:r>
-            <a:r>
-              <a:rPr lang="en-US" altLang="zh-TW" sz="2400" dirty="0" err="1">
-                <a:latin typeface="Times New Roman" panose="02020603050405020304" pitchFamily="18" charset="0"/>
-                <a:cs typeface="Times New Roman" panose="02020603050405020304" pitchFamily="18" charset="0"/>
-              </a:rPr>
-              <a:t>vSwitch</a:t>
-            </a:r>
-            <a:r>
-              <a:rPr lang="en-US" altLang="zh-TW" sz="2400" dirty="0">
-                <a:latin typeface="Times New Roman" panose="02020603050405020304" pitchFamily="18" charset="0"/>
-                <a:cs typeface="Times New Roman" panose="02020603050405020304" pitchFamily="18" charset="0"/>
-              </a:rPr>
-              <a:t> is attractive because it provides the ability for a single controller to manage your virtual network across all your servers</a:t>
-            </a:r>
-            <a:endParaRPr lang="zh-TW" altLang="en-US" sz="2400" dirty="0">
-              <a:latin typeface="Times New Roman" panose="02020603050405020304" pitchFamily="18" charset="0"/>
-              <a:cs typeface="Times New Roman" panose="02020603050405020304" pitchFamily="18" charset="0"/>
-            </a:endParaRPr>
-          </a:p>
-        </p:txBody>
-      </p:sp>
-      <p:pic>
-        <p:nvPicPr>
-          <p:cNvPr id="20482" name="Picture 2" descr="open vswitch"/>
-          <p:cNvPicPr>
-            <a:picLocks noChangeAspect="1" noChangeArrowheads="1"/>
-          </p:cNvPicPr>
-          <p:nvPr/>
-        </p:nvPicPr>
-        <p:blipFill>
-          <a:blip r:embed="rId2">
-            <a:extLst>
-              <a:ext uri="{28A0092B-C50C-407E-A947-70E740481C1C}">
-                <a14:useLocalDpi xmlns:a14="http://schemas.microsoft.com/office/drawing/2010/main" val="0"/>
-              </a:ext>
-            </a:extLst>
-          </a:blip>
-          <a:srcRect/>
-          <a:stretch>
-            <a:fillRect/>
-          </a:stretch>
-        </p:blipFill>
-        <p:spPr bwMode="auto">
-          <a:xfrm>
-            <a:off x="2697984" y="2061028"/>
-            <a:ext cx="3818930" cy="2540347"/>
-          </a:xfrm>
-          <a:prstGeom prst="rect">
-            <a:avLst/>
-          </a:prstGeom>
-          <a:noFill/>
-          <a:extLst>
-            <a:ext uri="{909E8E84-426E-40DD-AFC4-6F175D3DCCD1}">
-              <a14:hiddenFill xmlns:a14="http://schemas.microsoft.com/office/drawing/2010/main">
-                <a:solidFill>
-                  <a:srgbClr val="FFFFFF"/>
-                </a:solidFill>
-              </a14:hiddenFill>
-            </a:ext>
-          </a:extLst>
-        </p:spPr>
-      </p:pic>
-      <p:sp>
-        <p:nvSpPr>
-          <p:cNvPr id="3" name="灯片编号占位符 1">
-            <a:extLst>
-              <a:ext uri="{FF2B5EF4-FFF2-40B4-BE49-F238E27FC236}">
-                <a16:creationId xmlns:a16="http://schemas.microsoft.com/office/drawing/2014/main" id="{77A6C85D-EAD5-E3ED-94B0-053E952FF6FD}"/>
-              </a:ext>
-            </a:extLst>
-          </p:cNvPr>
-          <p:cNvSpPr>
-            <a:spLocks noGrp="1"/>
-          </p:cNvSpPr>
-          <p:nvPr>
-            <p:ph type="sldNum" sz="quarter" idx="10"/>
-          </p:nvPr>
-        </p:nvSpPr>
-        <p:spPr>
-          <a:xfrm>
-            <a:off x="6831013" y="4893471"/>
-            <a:ext cx="2133600" cy="254794"/>
-          </a:xfrm>
-        </p:spPr>
-        <p:txBody>
-          <a:bodyPr/>
-          <a:lstStyle/>
-          <a:p>
-            <a:fld id="{D9B6BDF2-6896-4B98-8776-C18582F63BA5}" type="slidenum">
-              <a:rPr lang="zh-TW" altLang="en-US" smtClean="0"/>
-              <a:pPr/>
-              <a:t>32</a:t>
-            </a:fld>
-            <a:endParaRPr lang="zh-TW" altLang="en-US"/>
-          </a:p>
-        </p:txBody>
-      </p:sp>
-    </p:spTree>
-    <p:extLst>
-      <p:ext uri="{BB962C8B-B14F-4D97-AF65-F5344CB8AC3E}">
-        <p14:creationId xmlns:p14="http://schemas.microsoft.com/office/powerpoint/2010/main" val="2881931910"/>
-      </p:ext>
-    </p:extLst>
-  </p:cSld>
-  <p:clrMapOvr>
-    <a:masterClrMapping/>
-  </p:clrMapOvr>
-</p:sld>
-</file>
-
-<file path=ppt/slides/slide33.xml><?xml version="1.0" encoding="utf-8"?>
-<p:sld xmlns:a="http://schemas.openxmlformats.org/drawingml/2006/main" xmlns:r="http://schemas.openxmlformats.org/officeDocument/2006/relationships" xmlns:p="http://schemas.openxmlformats.org/presentationml/2006/main">
-  <p:cSld>
-    <p:spTree>
-      <p:nvGrpSpPr>
-        <p:cNvPr id="1" name=""/>
-        <p:cNvGrpSpPr/>
-        <p:nvPr/>
-      </p:nvGrpSpPr>
-      <p:grpSpPr>
-        <a:xfrm>
-          <a:off x="0" y="0"/>
-          <a:ext cx="0" cy="0"/>
-          <a:chOff x="0" y="0"/>
-          <a:chExt cx="0" cy="0"/>
-        </a:xfrm>
-      </p:grpSpPr>
-      <p:sp>
-        <p:nvSpPr>
-          <p:cNvPr id="2" name="標題 1"/>
-          <p:cNvSpPr>
-            <a:spLocks noGrp="1"/>
-          </p:cNvSpPr>
-          <p:nvPr>
-            <p:ph type="title"/>
-          </p:nvPr>
-        </p:nvSpPr>
-        <p:spPr>
-          <a:xfrm>
-            <a:off x="965200" y="108349"/>
-            <a:ext cx="7710490" cy="519113"/>
-          </a:xfrm>
-        </p:spPr>
-        <p:txBody>
-          <a:bodyPr/>
-          <a:lstStyle/>
-          <a:p>
-            <a:r>
               <a:rPr lang="en-US" altLang="zh-TW" dirty="0" err="1"/>
               <a:t>InfiniBand</a:t>
             </a:r>
@@ -11870,8 +11678,8 @@
         </p:nvSpPr>
         <p:spPr>
           <a:xfrm>
-            <a:off x="1046467" y="829657"/>
-            <a:ext cx="7115400" cy="1888143"/>
+            <a:off x="965200" y="897391"/>
+            <a:ext cx="7106931" cy="1989742"/>
           </a:xfrm>
         </p:spPr>
         <p:txBody>
@@ -11944,7 +11752,7 @@
             <a:fld id="{D9B6BDF2-6896-4B98-8776-C18582F63BA5}" type="slidenum">
               <a:rPr lang="zh-TW" altLang="en-US" smtClean="0"/>
               <a:pPr/>
-              <a:t>33</a:t>
+              <a:t>31</a:t>
             </a:fld>
             <a:endParaRPr lang="zh-TW" altLang="en-US"/>
           </a:p>
@@ -12035,6 +11843,363 @@
 </p:sld>
 </file>
 
+<file path=ppt/slides/slide32.xml><?xml version="1.0" encoding="utf-8"?>
+<p:sld xmlns:a="http://schemas.openxmlformats.org/drawingml/2006/main" xmlns:r="http://schemas.openxmlformats.org/officeDocument/2006/relationships" xmlns:p="http://schemas.openxmlformats.org/presentationml/2006/main">
+  <p:cSld>
+    <p:spTree>
+      <p:nvGrpSpPr>
+        <p:cNvPr id="1" name=""/>
+        <p:cNvGrpSpPr/>
+        <p:nvPr/>
+      </p:nvGrpSpPr>
+      <p:grpSpPr>
+        <a:xfrm>
+          <a:off x="0" y="0"/>
+          <a:ext cx="0" cy="0"/>
+          <a:chOff x="0" y="0"/>
+          <a:chExt cx="0" cy="0"/>
+        </a:xfrm>
+      </p:grpSpPr>
+      <p:sp>
+        <p:nvSpPr>
+          <p:cNvPr id="4" name="標題 3"/>
+          <p:cNvSpPr>
+            <a:spLocks noGrp="1"/>
+          </p:cNvSpPr>
+          <p:nvPr>
+            <p:ph type="title"/>
+          </p:nvPr>
+        </p:nvSpPr>
+        <p:spPr/>
+        <p:txBody>
+          <a:bodyPr/>
+          <a:lstStyle/>
+          <a:p>
+            <a:r>
+              <a:rPr lang="en-US" altLang="zh-TW" dirty="0"/>
+              <a:t>Virtualization Techniques</a:t>
+            </a:r>
+            <a:endParaRPr lang="zh-TW" altLang="en-US" dirty="0"/>
+          </a:p>
+        </p:txBody>
+      </p:sp>
+      <p:sp>
+        <p:nvSpPr>
+          <p:cNvPr id="5" name="文字版面配置區 4"/>
+          <p:cNvSpPr>
+            <a:spLocks noGrp="1"/>
+          </p:cNvSpPr>
+          <p:nvPr>
+            <p:ph type="body" idx="1"/>
+          </p:nvPr>
+        </p:nvSpPr>
+        <p:spPr>
+          <a:xfrm>
+            <a:off x="1684735" y="1383618"/>
+            <a:ext cx="5829300" cy="1921558"/>
+          </a:xfrm>
+        </p:spPr>
+        <p:txBody>
+          <a:bodyPr>
+            <a:normAutofit fontScale="70000" lnSpcReduction="20000"/>
+          </a:bodyPr>
+          <a:lstStyle/>
+          <a:p>
+            <a:r>
+              <a:rPr lang="en-US" altLang="zh-TW" dirty="0">
+                <a:solidFill>
+                  <a:schemeClr val="bg1">
+                    <a:lumMod val="50000"/>
+                  </a:schemeClr>
+                </a:solidFill>
+              </a:rPr>
+              <a:t>System Virtualization</a:t>
+            </a:r>
+          </a:p>
+          <a:p>
+            <a:r>
+              <a:rPr lang="en-US" altLang="zh-TW" dirty="0">
+                <a:solidFill>
+                  <a:schemeClr val="bg1">
+                    <a:lumMod val="50000"/>
+                  </a:schemeClr>
+                </a:solidFill>
+              </a:rPr>
+              <a:t>Storage Virtualization</a:t>
+            </a:r>
+          </a:p>
+          <a:p>
+            <a:r>
+              <a:rPr lang="en-US" altLang="zh-TW" dirty="0">
+                <a:solidFill>
+                  <a:schemeClr val="bg1">
+                    <a:lumMod val="50000"/>
+                  </a:schemeClr>
+                </a:solidFill>
+              </a:rPr>
+              <a:t>Network Virtualization	</a:t>
+            </a:r>
+          </a:p>
+          <a:p>
+            <a:r>
+              <a:rPr lang="en-US" altLang="zh-TW" b="1" dirty="0">
+                <a:solidFill>
+                  <a:srgbClr val="FF0000"/>
+                </a:solidFill>
+              </a:rPr>
+              <a:t>GPU Virtualization</a:t>
+            </a:r>
+          </a:p>
+          <a:p>
+            <a:r>
+              <a:rPr lang="en-US" altLang="zh-TW" dirty="0">
+                <a:solidFill>
+                  <a:schemeClr val="bg1">
+                    <a:lumMod val="50000"/>
+                  </a:schemeClr>
+                </a:solidFill>
+              </a:rPr>
+              <a:t>Software Virtualization</a:t>
+            </a:r>
+          </a:p>
+          <a:p>
+            <a:r>
+              <a:rPr lang="en-US" altLang="zh-TW" dirty="0">
+                <a:solidFill>
+                  <a:schemeClr val="bg1">
+                    <a:lumMod val="50000"/>
+                  </a:schemeClr>
+                </a:solidFill>
+              </a:rPr>
+              <a:t>Hardware Support  Virtualization</a:t>
+            </a:r>
+          </a:p>
+        </p:txBody>
+      </p:sp>
+      <p:sp>
+        <p:nvSpPr>
+          <p:cNvPr id="2" name="灯片编号占位符 1">
+            <a:extLst>
+              <a:ext uri="{FF2B5EF4-FFF2-40B4-BE49-F238E27FC236}">
+                <a16:creationId xmlns:a16="http://schemas.microsoft.com/office/drawing/2014/main" id="{7450BE8F-6106-8E17-1F0A-A15002A15AC6}"/>
+              </a:ext>
+            </a:extLst>
+          </p:cNvPr>
+          <p:cNvSpPr>
+            <a:spLocks noGrp="1"/>
+          </p:cNvSpPr>
+          <p:nvPr>
+            <p:ph type="sldNum" sz="quarter" idx="10"/>
+          </p:nvPr>
+        </p:nvSpPr>
+        <p:spPr>
+          <a:xfrm>
+            <a:off x="6831013" y="4893471"/>
+            <a:ext cx="2133600" cy="254794"/>
+          </a:xfrm>
+        </p:spPr>
+        <p:txBody>
+          <a:bodyPr/>
+          <a:lstStyle/>
+          <a:p>
+            <a:fld id="{D9B6BDF2-6896-4B98-8776-C18582F63BA5}" type="slidenum">
+              <a:rPr lang="zh-TW" altLang="en-US" smtClean="0"/>
+              <a:pPr/>
+              <a:t>32</a:t>
+            </a:fld>
+            <a:endParaRPr lang="zh-TW" altLang="en-US"/>
+          </a:p>
+        </p:txBody>
+      </p:sp>
+    </p:spTree>
+    <p:extLst>
+      <p:ext uri="{BB962C8B-B14F-4D97-AF65-F5344CB8AC3E}">
+        <p14:creationId xmlns:p14="http://schemas.microsoft.com/office/powerpoint/2010/main" val="2215157238"/>
+      </p:ext>
+    </p:extLst>
+  </p:cSld>
+  <p:clrMapOvr>
+    <a:masterClrMapping/>
+  </p:clrMapOvr>
+</p:sld>
+</file>
+
+<file path=ppt/slides/slide33.xml><?xml version="1.0" encoding="utf-8"?>
+<p:sld xmlns:a="http://schemas.openxmlformats.org/drawingml/2006/main" xmlns:r="http://schemas.openxmlformats.org/officeDocument/2006/relationships" xmlns:p="http://schemas.openxmlformats.org/presentationml/2006/main">
+  <p:cSld>
+    <p:spTree>
+      <p:nvGrpSpPr>
+        <p:cNvPr id="1" name=""/>
+        <p:cNvGrpSpPr/>
+        <p:nvPr/>
+      </p:nvGrpSpPr>
+      <p:grpSpPr>
+        <a:xfrm>
+          <a:off x="0" y="0"/>
+          <a:ext cx="0" cy="0"/>
+          <a:chOff x="0" y="0"/>
+          <a:chExt cx="0" cy="0"/>
+        </a:xfrm>
+      </p:grpSpPr>
+      <p:sp>
+        <p:nvSpPr>
+          <p:cNvPr id="2" name="標題 1"/>
+          <p:cNvSpPr>
+            <a:spLocks noGrp="1"/>
+          </p:cNvSpPr>
+          <p:nvPr>
+            <p:ph type="title"/>
+          </p:nvPr>
+        </p:nvSpPr>
+        <p:spPr>
+          <a:xfrm>
+            <a:off x="870857" y="91415"/>
+            <a:ext cx="7804833" cy="519113"/>
+          </a:xfrm>
+        </p:spPr>
+        <p:txBody>
+          <a:bodyPr>
+            <a:noAutofit/>
+          </a:bodyPr>
+          <a:lstStyle/>
+          <a:p>
+            <a:r>
+              <a:rPr lang="en-US" altLang="zh-TW" dirty="0"/>
+              <a:t>Graphics </a:t>
+            </a:r>
+            <a:r>
+              <a:rPr lang="en-US" altLang="zh-CN" dirty="0"/>
+              <a:t>P</a:t>
+            </a:r>
+            <a:r>
+              <a:rPr lang="en-US" altLang="zh-TW" dirty="0"/>
+              <a:t>rocessing Unit (GPU) </a:t>
+            </a:r>
+            <a:endParaRPr lang="zh-TW" altLang="en-US" dirty="0"/>
+          </a:p>
+        </p:txBody>
+      </p:sp>
+      <p:sp>
+        <p:nvSpPr>
+          <p:cNvPr id="3" name="內容版面配置區 2"/>
+          <p:cNvSpPr>
+            <a:spLocks noGrp="1"/>
+          </p:cNvSpPr>
+          <p:nvPr>
+            <p:ph idx="1"/>
+          </p:nvPr>
+        </p:nvSpPr>
+        <p:spPr>
+          <a:xfrm>
+            <a:off x="881086" y="829649"/>
+            <a:ext cx="7381827" cy="1196023"/>
+          </a:xfrm>
+        </p:spPr>
+        <p:txBody>
+          <a:bodyPr>
+            <a:normAutofit/>
+          </a:bodyPr>
+          <a:lstStyle/>
+          <a:p>
+            <a:r>
+              <a:rPr lang="en-US" altLang="zh-TW" sz="2200" dirty="0">
+                <a:latin typeface="Times New Roman" panose="02020603050405020304" pitchFamily="18" charset="0"/>
+                <a:cs typeface="Times New Roman" panose="02020603050405020304" pitchFamily="18" charset="0"/>
+              </a:rPr>
+              <a:t>A Graphics Processing Units (GPUs) are high-performance many-core processors capable of very high computation and data throughput.</a:t>
+            </a:r>
+          </a:p>
+        </p:txBody>
+      </p:sp>
+      <p:pic>
+        <p:nvPicPr>
+          <p:cNvPr id="2050" name="Picture 2" descr="https://encrypted-tbn1.gstatic.com/images?q=tbn:ANd9GcQ8KuAvXmzjJs6jCraVgl2QXhl7c6ofGHViGXpwQ8TJss6kGNNs"/>
+          <p:cNvPicPr>
+            <a:picLocks noChangeAspect="1" noChangeArrowheads="1"/>
+          </p:cNvPicPr>
+          <p:nvPr/>
+        </p:nvPicPr>
+        <p:blipFill>
+          <a:blip r:embed="rId2">
+            <a:extLst>
+              <a:ext uri="{28A0092B-C50C-407E-A947-70E740481C1C}">
+                <a14:useLocalDpi xmlns:a14="http://schemas.microsoft.com/office/drawing/2010/main" val="0"/>
+              </a:ext>
+            </a:extLst>
+          </a:blip>
+          <a:srcRect/>
+          <a:stretch>
+            <a:fillRect/>
+          </a:stretch>
+        </p:blipFill>
+        <p:spPr bwMode="auto">
+          <a:xfrm>
+            <a:off x="3062313" y="2447198"/>
+            <a:ext cx="3019374" cy="2059214"/>
+          </a:xfrm>
+          <a:prstGeom prst="rect">
+            <a:avLst/>
+          </a:prstGeom>
+          <a:noFill/>
+          <a:extLst>
+            <a:ext uri="{909E8E84-426E-40DD-AFC4-6F175D3DCCD1}">
+              <a14:hiddenFill xmlns:a14="http://schemas.microsoft.com/office/drawing/2010/main">
+                <a:solidFill>
+                  <a:srgbClr val="FFFFFF"/>
+                </a:solidFill>
+              </a14:hiddenFill>
+            </a:ext>
+          </a:extLst>
+        </p:spPr>
+      </p:pic>
+      <p:sp>
+        <p:nvSpPr>
+          <p:cNvPr id="4" name="灯片编号占位符 1">
+            <a:extLst>
+              <a:ext uri="{FF2B5EF4-FFF2-40B4-BE49-F238E27FC236}">
+                <a16:creationId xmlns:a16="http://schemas.microsoft.com/office/drawing/2014/main" id="{921D9793-B552-307C-2CB2-48B374B638F8}"/>
+              </a:ext>
+            </a:extLst>
+          </p:cNvPr>
+          <p:cNvSpPr>
+            <a:spLocks noGrp="1"/>
+          </p:cNvSpPr>
+          <p:nvPr>
+            <p:ph type="sldNum" sz="quarter" idx="10"/>
+          </p:nvPr>
+        </p:nvSpPr>
+        <p:spPr>
+          <a:xfrm>
+            <a:off x="6831013" y="4893471"/>
+            <a:ext cx="2133600" cy="254794"/>
+          </a:xfrm>
+        </p:spPr>
+        <p:txBody>
+          <a:bodyPr/>
+          <a:lstStyle/>
+          <a:p>
+            <a:fld id="{D9B6BDF2-6896-4B98-8776-C18582F63BA5}" type="slidenum">
+              <a:rPr lang="zh-TW" altLang="en-US" smtClean="0"/>
+              <a:pPr/>
+              <a:t>33</a:t>
+            </a:fld>
+            <a:endParaRPr lang="zh-TW" altLang="en-US"/>
+          </a:p>
+        </p:txBody>
+      </p:sp>
+    </p:spTree>
+    <p:extLst>
+      <p:ext uri="{BB962C8B-B14F-4D97-AF65-F5344CB8AC3E}">
+        <p14:creationId xmlns:p14="http://schemas.microsoft.com/office/powerpoint/2010/main" val="1845933596"/>
+      </p:ext>
+    </p:extLst>
+  </p:cSld>
+  <p:clrMapOvr>
+    <a:masterClrMapping/>
+  </p:clrMapOvr>
+</p:sld>
+</file>
+
 <file path=ppt/slides/slide34.xml><?xml version="1.0" encoding="utf-8"?>
 <p:sld xmlns:a="http://schemas.openxmlformats.org/drawingml/2006/main" xmlns:r="http://schemas.openxmlformats.org/officeDocument/2006/relationships" xmlns:p="http://schemas.openxmlformats.org/presentationml/2006/main">
   <p:cSld>
@@ -12054,7 +12219,7 @@
       </p:grpSpPr>
       <p:sp>
         <p:nvSpPr>
-          <p:cNvPr id="4" name="標題 3"/>
+          <p:cNvPr id="2" name="標題 1"/>
           <p:cNvSpPr>
             <a:spLocks noGrp="1"/>
           </p:cNvSpPr>
@@ -12062,118 +12227,109 @@
             <p:ph type="title"/>
           </p:nvPr>
         </p:nvSpPr>
-        <p:spPr/>
-        <p:txBody>
-          <a:bodyPr/>
-          <a:lstStyle/>
-          <a:p>
-            <a:r>
-              <a:rPr lang="en-US" altLang="zh-TW" dirty="0"/>
-              <a:t>Virtualization Techniques</a:t>
-            </a:r>
-            <a:endParaRPr lang="zh-TW" altLang="en-US" dirty="0"/>
-          </a:p>
-        </p:txBody>
-      </p:sp>
-      <p:sp>
-        <p:nvSpPr>
-          <p:cNvPr id="5" name="文字版面配置區 4"/>
-          <p:cNvSpPr>
-            <a:spLocks noGrp="1"/>
-          </p:cNvSpPr>
-          <p:nvPr>
-            <p:ph type="body" idx="1"/>
-          </p:nvPr>
-        </p:nvSpPr>
         <p:spPr>
           <a:xfrm>
-            <a:off x="1684735" y="1383618"/>
-            <a:ext cx="5829300" cy="1921558"/>
+            <a:off x="878113" y="108349"/>
+            <a:ext cx="8003419" cy="519113"/>
           </a:xfrm>
         </p:spPr>
         <p:txBody>
           <a:bodyPr>
-            <a:normAutofit fontScale="70000" lnSpcReduction="20000"/>
+            <a:noAutofit/>
           </a:bodyPr>
           <a:lstStyle/>
           <a:p>
             <a:r>
-              <a:rPr lang="en-US" altLang="zh-TW" dirty="0">
+              <a:rPr lang="en-US" altLang="zh-TW" sz="3200" dirty="0"/>
+              <a:t>Performance Comparison - GPU vs. CPU</a:t>
+            </a:r>
+            <a:endParaRPr lang="zh-TW" altLang="en-US" sz="3200" dirty="0"/>
+          </a:p>
+        </p:txBody>
+      </p:sp>
+      <p:sp>
+        <p:nvSpPr>
+          <p:cNvPr id="3" name="內容版面配置區 2"/>
+          <p:cNvSpPr>
+            <a:spLocks noGrp="1"/>
+          </p:cNvSpPr>
+          <p:nvPr>
+            <p:ph idx="1"/>
+          </p:nvPr>
+        </p:nvSpPr>
+        <p:spPr>
+          <a:xfrm>
+            <a:off x="927029" y="809724"/>
+            <a:ext cx="7026800" cy="1019075"/>
+          </a:xfrm>
+        </p:spPr>
+        <p:txBody>
+          <a:bodyPr>
+            <a:noAutofit/>
+          </a:bodyPr>
+          <a:lstStyle/>
+          <a:p>
+            <a:r>
+              <a:rPr lang="en-US" altLang="zh-TW" sz="2000" dirty="0">
+                <a:latin typeface="Times New Roman" panose="02020603050405020304" pitchFamily="18" charset="0"/>
+                <a:cs typeface="Times New Roman" panose="02020603050405020304" pitchFamily="18" charset="0"/>
+              </a:rPr>
+              <a:t>While the Intel Core I7 980X (extreme edition) gives us around 110GFLOPS,  GPUs such as AMD Radeon 6970 and NVidia C2090 offer more than 660GFLOPS.</a:t>
+            </a:r>
+            <a:endParaRPr lang="zh-TW" altLang="en-US" sz="2000" dirty="0">
+              <a:latin typeface="Times New Roman" panose="02020603050405020304" pitchFamily="18" charset="0"/>
+              <a:cs typeface="Times New Roman" panose="02020603050405020304" pitchFamily="18" charset="0"/>
+            </a:endParaRPr>
+          </a:p>
+        </p:txBody>
+      </p:sp>
+      <p:pic>
+        <p:nvPicPr>
+          <p:cNvPr id="1028" name="Picture 4" descr="http://3.bp.blogspot.com/-CMJkP4H8_tE/TfOYpCqBe7I/AAAAAAAAA9E/sBjmlolpCDg/s1600/chart1.png"/>
+          <p:cNvPicPr>
+            <a:picLocks noChangeAspect="1" noChangeArrowheads="1"/>
+          </p:cNvPicPr>
+          <p:nvPr/>
+        </p:nvPicPr>
+        <p:blipFill>
+          <a:blip r:embed="rId2">
+            <a:extLst>
+              <a:ext uri="{28A0092B-C50C-407E-A947-70E740481C1C}">
+                <a14:useLocalDpi xmlns:a14="http://schemas.microsoft.com/office/drawing/2010/main" val="0"/>
+              </a:ext>
+            </a:extLst>
+          </a:blip>
+          <a:srcRect/>
+          <a:stretch>
+            <a:fillRect/>
+          </a:stretch>
+        </p:blipFill>
+        <p:spPr bwMode="auto">
+          <a:xfrm>
+            <a:off x="2479943" y="1915884"/>
+            <a:ext cx="4231062" cy="2618549"/>
+          </a:xfrm>
+          <a:prstGeom prst="rect">
+            <a:avLst/>
+          </a:prstGeom>
+          <a:noFill/>
+          <a:extLst>
+            <a:ext uri="{909E8E84-426E-40DD-AFC4-6F175D3DCCD1}">
+              <a14:hiddenFill xmlns:a14="http://schemas.microsoft.com/office/drawing/2010/main">
                 <a:solidFill>
-                  <a:schemeClr val="bg1">
-                    <a:lumMod val="50000"/>
-                  </a:schemeClr>
+                  <a:srgbClr val="FFFFFF"/>
                 </a:solidFill>
-              </a:rPr>
-              <a:t>System Virtualization</a:t>
-            </a:r>
-          </a:p>
-          <a:p>
-            <a:r>
-              <a:rPr lang="en-US" altLang="zh-TW" dirty="0">
-                <a:solidFill>
-                  <a:schemeClr val="bg1">
-                    <a:lumMod val="50000"/>
-                  </a:schemeClr>
-                </a:solidFill>
-              </a:rPr>
-              <a:t>Storage Virtualization</a:t>
-            </a:r>
-          </a:p>
-          <a:p>
-            <a:r>
-              <a:rPr lang="en-US" altLang="zh-TW" dirty="0">
-                <a:solidFill>
-                  <a:schemeClr val="bg1">
-                    <a:lumMod val="50000"/>
-                  </a:schemeClr>
-                </a:solidFill>
-              </a:rPr>
-              <a:t>Network Virtualization	</a:t>
-            </a:r>
-          </a:p>
-          <a:p>
-            <a:r>
-              <a:rPr lang="en-US" altLang="zh-TW" b="1" dirty="0">
-                <a:solidFill>
-                  <a:srgbClr val="FF0000"/>
-                </a:solidFill>
-              </a:rPr>
-              <a:t>GPU Virtualization</a:t>
-            </a:r>
-          </a:p>
-          <a:p>
-            <a:r>
-              <a:rPr lang="en-US" altLang="zh-TW" dirty="0">
-                <a:solidFill>
-                  <a:schemeClr val="bg1">
-                    <a:lumMod val="50000"/>
-                  </a:schemeClr>
-                </a:solidFill>
-              </a:rPr>
-              <a:t>Software Virtualization</a:t>
-            </a:r>
-          </a:p>
-          <a:p>
-            <a:r>
-              <a:rPr lang="en-US" altLang="zh-TW" dirty="0">
-                <a:solidFill>
-                  <a:schemeClr val="bg1">
-                    <a:lumMod val="50000"/>
-                  </a:schemeClr>
-                </a:solidFill>
-              </a:rPr>
-              <a:t>Hardware Support  Virtualization</a:t>
-            </a:r>
-          </a:p>
-        </p:txBody>
-      </p:sp>
-      <p:sp>
-        <p:nvSpPr>
-          <p:cNvPr id="2" name="灯片编号占位符 1">
+              </a14:hiddenFill>
+            </a:ext>
+          </a:extLst>
+        </p:spPr>
+      </p:pic>
+      <p:sp>
+        <p:nvSpPr>
+          <p:cNvPr id="4" name="灯片编号占位符 1">
             <a:extLst>
               <a:ext uri="{FF2B5EF4-FFF2-40B4-BE49-F238E27FC236}">
-                <a16:creationId xmlns:a16="http://schemas.microsoft.com/office/drawing/2014/main" id="{7450BE8F-6106-8E17-1F0A-A15002A15AC6}"/>
+                <a16:creationId xmlns:a16="http://schemas.microsoft.com/office/drawing/2014/main" id="{99B69390-24CE-B6CE-51FF-E71F2AE7D0B6}"/>
               </a:ext>
             </a:extLst>
           </p:cNvPr>
@@ -12206,7 +12362,7 @@
     </p:spTree>
     <p:extLst>
       <p:ext uri="{BB962C8B-B14F-4D97-AF65-F5344CB8AC3E}">
-        <p14:creationId xmlns:p14="http://schemas.microsoft.com/office/powerpoint/2010/main" val="2215157238"/>
+        <p14:creationId xmlns:p14="http://schemas.microsoft.com/office/powerpoint/2010/main" val="1737721707"/>
       </p:ext>
     </p:extLst>
   </p:cSld>
@@ -12245,46 +12401,19 @@
         </p:nvSpPr>
         <p:spPr>
           <a:xfrm>
-            <a:off x="870857" y="108349"/>
-            <a:ext cx="7804833" cy="519113"/>
-          </a:xfrm>
-        </p:spPr>
-        <p:txBody>
-          <a:bodyPr>
-            <a:noAutofit/>
-          </a:bodyPr>
+            <a:off x="907143" y="108349"/>
+            <a:ext cx="7768547" cy="519113"/>
+          </a:xfrm>
+        </p:spPr>
+        <p:txBody>
+          <a:bodyPr/>
           <a:lstStyle/>
           <a:p>
             <a:r>
               <a:rPr lang="en-US" altLang="zh-TW" dirty="0"/>
-              <a:t>Graphics </a:t>
-            </a:r>
-            <a:r>
-              <a:rPr lang="en-US" altLang="zh-CN" dirty="0"/>
-              <a:t>P</a:t>
-            </a:r>
-            <a:r>
-              <a:rPr lang="en-US" altLang="zh-TW" dirty="0"/>
-              <a:t>rocessing Unit </a:t>
-            </a:r>
-            <a:r>
-              <a:rPr lang="en-US" altLang="zh-TW" dirty="0">
-                <a:latin typeface="Times New Roman" panose="02020603050405020304" pitchFamily="18" charset="0"/>
-                <a:cs typeface="Times New Roman" panose="02020603050405020304" pitchFamily="18" charset="0"/>
-              </a:rPr>
-              <a:t>(</a:t>
-            </a:r>
-            <a:r>
-              <a:rPr lang="en-US" altLang="zh-CN" dirty="0">
-                <a:latin typeface="Times New Roman" panose="02020603050405020304" pitchFamily="18" charset="0"/>
-                <a:cs typeface="Times New Roman" panose="02020603050405020304" pitchFamily="18" charset="0"/>
-              </a:rPr>
-              <a:t>GPU)</a:t>
-            </a:r>
-            <a:endParaRPr lang="zh-TW" altLang="en-US" dirty="0">
-              <a:latin typeface="Times New Roman" panose="02020603050405020304" pitchFamily="18" charset="0"/>
-              <a:cs typeface="Times New Roman" panose="02020603050405020304" pitchFamily="18" charset="0"/>
-            </a:endParaRPr>
+              <a:t>GPGPU</a:t>
+            </a:r>
+            <a:endParaRPr lang="zh-TW" altLang="en-US" dirty="0"/>
           </a:p>
         </p:txBody>
       </p:sp>
@@ -12300,8 +12429,8 @@
         </p:nvSpPr>
         <p:spPr>
           <a:xfrm>
-            <a:off x="881086" y="829649"/>
-            <a:ext cx="7381827" cy="1196023"/>
+            <a:off x="972456" y="844153"/>
+            <a:ext cx="7416801" cy="3343218"/>
           </a:xfrm>
         </p:spPr>
         <p:txBody>
@@ -12315,58 +12444,35 @@
                 <a:latin typeface="Times New Roman" panose="02020603050405020304" pitchFamily="18" charset="0"/>
                 <a:cs typeface="Times New Roman" panose="02020603050405020304" pitchFamily="18" charset="0"/>
               </a:rPr>
-              <a:t>A Graphics Processing Units (GPUs) are high-performance many-core processors capable of very high computation and data throughput.</a:t>
-            </a:r>
-          </a:p>
-        </p:txBody>
-      </p:sp>
-      <p:pic>
-        <p:nvPicPr>
-          <p:cNvPr id="2050" name="Picture 2" descr="https://encrypted-tbn1.gstatic.com/images?q=tbn:ANd9GcQ8KuAvXmzjJs6jCraVgl2QXhl7c6ofGHViGXpwQ8TJss6kGNNs"/>
-          <p:cNvPicPr>
-            <a:picLocks noChangeAspect="1" noChangeArrowheads="1"/>
-          </p:cNvPicPr>
-          <p:nvPr/>
-        </p:nvPicPr>
-        <p:blipFill>
-          <a:blip r:embed="rId2">
-            <a:extLst>
-              <a:ext uri="{28A0092B-C50C-407E-A947-70E740481C1C}">
-                <a14:useLocalDpi xmlns:a14="http://schemas.microsoft.com/office/drawing/2010/main" val="0"/>
-              </a:ext>
-            </a:extLst>
-          </a:blip>
-          <a:srcRect/>
-          <a:stretch>
-            <a:fillRect/>
-          </a:stretch>
-        </p:blipFill>
-        <p:spPr bwMode="auto">
-          <a:xfrm>
-            <a:off x="3062313" y="2447198"/>
-            <a:ext cx="3019374" cy="2059214"/>
-          </a:xfrm>
-          <a:prstGeom prst="rect">
-            <a:avLst/>
-          </a:prstGeom>
-          <a:noFill/>
-          <a:extLst>
-            <a:ext uri="{909E8E84-426E-40DD-AFC4-6F175D3DCCD1}">
-              <a14:hiddenFill xmlns:a14="http://schemas.microsoft.com/office/drawing/2010/main">
-                <a:solidFill>
-                  <a:srgbClr val="FFFFFF"/>
-                </a:solidFill>
-              </a14:hiddenFill>
-            </a:ext>
-          </a:extLst>
-        </p:spPr>
-      </p:pic>
+              <a:t>High performance of modern Graphics Processing Units may be utilized not only for graphics related application but also for general computing. </a:t>
+            </a:r>
+          </a:p>
+          <a:p>
+            <a:r>
+              <a:rPr lang="en-US" altLang="zh-TW" sz="2200" dirty="0">
+                <a:latin typeface="Times New Roman" panose="02020603050405020304" pitchFamily="18" charset="0"/>
+                <a:cs typeface="Times New Roman" panose="02020603050405020304" pitchFamily="18" charset="0"/>
+              </a:rPr>
+              <a:t>Today’s GPUs are general-purpose parallel processors with support for accessible programming interfaces and industry-standard languages such as C.  </a:t>
+            </a:r>
+          </a:p>
+          <a:p>
+            <a:r>
+              <a:rPr lang="en-US" altLang="zh-TW" sz="2200" dirty="0">
+                <a:latin typeface="Times New Roman" panose="02020603050405020304" pitchFamily="18" charset="0"/>
+                <a:cs typeface="Times New Roman" panose="02020603050405020304" pitchFamily="18" charset="0"/>
+              </a:rPr>
+              <a:t>Developers who port their applications to GPUs often achieve speedups of orders of magnitude vs. optimized CPU implementations. </a:t>
+            </a:r>
+          </a:p>
+        </p:txBody>
+      </p:sp>
       <p:sp>
         <p:nvSpPr>
           <p:cNvPr id="4" name="灯片编号占位符 1">
             <a:extLst>
               <a:ext uri="{FF2B5EF4-FFF2-40B4-BE49-F238E27FC236}">
-                <a16:creationId xmlns:a16="http://schemas.microsoft.com/office/drawing/2014/main" id="{921D9793-B552-307C-2CB2-48B374B638F8}"/>
+                <a16:creationId xmlns:a16="http://schemas.microsoft.com/office/drawing/2014/main" id="{56D975B6-97FC-E4E6-DE8B-37615DECCEC1}"/>
               </a:ext>
             </a:extLst>
           </p:cNvPr>
@@ -12399,7 +12505,7 @@
     </p:spTree>
     <p:extLst>
       <p:ext uri="{BB962C8B-B14F-4D97-AF65-F5344CB8AC3E}">
-        <p14:creationId xmlns:p14="http://schemas.microsoft.com/office/powerpoint/2010/main" val="1845933596"/>
+        <p14:creationId xmlns:p14="http://schemas.microsoft.com/office/powerpoint/2010/main" val="2945736451"/>
       </p:ext>
     </p:extLst>
   </p:cSld>
@@ -12438,54 +12544,52 @@
         </p:nvSpPr>
         <p:spPr>
           <a:xfrm>
-            <a:off x="878114" y="108349"/>
-            <a:ext cx="7797576" cy="519113"/>
+            <a:off x="921657" y="108349"/>
+            <a:ext cx="7754033" cy="519113"/>
+          </a:xfrm>
+        </p:spPr>
+        <p:txBody>
+          <a:bodyPr/>
+          <a:lstStyle/>
+          <a:p>
+            <a:r>
+              <a:rPr lang="en-US" altLang="zh-TW" dirty="0"/>
+              <a:t>GPU Virtualization</a:t>
+            </a:r>
+            <a:endParaRPr lang="zh-TW" altLang="en-US" dirty="0"/>
+          </a:p>
+        </p:txBody>
+      </p:sp>
+      <p:sp>
+        <p:nvSpPr>
+          <p:cNvPr id="3" name="內容版面配置區 2"/>
+          <p:cNvSpPr>
+            <a:spLocks noGrp="1"/>
+          </p:cNvSpPr>
+          <p:nvPr>
+            <p:ph idx="1"/>
+          </p:nvPr>
+        </p:nvSpPr>
+        <p:spPr>
+          <a:xfrm>
+            <a:off x="769256" y="844153"/>
+            <a:ext cx="7917543" cy="1209618"/>
           </a:xfrm>
         </p:spPr>
         <p:txBody>
           <a:bodyPr>
-            <a:noAutofit/>
+            <a:normAutofit/>
           </a:bodyPr>
           <a:lstStyle/>
           <a:p>
             <a:r>
-              <a:rPr lang="en-US" altLang="zh-TW" dirty="0"/>
-              <a:t>Performance Comparison - GPU vs. CPU</a:t>
-            </a:r>
-            <a:endParaRPr lang="zh-TW" altLang="en-US" dirty="0"/>
-          </a:p>
-        </p:txBody>
-      </p:sp>
-      <p:sp>
-        <p:nvSpPr>
-          <p:cNvPr id="3" name="內容版面配置區 2"/>
-          <p:cNvSpPr>
-            <a:spLocks noGrp="1"/>
-          </p:cNvSpPr>
-          <p:nvPr>
-            <p:ph idx="1"/>
-          </p:nvPr>
-        </p:nvSpPr>
-        <p:spPr>
-          <a:xfrm>
-            <a:off x="927029" y="809724"/>
-            <a:ext cx="7026800" cy="1019075"/>
-          </a:xfrm>
-        </p:spPr>
-        <p:txBody>
-          <a:bodyPr>
-            <a:noAutofit/>
-          </a:bodyPr>
-          <a:lstStyle/>
-          <a:p>
-            <a:r>
-              <a:rPr lang="en-US" altLang="zh-TW" sz="2000" dirty="0">
+              <a:rPr lang="en-US" altLang="zh-TW" sz="2200" dirty="0">
                 <a:latin typeface="Times New Roman" panose="02020603050405020304" pitchFamily="18" charset="0"/>
                 <a:cs typeface="Times New Roman" panose="02020603050405020304" pitchFamily="18" charset="0"/>
               </a:rPr>
-              <a:t>While the Intel Core I7 980X (extreme edition) gives us around 110GFLOPS,  GPUs such as AMD Radeon 6970 and NVidia C2090 offer more than 660GFLOPS.</a:t>
-            </a:r>
-            <a:endParaRPr lang="zh-TW" altLang="en-US" sz="2000" dirty="0">
+              <a:t>GPU virtualization allows multiple virtual machines to interact directly with a GPU and manages the GPU resources so multiple users can share common hardware, while improving user density</a:t>
+            </a:r>
+            <a:endParaRPr lang="zh-TW" altLang="en-US" sz="2200" dirty="0">
               <a:latin typeface="Times New Roman" panose="02020603050405020304" pitchFamily="18" charset="0"/>
               <a:cs typeface="Times New Roman" panose="02020603050405020304" pitchFamily="18" charset="0"/>
             </a:endParaRPr>
@@ -12494,7 +12598,7 @@
       </p:sp>
       <p:pic>
         <p:nvPicPr>
-          <p:cNvPr id="1028" name="Picture 4" descr="http://3.bp.blogspot.com/-CMJkP4H8_tE/TfOYpCqBe7I/AAAAAAAAA9E/sBjmlolpCDg/s1600/chart1.png"/>
+          <p:cNvPr id="4" name="Picture 2" descr="Chart showing synergy between Kepler technology and NVIDIA VGX Hypervisor"/>
           <p:cNvPicPr>
             <a:picLocks noChangeAspect="1" noChangeArrowheads="1"/>
           </p:cNvPicPr>
@@ -12515,8 +12619,8 @@
         </p:blipFill>
         <p:spPr bwMode="auto">
           <a:xfrm>
-            <a:off x="2479943" y="1915884"/>
-            <a:ext cx="4231062" cy="2618549"/>
+            <a:off x="2911484" y="2181375"/>
+            <a:ext cx="3426859" cy="2263841"/>
           </a:xfrm>
           <a:prstGeom prst="rect">
             <a:avLst/>
@@ -12535,10 +12639,10 @@
       </p:pic>
       <p:sp>
         <p:nvSpPr>
-          <p:cNvPr id="4" name="灯片编号占位符 1">
+          <p:cNvPr id="5" name="灯片编号占位符 1">
             <a:extLst>
               <a:ext uri="{FF2B5EF4-FFF2-40B4-BE49-F238E27FC236}">
-                <a16:creationId xmlns:a16="http://schemas.microsoft.com/office/drawing/2014/main" id="{99B69390-24CE-B6CE-51FF-E71F2AE7D0B6}"/>
+                <a16:creationId xmlns:a16="http://schemas.microsoft.com/office/drawing/2014/main" id="{D429910D-D277-9ABB-7BD4-A604038BFFB7}"/>
               </a:ext>
             </a:extLst>
           </p:cNvPr>
@@ -12571,7 +12675,7 @@
     </p:spTree>
     <p:extLst>
       <p:ext uri="{BB962C8B-B14F-4D97-AF65-F5344CB8AC3E}">
-        <p14:creationId xmlns:p14="http://schemas.microsoft.com/office/powerpoint/2010/main" val="1737721707"/>
+        <p14:creationId xmlns:p14="http://schemas.microsoft.com/office/powerpoint/2010/main" val="2682607215"/>
       </p:ext>
     </p:extLst>
   </p:cSld>
@@ -12600,7 +12704,7 @@
       </p:grpSpPr>
       <p:sp>
         <p:nvSpPr>
-          <p:cNvPr id="2" name="標題 1"/>
+          <p:cNvPr id="4" name="標題 3"/>
           <p:cNvSpPr>
             <a:spLocks noGrp="1"/>
           </p:cNvSpPr>
@@ -12608,19 +12712,14 @@
             <p:ph type="title"/>
           </p:nvPr>
         </p:nvSpPr>
-        <p:spPr>
-          <a:xfrm>
-            <a:off x="907143" y="108349"/>
-            <a:ext cx="7768547" cy="519113"/>
-          </a:xfrm>
-        </p:spPr>
+        <p:spPr/>
         <p:txBody>
           <a:bodyPr/>
           <a:lstStyle/>
           <a:p>
             <a:r>
               <a:rPr lang="en-US" altLang="zh-TW" dirty="0"/>
-              <a:t>GPGPU</a:t>
+              <a:t>Virtualization Techniques</a:t>
             </a:r>
             <a:endParaRPr lang="zh-TW" altLang="en-US" dirty="0"/>
           </a:p>
@@ -12628,60 +12727,103 @@
       </p:sp>
       <p:sp>
         <p:nvSpPr>
-          <p:cNvPr id="3" name="內容版面配置區 2"/>
+          <p:cNvPr id="5" name="文字版面配置區 4"/>
           <p:cNvSpPr>
             <a:spLocks noGrp="1"/>
           </p:cNvSpPr>
           <p:nvPr>
-            <p:ph idx="1"/>
+            <p:ph type="body" idx="1"/>
           </p:nvPr>
         </p:nvSpPr>
         <p:spPr>
           <a:xfrm>
-            <a:off x="972456" y="844153"/>
-            <a:ext cx="7416801" cy="3343218"/>
+            <a:off x="1684735" y="1383618"/>
+            <a:ext cx="5829300" cy="1921558"/>
           </a:xfrm>
         </p:spPr>
         <p:txBody>
           <a:bodyPr>
-            <a:normAutofit/>
+            <a:normAutofit fontScale="70000" lnSpcReduction="20000"/>
           </a:bodyPr>
           <a:lstStyle/>
           <a:p>
             <a:r>
-              <a:rPr lang="en-US" altLang="zh-TW" sz="2200" dirty="0">
-                <a:latin typeface="Times New Roman" panose="02020603050405020304" pitchFamily="18" charset="0"/>
-                <a:cs typeface="Times New Roman" panose="02020603050405020304" pitchFamily="18" charset="0"/>
-              </a:rPr>
-              <a:t>High performance of modern Graphics Processing Units may be utilized not only for graphics related application but also for general computing. </a:t>
-            </a:r>
-          </a:p>
-          <a:p>
-            <a:r>
-              <a:rPr lang="en-US" altLang="zh-TW" sz="2200" dirty="0">
-                <a:latin typeface="Times New Roman" panose="02020603050405020304" pitchFamily="18" charset="0"/>
-                <a:cs typeface="Times New Roman" panose="02020603050405020304" pitchFamily="18" charset="0"/>
-              </a:rPr>
-              <a:t>Today’s GPUs are general-purpose parallel processors with support for accessible programming interfaces and industry-standard languages such as C.  </a:t>
-            </a:r>
-          </a:p>
-          <a:p>
-            <a:r>
-              <a:rPr lang="en-US" altLang="zh-TW" sz="2200" dirty="0">
-                <a:latin typeface="Times New Roman" panose="02020603050405020304" pitchFamily="18" charset="0"/>
-                <a:cs typeface="Times New Roman" panose="02020603050405020304" pitchFamily="18" charset="0"/>
-              </a:rPr>
-              <a:t>Developers who port their applications to GPUs often achieve speedups of orders of magnitude vs. optimized CPU implementations. </a:t>
-            </a:r>
-          </a:p>
-        </p:txBody>
-      </p:sp>
-      <p:sp>
-        <p:nvSpPr>
-          <p:cNvPr id="4" name="灯片编号占位符 1">
+              <a:rPr lang="en-US" altLang="zh-TW" dirty="0">
+                <a:solidFill>
+                  <a:schemeClr val="bg1">
+                    <a:lumMod val="50000"/>
+                  </a:schemeClr>
+                </a:solidFill>
+              </a:rPr>
+              <a:t>System Virtualization</a:t>
+            </a:r>
+          </a:p>
+          <a:p>
+            <a:r>
+              <a:rPr lang="en-US" altLang="zh-TW" dirty="0">
+                <a:solidFill>
+                  <a:schemeClr val="bg1">
+                    <a:lumMod val="50000"/>
+                  </a:schemeClr>
+                </a:solidFill>
+              </a:rPr>
+              <a:t>Storage Virtualization</a:t>
+            </a:r>
+          </a:p>
+          <a:p>
+            <a:r>
+              <a:rPr lang="en-US" altLang="zh-TW" dirty="0">
+                <a:solidFill>
+                  <a:schemeClr val="bg1">
+                    <a:lumMod val="50000"/>
+                  </a:schemeClr>
+                </a:solidFill>
+              </a:rPr>
+              <a:t>Network Virtualization	</a:t>
+            </a:r>
+          </a:p>
+          <a:p>
+            <a:r>
+              <a:rPr lang="en-US" altLang="zh-TW" dirty="0">
+                <a:solidFill>
+                  <a:schemeClr val="bg1">
+                    <a:lumMod val="50000"/>
+                  </a:schemeClr>
+                </a:solidFill>
+              </a:rPr>
+              <a:t>GPU Virtualization</a:t>
+            </a:r>
+          </a:p>
+          <a:p>
+            <a:r>
+              <a:rPr lang="en-US" altLang="zh-TW" b="1" dirty="0">
+                <a:solidFill>
+                  <a:srgbClr val="FF0000"/>
+                </a:solidFill>
+              </a:rPr>
+              <a:t>Software Virtualization</a:t>
+            </a:r>
+          </a:p>
+          <a:p>
+            <a:r>
+              <a:rPr lang="en-US" altLang="zh-TW" dirty="0">
+                <a:solidFill>
+                  <a:schemeClr val="bg1">
+                    <a:lumMod val="50000"/>
+                  </a:schemeClr>
+                </a:solidFill>
+              </a:rPr>
+              <a:t>Hardware Support  Virtualization</a:t>
+            </a:r>
+          </a:p>
+        </p:txBody>
+      </p:sp>
+      <p:sp>
+        <p:nvSpPr>
+          <p:cNvPr id="2" name="灯片编号占位符 1">
             <a:extLst>
               <a:ext uri="{FF2B5EF4-FFF2-40B4-BE49-F238E27FC236}">
-                <a16:creationId xmlns:a16="http://schemas.microsoft.com/office/drawing/2014/main" id="{56D975B6-97FC-E4E6-DE8B-37615DECCEC1}"/>
+                <a16:creationId xmlns:a16="http://schemas.microsoft.com/office/drawing/2014/main" id="{E024C90A-F1F5-4686-A067-F994E940C5F0}"/>
               </a:ext>
             </a:extLst>
           </p:cNvPr>
@@ -12714,7 +12856,7 @@
     </p:spTree>
     <p:extLst>
       <p:ext uri="{BB962C8B-B14F-4D97-AF65-F5344CB8AC3E}">
-        <p14:creationId xmlns:p14="http://schemas.microsoft.com/office/powerpoint/2010/main" val="2945736451"/>
+        <p14:creationId xmlns:p14="http://schemas.microsoft.com/office/powerpoint/2010/main" val="3955144596"/>
       </p:ext>
     </p:extLst>
   </p:cSld>
@@ -12753,17 +12895,19 @@
         </p:nvSpPr>
         <p:spPr>
           <a:xfrm>
-            <a:off x="921657" y="108349"/>
-            <a:ext cx="7754033" cy="519113"/>
-          </a:xfrm>
-        </p:spPr>
-        <p:txBody>
-          <a:bodyPr/>
+            <a:off x="965200" y="108349"/>
+            <a:ext cx="7710490" cy="519113"/>
+          </a:xfrm>
+        </p:spPr>
+        <p:txBody>
+          <a:bodyPr>
+            <a:noAutofit/>
+          </a:bodyPr>
           <a:lstStyle/>
           <a:p>
             <a:r>
               <a:rPr lang="en-US" altLang="zh-TW" dirty="0"/>
-              <a:t>GPU Virtualization</a:t>
+              <a:t>Software Virtualization</a:t>
             </a:r>
             <a:endParaRPr lang="zh-TW" altLang="en-US" dirty="0"/>
           </a:p>
@@ -12781,13 +12925,13 @@
         </p:nvSpPr>
         <p:spPr>
           <a:xfrm>
-            <a:off x="769256" y="844153"/>
-            <a:ext cx="7917543" cy="1209618"/>
+            <a:off x="1069772" y="853881"/>
+            <a:ext cx="7004456" cy="3333490"/>
           </a:xfrm>
         </p:spPr>
         <p:txBody>
           <a:bodyPr>
-            <a:normAutofit/>
+            <a:noAutofit/>
           </a:bodyPr>
           <a:lstStyle/>
           <a:p>
@@ -12796,62 +12940,66 @@
                 <a:latin typeface="Times New Roman" panose="02020603050405020304" pitchFamily="18" charset="0"/>
                 <a:cs typeface="Times New Roman" panose="02020603050405020304" pitchFamily="18" charset="0"/>
               </a:rPr>
-              <a:t>GPU virtualization allows multiple virtual machines to interact directly with a GPU and manages the GPU resources so multiple users can share common hardware, while improving user density</a:t>
-            </a:r>
-            <a:endParaRPr lang="zh-TW" altLang="en-US" sz="2200" dirty="0">
-              <a:latin typeface="Times New Roman" panose="02020603050405020304" pitchFamily="18" charset="0"/>
-              <a:cs typeface="Times New Roman" panose="02020603050405020304" pitchFamily="18" charset="0"/>
-            </a:endParaRPr>
-          </a:p>
-        </p:txBody>
-      </p:sp>
-      <p:pic>
-        <p:nvPicPr>
-          <p:cNvPr id="4" name="Picture 2" descr="Chart showing synergy between Kepler technology and NVIDIA VGX Hypervisor"/>
-          <p:cNvPicPr>
-            <a:picLocks noChangeAspect="1" noChangeArrowheads="1"/>
-          </p:cNvPicPr>
-          <p:nvPr/>
-        </p:nvPicPr>
-        <p:blipFill>
-          <a:blip r:embed="rId2">
-            <a:extLst>
-              <a:ext uri="{28A0092B-C50C-407E-A947-70E740481C1C}">
-                <a14:useLocalDpi xmlns:a14="http://schemas.microsoft.com/office/drawing/2010/main" val="0"/>
-              </a:ext>
-            </a:extLst>
-          </a:blip>
-          <a:srcRect/>
-          <a:stretch>
-            <a:fillRect/>
-          </a:stretch>
-        </p:blipFill>
-        <p:spPr bwMode="auto">
-          <a:xfrm>
-            <a:off x="2911484" y="2181375"/>
-            <a:ext cx="3426859" cy="2263841"/>
-          </a:xfrm>
-          <a:prstGeom prst="rect">
-            <a:avLst/>
-          </a:prstGeom>
-          <a:noFill/>
-          <a:extLst>
-            <a:ext uri="{909E8E84-426E-40DD-AFC4-6F175D3DCCD1}">
-              <a14:hiddenFill xmlns:a14="http://schemas.microsoft.com/office/drawing/2010/main">
-                <a:solidFill>
-                  <a:srgbClr val="FFFFFF"/>
-                </a:solidFill>
-              </a14:hiddenFill>
-            </a:ext>
-          </a:extLst>
-        </p:spPr>
-      </p:pic>
-      <p:sp>
-        <p:nvSpPr>
-          <p:cNvPr id="5" name="灯片编号占位符 1">
+              <a:t>IT administrators have a lot to deal with in today’s corporate infrastructure. With the ever increasing prices of upgrading desktop computers, software virtualization is becoming very appealing. </a:t>
+            </a:r>
+          </a:p>
+          <a:p>
+            <a:r>
+              <a:rPr lang="en-US" altLang="zh-TW" sz="2200" dirty="0">
+                <a:latin typeface="Times New Roman" panose="02020603050405020304" pitchFamily="18" charset="0"/>
+                <a:cs typeface="Times New Roman" panose="02020603050405020304" pitchFamily="18" charset="0"/>
+              </a:rPr>
+              <a:t>It has following features:</a:t>
+            </a:r>
+          </a:p>
+          <a:p>
+            <a:pPr lvl="1"/>
+            <a:r>
+              <a:rPr lang="en-US" altLang="zh-TW" sz="2000" dirty="0">
+                <a:latin typeface="Times New Roman" panose="02020603050405020304" pitchFamily="18" charset="0"/>
+                <a:cs typeface="Times New Roman" panose="02020603050405020304" pitchFamily="18" charset="0"/>
+              </a:rPr>
+              <a:t>Ease of Management</a:t>
+            </a:r>
+          </a:p>
+          <a:p>
+            <a:pPr lvl="1"/>
+            <a:r>
+              <a:rPr lang="en-US" altLang="zh-TW" sz="2000" dirty="0">
+                <a:latin typeface="Times New Roman" panose="02020603050405020304" pitchFamily="18" charset="0"/>
+                <a:cs typeface="Times New Roman" panose="02020603050405020304" pitchFamily="18" charset="0"/>
+              </a:rPr>
+              <a:t>Security</a:t>
+            </a:r>
+          </a:p>
+          <a:p>
+            <a:pPr lvl="1"/>
+            <a:r>
+              <a:rPr lang="en-US" altLang="zh-TW" sz="2000" dirty="0">
+                <a:latin typeface="Times New Roman" panose="02020603050405020304" pitchFamily="18" charset="0"/>
+                <a:cs typeface="Times New Roman" panose="02020603050405020304" pitchFamily="18" charset="0"/>
+              </a:rPr>
+              <a:t>Green</a:t>
+            </a:r>
+          </a:p>
+          <a:p>
+            <a:pPr lvl="1"/>
+            <a:r>
+              <a:rPr lang="en-US" altLang="zh-TW" sz="2000" dirty="0">
+                <a:latin typeface="Times New Roman" panose="02020603050405020304" pitchFamily="18" charset="0"/>
+                <a:cs typeface="Times New Roman" panose="02020603050405020304" pitchFamily="18" charset="0"/>
+              </a:rPr>
+              <a:t>Portable</a:t>
+            </a:r>
+          </a:p>
+        </p:txBody>
+      </p:sp>
+      <p:sp>
+        <p:nvSpPr>
+          <p:cNvPr id="4" name="灯片编号占位符 1">
             <a:extLst>
               <a:ext uri="{FF2B5EF4-FFF2-40B4-BE49-F238E27FC236}">
-                <a16:creationId xmlns:a16="http://schemas.microsoft.com/office/drawing/2014/main" id="{D429910D-D277-9ABB-7BD4-A604038BFFB7}"/>
+                <a16:creationId xmlns:a16="http://schemas.microsoft.com/office/drawing/2014/main" id="{E02FD9CD-155D-D045-1C5B-D4C6D025E4EF}"/>
               </a:ext>
             </a:extLst>
           </p:cNvPr>
@@ -12884,7 +13032,7 @@
     </p:spTree>
     <p:extLst>
       <p:ext uri="{BB962C8B-B14F-4D97-AF65-F5344CB8AC3E}">
-        <p14:creationId xmlns:p14="http://schemas.microsoft.com/office/powerpoint/2010/main" val="2682607215"/>
+        <p14:creationId xmlns:p14="http://schemas.microsoft.com/office/powerpoint/2010/main" val="3573376323"/>
       </p:ext>
     </p:extLst>
   </p:cSld>
@@ -12913,7 +13061,7 @@
       </p:grpSpPr>
       <p:sp>
         <p:nvSpPr>
-          <p:cNvPr id="4" name="標題 3"/>
+          <p:cNvPr id="2" name="標題 1"/>
           <p:cNvSpPr>
             <a:spLocks noGrp="1"/>
           </p:cNvSpPr>
@@ -12921,118 +13069,109 @@
             <p:ph type="title"/>
           </p:nvPr>
         </p:nvSpPr>
-        <p:spPr/>
-        <p:txBody>
-          <a:bodyPr/>
-          <a:lstStyle/>
-          <a:p>
-            <a:r>
-              <a:rPr lang="en-US" altLang="zh-TW" dirty="0"/>
-              <a:t>Virtualization Techniques</a:t>
-            </a:r>
-            <a:endParaRPr lang="zh-TW" altLang="en-US" dirty="0"/>
-          </a:p>
-        </p:txBody>
-      </p:sp>
-      <p:sp>
-        <p:nvSpPr>
-          <p:cNvPr id="5" name="文字版面配置區 4"/>
-          <p:cNvSpPr>
-            <a:spLocks noGrp="1"/>
-          </p:cNvSpPr>
-          <p:nvPr>
-            <p:ph type="body" idx="1"/>
-          </p:nvPr>
-        </p:nvSpPr>
         <p:spPr>
           <a:xfrm>
-            <a:off x="1684735" y="1383618"/>
-            <a:ext cx="5829300" cy="1921558"/>
+            <a:off x="870857" y="108349"/>
+            <a:ext cx="7804833" cy="519113"/>
           </a:xfrm>
         </p:spPr>
         <p:txBody>
           <a:bodyPr>
-            <a:normAutofit fontScale="70000" lnSpcReduction="20000"/>
+            <a:noAutofit/>
           </a:bodyPr>
           <a:lstStyle/>
           <a:p>
             <a:r>
-              <a:rPr lang="en-US" altLang="zh-TW" dirty="0">
+              <a:rPr lang="en-US" altLang="zh-TW" dirty="0"/>
+              <a:t>Virtual Desktop Infrastructure (VDI)</a:t>
+            </a:r>
+            <a:endParaRPr lang="zh-TW" altLang="en-US" dirty="0"/>
+          </a:p>
+        </p:txBody>
+      </p:sp>
+      <p:sp>
+        <p:nvSpPr>
+          <p:cNvPr id="3" name="內容版面配置區 2"/>
+          <p:cNvSpPr>
+            <a:spLocks noGrp="1"/>
+          </p:cNvSpPr>
+          <p:nvPr>
+            <p:ph idx="1"/>
+          </p:nvPr>
+        </p:nvSpPr>
+        <p:spPr>
+          <a:xfrm>
+            <a:off x="934356" y="785123"/>
+            <a:ext cx="6990443" cy="1435561"/>
+          </a:xfrm>
+        </p:spPr>
+        <p:txBody>
+          <a:bodyPr>
+            <a:noAutofit/>
+          </a:bodyPr>
+          <a:lstStyle/>
+          <a:p>
+            <a:r>
+              <a:rPr lang="en-US" altLang="zh-TW" sz="2200" dirty="0">
+                <a:latin typeface="Times New Roman" panose="02020603050405020304" pitchFamily="18" charset="0"/>
+                <a:cs typeface="Times New Roman" panose="02020603050405020304" pitchFamily="18" charset="0"/>
+              </a:rPr>
+              <a:t>Virtual desktop Infrastructure (VDI) is a desktop-centric service that hosts users desktop environments on remote servers, which are accessed over a network using a remote display protocol. </a:t>
+            </a:r>
+            <a:endParaRPr lang="zh-TW" altLang="en-US" sz="2200" dirty="0">
+              <a:latin typeface="Times New Roman" panose="02020603050405020304" pitchFamily="18" charset="0"/>
+              <a:cs typeface="Times New Roman" panose="02020603050405020304" pitchFamily="18" charset="0"/>
+            </a:endParaRPr>
+          </a:p>
+        </p:txBody>
+      </p:sp>
+      <p:pic>
+        <p:nvPicPr>
+          <p:cNvPr id="15362" name="Picture 2" descr="http://mythoughtsonit.com/wp-content/uploads/2012/10/vdi.jpg"/>
+          <p:cNvPicPr>
+            <a:picLocks noChangeAspect="1" noChangeArrowheads="1"/>
+          </p:cNvPicPr>
+          <p:nvPr/>
+        </p:nvPicPr>
+        <p:blipFill>
+          <a:blip r:embed="rId2">
+            <a:extLst>
+              <a:ext uri="{28A0092B-C50C-407E-A947-70E740481C1C}">
+                <a14:useLocalDpi xmlns:a14="http://schemas.microsoft.com/office/drawing/2010/main" val="0"/>
+              </a:ext>
+            </a:extLst>
+          </a:blip>
+          <a:srcRect/>
+          <a:stretch>
+            <a:fillRect/>
+          </a:stretch>
+        </p:blipFill>
+        <p:spPr bwMode="auto">
+          <a:xfrm>
+            <a:off x="3077519" y="2220683"/>
+            <a:ext cx="3177069" cy="2322287"/>
+          </a:xfrm>
+          <a:prstGeom prst="rect">
+            <a:avLst/>
+          </a:prstGeom>
+          <a:noFill/>
+          <a:extLst>
+            <a:ext uri="{909E8E84-426E-40DD-AFC4-6F175D3DCCD1}">
+              <a14:hiddenFill xmlns:a14="http://schemas.microsoft.com/office/drawing/2010/main">
                 <a:solidFill>
-                  <a:schemeClr val="bg1">
-                    <a:lumMod val="50000"/>
-                  </a:schemeClr>
+                  <a:srgbClr val="FFFFFF"/>
                 </a:solidFill>
-              </a:rPr>
-              <a:t>System Virtualization</a:t>
-            </a:r>
-          </a:p>
-          <a:p>
-            <a:r>
-              <a:rPr lang="en-US" altLang="zh-TW" dirty="0">
-                <a:solidFill>
-                  <a:schemeClr val="bg1">
-                    <a:lumMod val="50000"/>
-                  </a:schemeClr>
-                </a:solidFill>
-              </a:rPr>
-              <a:t>Storage Virtualization</a:t>
-            </a:r>
-          </a:p>
-          <a:p>
-            <a:r>
-              <a:rPr lang="en-US" altLang="zh-TW" dirty="0">
-                <a:solidFill>
-                  <a:schemeClr val="bg1">
-                    <a:lumMod val="50000"/>
-                  </a:schemeClr>
-                </a:solidFill>
-              </a:rPr>
-              <a:t>Network Virtualization	</a:t>
-            </a:r>
-          </a:p>
-          <a:p>
-            <a:r>
-              <a:rPr lang="en-US" altLang="zh-TW" dirty="0">
-                <a:solidFill>
-                  <a:schemeClr val="bg1">
-                    <a:lumMod val="50000"/>
-                  </a:schemeClr>
-                </a:solidFill>
-              </a:rPr>
-              <a:t>GPU Virtualization</a:t>
-            </a:r>
-          </a:p>
-          <a:p>
-            <a:r>
-              <a:rPr lang="en-US" altLang="zh-TW" b="1" dirty="0">
-                <a:solidFill>
-                  <a:srgbClr val="FF0000"/>
-                </a:solidFill>
-              </a:rPr>
-              <a:t>Software Virtualization</a:t>
-            </a:r>
-          </a:p>
-          <a:p>
-            <a:r>
-              <a:rPr lang="en-US" altLang="zh-TW" dirty="0">
-                <a:solidFill>
-                  <a:schemeClr val="bg1">
-                    <a:lumMod val="50000"/>
-                  </a:schemeClr>
-                </a:solidFill>
-              </a:rPr>
-              <a:t>Hardware Support  Virtualization</a:t>
-            </a:r>
-          </a:p>
-        </p:txBody>
-      </p:sp>
-      <p:sp>
-        <p:nvSpPr>
-          <p:cNvPr id="2" name="灯片编号占位符 1">
+              </a14:hiddenFill>
+            </a:ext>
+          </a:extLst>
+        </p:spPr>
+      </p:pic>
+      <p:sp>
+        <p:nvSpPr>
+          <p:cNvPr id="4" name="灯片编号占位符 1">
             <a:extLst>
               <a:ext uri="{FF2B5EF4-FFF2-40B4-BE49-F238E27FC236}">
-                <a16:creationId xmlns:a16="http://schemas.microsoft.com/office/drawing/2014/main" id="{E024C90A-F1F5-4686-A067-F994E940C5F0}"/>
+                <a16:creationId xmlns:a16="http://schemas.microsoft.com/office/drawing/2014/main" id="{878F1DA7-932E-CE92-0030-321A6072FA2B}"/>
               </a:ext>
             </a:extLst>
           </p:cNvPr>
@@ -13065,7 +13204,7 @@
     </p:spTree>
     <p:extLst>
       <p:ext uri="{BB962C8B-B14F-4D97-AF65-F5344CB8AC3E}">
-        <p14:creationId xmlns:p14="http://schemas.microsoft.com/office/powerpoint/2010/main" val="3955144596"/>
+        <p14:creationId xmlns:p14="http://schemas.microsoft.com/office/powerpoint/2010/main" val="834003117"/>
       </p:ext>
     </p:extLst>
   </p:cSld>
@@ -13238,8 +13377,8 @@
         </p:nvSpPr>
         <p:spPr>
           <a:xfrm>
-            <a:off x="965200" y="108349"/>
-            <a:ext cx="7710490" cy="519113"/>
+            <a:off x="932318" y="108349"/>
+            <a:ext cx="7743372" cy="519113"/>
           </a:xfrm>
         </p:spPr>
         <p:txBody>
@@ -13249,8 +13388,12 @@
           <a:lstStyle/>
           <a:p>
             <a:r>
+              <a:rPr lang="en-US" altLang="zh-TW" dirty="0" err="1"/>
+              <a:t>EyeOS</a:t>
+            </a:r>
+            <a:r>
               <a:rPr lang="en-US" altLang="zh-TW" dirty="0"/>
-              <a:t>Software Virtualization</a:t>
+              <a:t> - Web Desktop Virtualization</a:t>
             </a:r>
             <a:endParaRPr lang="zh-TW" altLang="en-US" dirty="0"/>
           </a:p>
@@ -13268,8 +13411,8 @@
         </p:nvSpPr>
         <p:spPr>
           <a:xfrm>
-            <a:off x="1069772" y="853881"/>
-            <a:ext cx="7004456" cy="3333490"/>
+            <a:off x="700314" y="833874"/>
+            <a:ext cx="7743372" cy="1152106"/>
           </a:xfrm>
         </p:spPr>
         <p:txBody>
@@ -13279,70 +13422,73 @@
           <a:lstStyle/>
           <a:p>
             <a:r>
+              <a:rPr lang="en-US" altLang="zh-TW" sz="2200" dirty="0" err="1">
+                <a:latin typeface="Times New Roman" panose="02020603050405020304" pitchFamily="18" charset="0"/>
+                <a:cs typeface="Times New Roman" panose="02020603050405020304" pitchFamily="18" charset="0"/>
+              </a:rPr>
+              <a:t>eyeOS</a:t>
+            </a:r>
+            <a:r>
               <a:rPr lang="en-US" altLang="zh-TW" sz="2200" dirty="0">
                 <a:latin typeface="Times New Roman" panose="02020603050405020304" pitchFamily="18" charset="0"/>
                 <a:cs typeface="Times New Roman" panose="02020603050405020304" pitchFamily="18" charset="0"/>
               </a:rPr>
-              <a:t>IT administrators have a lot to deal with in today’s corporate infrastructure. With the ever increasing prices of upgrading desktop computers, software virtualization is becoming very appealing. </a:t>
-            </a:r>
-          </a:p>
-          <a:p>
-            <a:r>
-              <a:rPr lang="en-US" altLang="zh-TW" sz="2200" dirty="0">
-                <a:latin typeface="Times New Roman" panose="02020603050405020304" pitchFamily="18" charset="0"/>
-                <a:cs typeface="Times New Roman" panose="02020603050405020304" pitchFamily="18" charset="0"/>
-              </a:rPr>
-              <a:t>It has following features:</a:t>
-            </a:r>
-          </a:p>
-          <a:p>
-            <a:pPr lvl="1"/>
-            <a:r>
-              <a:rPr lang="en-US" altLang="zh-TW" sz="2000" dirty="0">
-                <a:latin typeface="Times New Roman" panose="02020603050405020304" pitchFamily="18" charset="0"/>
-                <a:cs typeface="Times New Roman" panose="02020603050405020304" pitchFamily="18" charset="0"/>
-              </a:rPr>
-              <a:t>Ease of Management</a:t>
-            </a:r>
-          </a:p>
-          <a:p>
-            <a:pPr lvl="1"/>
-            <a:r>
-              <a:rPr lang="en-US" altLang="zh-TW" sz="2000" dirty="0">
-                <a:latin typeface="Times New Roman" panose="02020603050405020304" pitchFamily="18" charset="0"/>
-                <a:cs typeface="Times New Roman" panose="02020603050405020304" pitchFamily="18" charset="0"/>
-              </a:rPr>
-              <a:t>Security</a:t>
-            </a:r>
-          </a:p>
-          <a:p>
-            <a:pPr lvl="1"/>
-            <a:r>
-              <a:rPr lang="en-US" altLang="zh-TW" sz="2000" dirty="0">
-                <a:latin typeface="Times New Roman" panose="02020603050405020304" pitchFamily="18" charset="0"/>
-                <a:cs typeface="Times New Roman" panose="02020603050405020304" pitchFamily="18" charset="0"/>
-              </a:rPr>
-              <a:t>Green</a:t>
-            </a:r>
-          </a:p>
-          <a:p>
-            <a:pPr lvl="1"/>
-            <a:r>
-              <a:rPr lang="en-US" altLang="zh-TW" sz="2000" dirty="0">
-                <a:latin typeface="Times New Roman" panose="02020603050405020304" pitchFamily="18" charset="0"/>
-                <a:cs typeface="Times New Roman" panose="02020603050405020304" pitchFamily="18" charset="0"/>
-              </a:rPr>
-              <a:t>Portable</a:t>
-            </a:r>
-          </a:p>
-        </p:txBody>
-      </p:sp>
+              <a:t> is a web desktop following the cloud computing concept that seeks to enable collaboration and communication among users. It is mainly written in PHP, XML, and JavaScript</a:t>
+            </a:r>
+            <a:endParaRPr lang="zh-TW" altLang="en-US" sz="2200" dirty="0">
+              <a:latin typeface="Times New Roman" panose="02020603050405020304" pitchFamily="18" charset="0"/>
+              <a:cs typeface="Times New Roman" panose="02020603050405020304" pitchFamily="18" charset="0"/>
+            </a:endParaRPr>
+          </a:p>
+        </p:txBody>
+      </p:sp>
+      <p:pic>
+        <p:nvPicPr>
+          <p:cNvPr id="14338" name="Picture 2" descr="File:EyeOS-2.4.png"/>
+          <p:cNvPicPr>
+            <a:picLocks noChangeAspect="1" noChangeArrowheads="1"/>
+          </p:cNvPicPr>
+          <p:nvPr/>
+        </p:nvPicPr>
+        <p:blipFill>
+          <a:blip r:embed="rId2">
+            <a:extLst>
+              <a:ext uri="{28A0092B-C50C-407E-A947-70E740481C1C}">
+                <a14:useLocalDpi xmlns:a14="http://schemas.microsoft.com/office/drawing/2010/main" val="0"/>
+              </a:ext>
+            </a:extLst>
+          </a:blip>
+          <a:srcRect/>
+          <a:stretch>
+            <a:fillRect/>
+          </a:stretch>
+        </p:blipFill>
+        <p:spPr bwMode="auto">
+          <a:xfrm>
+            <a:off x="2663371" y="2078644"/>
+            <a:ext cx="3947886" cy="2467428"/>
+          </a:xfrm>
+          <a:prstGeom prst="rect">
+            <a:avLst/>
+          </a:prstGeom>
+          <a:noFill/>
+          <a:extLst>
+            <a:ext uri="{909E8E84-426E-40DD-AFC4-6F175D3DCCD1}">
+              <a14:hiddenFill xmlns:a14="http://schemas.microsoft.com/office/drawing/2010/main">
+                <a:solidFill>
+                  <a:srgbClr val="FFFFFF"/>
+                </a:solidFill>
+              </a14:hiddenFill>
+            </a:ext>
+          </a:extLst>
+        </p:spPr>
+      </p:pic>
       <p:sp>
         <p:nvSpPr>
           <p:cNvPr id="4" name="灯片编号占位符 1">
             <a:extLst>
               <a:ext uri="{FF2B5EF4-FFF2-40B4-BE49-F238E27FC236}">
-                <a16:creationId xmlns:a16="http://schemas.microsoft.com/office/drawing/2014/main" id="{E02FD9CD-155D-D045-1C5B-D4C6D025E4EF}"/>
+                <a16:creationId xmlns:a16="http://schemas.microsoft.com/office/drawing/2014/main" id="{3A07BDC2-8DD3-FEE1-07A8-C70AE37DEC15}"/>
               </a:ext>
             </a:extLst>
           </p:cNvPr>
@@ -13375,7 +13521,7 @@
     </p:spTree>
     <p:extLst>
       <p:ext uri="{BB962C8B-B14F-4D97-AF65-F5344CB8AC3E}">
-        <p14:creationId xmlns:p14="http://schemas.microsoft.com/office/powerpoint/2010/main" val="3573376323"/>
+        <p14:creationId xmlns:p14="http://schemas.microsoft.com/office/powerpoint/2010/main" val="3208695809"/>
       </p:ext>
     </p:extLst>
   </p:cSld>
@@ -13404,361 +13550,6 @@
       </p:grpSpPr>
       <p:sp>
         <p:nvSpPr>
-          <p:cNvPr id="2" name="標題 1"/>
-          <p:cNvSpPr>
-            <a:spLocks noGrp="1"/>
-          </p:cNvSpPr>
-          <p:nvPr>
-            <p:ph type="title"/>
-          </p:nvPr>
-        </p:nvSpPr>
-        <p:spPr>
-          <a:xfrm>
-            <a:off x="870857" y="108349"/>
-            <a:ext cx="7804833" cy="519113"/>
-          </a:xfrm>
-        </p:spPr>
-        <p:txBody>
-          <a:bodyPr>
-            <a:noAutofit/>
-          </a:bodyPr>
-          <a:lstStyle/>
-          <a:p>
-            <a:r>
-              <a:rPr lang="en-US" altLang="zh-TW" dirty="0"/>
-              <a:t>Virtual Desktop Infrastructure (VDI)</a:t>
-            </a:r>
-            <a:endParaRPr lang="zh-TW" altLang="en-US" dirty="0"/>
-          </a:p>
-        </p:txBody>
-      </p:sp>
-      <p:sp>
-        <p:nvSpPr>
-          <p:cNvPr id="3" name="內容版面配置區 2"/>
-          <p:cNvSpPr>
-            <a:spLocks noGrp="1"/>
-          </p:cNvSpPr>
-          <p:nvPr>
-            <p:ph idx="1"/>
-          </p:nvPr>
-        </p:nvSpPr>
-        <p:spPr>
-          <a:xfrm>
-            <a:off x="934356" y="785123"/>
-            <a:ext cx="6990443" cy="1435561"/>
-          </a:xfrm>
-        </p:spPr>
-        <p:txBody>
-          <a:bodyPr>
-            <a:noAutofit/>
-          </a:bodyPr>
-          <a:lstStyle/>
-          <a:p>
-            <a:r>
-              <a:rPr lang="en-US" altLang="zh-TW" sz="2200" dirty="0">
-                <a:latin typeface="Times New Roman" panose="02020603050405020304" pitchFamily="18" charset="0"/>
-                <a:cs typeface="Times New Roman" panose="02020603050405020304" pitchFamily="18" charset="0"/>
-              </a:rPr>
-              <a:t>Virtual desktop Infrastructure (VDI) is a desktop-centric service that hosts users desktop environments on remote servers, which are accessed over a network using a remote display protocol. </a:t>
-            </a:r>
-            <a:endParaRPr lang="zh-TW" altLang="en-US" sz="2200" dirty="0">
-              <a:latin typeface="Times New Roman" panose="02020603050405020304" pitchFamily="18" charset="0"/>
-              <a:cs typeface="Times New Roman" panose="02020603050405020304" pitchFamily="18" charset="0"/>
-            </a:endParaRPr>
-          </a:p>
-        </p:txBody>
-      </p:sp>
-      <p:pic>
-        <p:nvPicPr>
-          <p:cNvPr id="15362" name="Picture 2" descr="http://mythoughtsonit.com/wp-content/uploads/2012/10/vdi.jpg"/>
-          <p:cNvPicPr>
-            <a:picLocks noChangeAspect="1" noChangeArrowheads="1"/>
-          </p:cNvPicPr>
-          <p:nvPr/>
-        </p:nvPicPr>
-        <p:blipFill>
-          <a:blip r:embed="rId2">
-            <a:extLst>
-              <a:ext uri="{28A0092B-C50C-407E-A947-70E740481C1C}">
-                <a14:useLocalDpi xmlns:a14="http://schemas.microsoft.com/office/drawing/2010/main" val="0"/>
-              </a:ext>
-            </a:extLst>
-          </a:blip>
-          <a:srcRect/>
-          <a:stretch>
-            <a:fillRect/>
-          </a:stretch>
-        </p:blipFill>
-        <p:spPr bwMode="auto">
-          <a:xfrm>
-            <a:off x="3077519" y="2220683"/>
-            <a:ext cx="3177069" cy="2322287"/>
-          </a:xfrm>
-          <a:prstGeom prst="rect">
-            <a:avLst/>
-          </a:prstGeom>
-          <a:noFill/>
-          <a:extLst>
-            <a:ext uri="{909E8E84-426E-40DD-AFC4-6F175D3DCCD1}">
-              <a14:hiddenFill xmlns:a14="http://schemas.microsoft.com/office/drawing/2010/main">
-                <a:solidFill>
-                  <a:srgbClr val="FFFFFF"/>
-                </a:solidFill>
-              </a14:hiddenFill>
-            </a:ext>
-          </a:extLst>
-        </p:spPr>
-      </p:pic>
-      <p:sp>
-        <p:nvSpPr>
-          <p:cNvPr id="4" name="灯片编号占位符 1">
-            <a:extLst>
-              <a:ext uri="{FF2B5EF4-FFF2-40B4-BE49-F238E27FC236}">
-                <a16:creationId xmlns:a16="http://schemas.microsoft.com/office/drawing/2014/main" id="{878F1DA7-932E-CE92-0030-321A6072FA2B}"/>
-              </a:ext>
-            </a:extLst>
-          </p:cNvPr>
-          <p:cNvSpPr>
-            <a:spLocks noGrp="1"/>
-          </p:cNvSpPr>
-          <p:nvPr>
-            <p:ph type="sldNum" sz="quarter" idx="10"/>
-          </p:nvPr>
-        </p:nvSpPr>
-        <p:spPr>
-          <a:xfrm>
-            <a:off x="6831013" y="4893471"/>
-            <a:ext cx="2133600" cy="254794"/>
-          </a:xfrm>
-        </p:spPr>
-        <p:txBody>
-          <a:bodyPr/>
-          <a:lstStyle/>
-          <a:p>
-            <a:fld id="{D9B6BDF2-6896-4B98-8776-C18582F63BA5}" type="slidenum">
-              <a:rPr lang="zh-TW" altLang="en-US" smtClean="0"/>
-              <a:pPr/>
-              <a:t>41</a:t>
-            </a:fld>
-            <a:endParaRPr lang="zh-TW" altLang="en-US"/>
-          </a:p>
-        </p:txBody>
-      </p:sp>
-    </p:spTree>
-    <p:extLst>
-      <p:ext uri="{BB962C8B-B14F-4D97-AF65-F5344CB8AC3E}">
-        <p14:creationId xmlns:p14="http://schemas.microsoft.com/office/powerpoint/2010/main" val="834003117"/>
-      </p:ext>
-    </p:extLst>
-  </p:cSld>
-  <p:clrMapOvr>
-    <a:masterClrMapping/>
-  </p:clrMapOvr>
-</p:sld>
-</file>
-
-<file path=ppt/slides/slide42.xml><?xml version="1.0" encoding="utf-8"?>
-<p:sld xmlns:a="http://schemas.openxmlformats.org/drawingml/2006/main" xmlns:r="http://schemas.openxmlformats.org/officeDocument/2006/relationships" xmlns:p="http://schemas.openxmlformats.org/presentationml/2006/main">
-  <p:cSld>
-    <p:spTree>
-      <p:nvGrpSpPr>
-        <p:cNvPr id="1" name=""/>
-        <p:cNvGrpSpPr/>
-        <p:nvPr/>
-      </p:nvGrpSpPr>
-      <p:grpSpPr>
-        <a:xfrm>
-          <a:off x="0" y="0"/>
-          <a:ext cx="0" cy="0"/>
-          <a:chOff x="0" y="0"/>
-          <a:chExt cx="0" cy="0"/>
-        </a:xfrm>
-      </p:grpSpPr>
-      <p:sp>
-        <p:nvSpPr>
-          <p:cNvPr id="2" name="標題 1"/>
-          <p:cNvSpPr>
-            <a:spLocks noGrp="1"/>
-          </p:cNvSpPr>
-          <p:nvPr>
-            <p:ph type="title"/>
-          </p:nvPr>
-        </p:nvSpPr>
-        <p:spPr>
-          <a:xfrm>
-            <a:off x="932318" y="108349"/>
-            <a:ext cx="7743372" cy="519113"/>
-          </a:xfrm>
-        </p:spPr>
-        <p:txBody>
-          <a:bodyPr>
-            <a:noAutofit/>
-          </a:bodyPr>
-          <a:lstStyle/>
-          <a:p>
-            <a:r>
-              <a:rPr lang="en-US" altLang="zh-TW" dirty="0" err="1"/>
-              <a:t>EyeOS</a:t>
-            </a:r>
-            <a:r>
-              <a:rPr lang="en-US" altLang="zh-TW" dirty="0"/>
-              <a:t> - Web Desktop Virtualization</a:t>
-            </a:r>
-            <a:endParaRPr lang="zh-TW" altLang="en-US" dirty="0"/>
-          </a:p>
-        </p:txBody>
-      </p:sp>
-      <p:sp>
-        <p:nvSpPr>
-          <p:cNvPr id="3" name="內容版面配置區 2"/>
-          <p:cNvSpPr>
-            <a:spLocks noGrp="1"/>
-          </p:cNvSpPr>
-          <p:nvPr>
-            <p:ph idx="1"/>
-          </p:nvPr>
-        </p:nvSpPr>
-        <p:spPr>
-          <a:xfrm>
-            <a:off x="700314" y="833874"/>
-            <a:ext cx="7743372" cy="1152106"/>
-          </a:xfrm>
-        </p:spPr>
-        <p:txBody>
-          <a:bodyPr>
-            <a:noAutofit/>
-          </a:bodyPr>
-          <a:lstStyle/>
-          <a:p>
-            <a:r>
-              <a:rPr lang="en-US" altLang="zh-TW" sz="2200" dirty="0" err="1">
-                <a:latin typeface="Times New Roman" panose="02020603050405020304" pitchFamily="18" charset="0"/>
-                <a:cs typeface="Times New Roman" panose="02020603050405020304" pitchFamily="18" charset="0"/>
-              </a:rPr>
-              <a:t>eyeOS</a:t>
-            </a:r>
-            <a:r>
-              <a:rPr lang="en-US" altLang="zh-TW" sz="2200" dirty="0">
-                <a:latin typeface="Times New Roman" panose="02020603050405020304" pitchFamily="18" charset="0"/>
-                <a:cs typeface="Times New Roman" panose="02020603050405020304" pitchFamily="18" charset="0"/>
-              </a:rPr>
-              <a:t> is a web desktop following the cloud computing concept that seeks to enable collaboration and communication among users. It is mainly written in PHP, XML, and JavaScript</a:t>
-            </a:r>
-            <a:endParaRPr lang="zh-TW" altLang="en-US" sz="2200" dirty="0">
-              <a:latin typeface="Times New Roman" panose="02020603050405020304" pitchFamily="18" charset="0"/>
-              <a:cs typeface="Times New Roman" panose="02020603050405020304" pitchFamily="18" charset="0"/>
-            </a:endParaRPr>
-          </a:p>
-        </p:txBody>
-      </p:sp>
-      <p:pic>
-        <p:nvPicPr>
-          <p:cNvPr id="14338" name="Picture 2" descr="File:EyeOS-2.4.png"/>
-          <p:cNvPicPr>
-            <a:picLocks noChangeAspect="1" noChangeArrowheads="1"/>
-          </p:cNvPicPr>
-          <p:nvPr/>
-        </p:nvPicPr>
-        <p:blipFill>
-          <a:blip r:embed="rId2">
-            <a:extLst>
-              <a:ext uri="{28A0092B-C50C-407E-A947-70E740481C1C}">
-                <a14:useLocalDpi xmlns:a14="http://schemas.microsoft.com/office/drawing/2010/main" val="0"/>
-              </a:ext>
-            </a:extLst>
-          </a:blip>
-          <a:srcRect/>
-          <a:stretch>
-            <a:fillRect/>
-          </a:stretch>
-        </p:blipFill>
-        <p:spPr bwMode="auto">
-          <a:xfrm>
-            <a:off x="2663371" y="2078644"/>
-            <a:ext cx="3947886" cy="2467428"/>
-          </a:xfrm>
-          <a:prstGeom prst="rect">
-            <a:avLst/>
-          </a:prstGeom>
-          <a:noFill/>
-          <a:extLst>
-            <a:ext uri="{909E8E84-426E-40DD-AFC4-6F175D3DCCD1}">
-              <a14:hiddenFill xmlns:a14="http://schemas.microsoft.com/office/drawing/2010/main">
-                <a:solidFill>
-                  <a:srgbClr val="FFFFFF"/>
-                </a:solidFill>
-              </a14:hiddenFill>
-            </a:ext>
-          </a:extLst>
-        </p:spPr>
-      </p:pic>
-      <p:sp>
-        <p:nvSpPr>
-          <p:cNvPr id="4" name="灯片编号占位符 1">
-            <a:extLst>
-              <a:ext uri="{FF2B5EF4-FFF2-40B4-BE49-F238E27FC236}">
-                <a16:creationId xmlns:a16="http://schemas.microsoft.com/office/drawing/2014/main" id="{3A07BDC2-8DD3-FEE1-07A8-C70AE37DEC15}"/>
-              </a:ext>
-            </a:extLst>
-          </p:cNvPr>
-          <p:cNvSpPr>
-            <a:spLocks noGrp="1"/>
-          </p:cNvSpPr>
-          <p:nvPr>
-            <p:ph type="sldNum" sz="quarter" idx="10"/>
-          </p:nvPr>
-        </p:nvSpPr>
-        <p:spPr>
-          <a:xfrm>
-            <a:off x="6831013" y="4893471"/>
-            <a:ext cx="2133600" cy="254794"/>
-          </a:xfrm>
-        </p:spPr>
-        <p:txBody>
-          <a:bodyPr/>
-          <a:lstStyle/>
-          <a:p>
-            <a:fld id="{D9B6BDF2-6896-4B98-8776-C18582F63BA5}" type="slidenum">
-              <a:rPr lang="zh-TW" altLang="en-US" smtClean="0"/>
-              <a:pPr/>
-              <a:t>42</a:t>
-            </a:fld>
-            <a:endParaRPr lang="zh-TW" altLang="en-US"/>
-          </a:p>
-        </p:txBody>
-      </p:sp>
-    </p:spTree>
-    <p:extLst>
-      <p:ext uri="{BB962C8B-B14F-4D97-AF65-F5344CB8AC3E}">
-        <p14:creationId xmlns:p14="http://schemas.microsoft.com/office/powerpoint/2010/main" val="3208695809"/>
-      </p:ext>
-    </p:extLst>
-  </p:cSld>
-  <p:clrMapOvr>
-    <a:masterClrMapping/>
-  </p:clrMapOvr>
-</p:sld>
-</file>
-
-<file path=ppt/slides/slide43.xml><?xml version="1.0" encoding="utf-8"?>
-<p:sld xmlns:a="http://schemas.openxmlformats.org/drawingml/2006/main" xmlns:r="http://schemas.openxmlformats.org/officeDocument/2006/relationships" xmlns:p="http://schemas.openxmlformats.org/presentationml/2006/main">
-  <p:cSld>
-    <p:spTree>
-      <p:nvGrpSpPr>
-        <p:cNvPr id="1" name=""/>
-        <p:cNvGrpSpPr/>
-        <p:nvPr/>
-      </p:nvGrpSpPr>
-      <p:grpSpPr>
-        <a:xfrm>
-          <a:off x="0" y="0"/>
-          <a:ext cx="0" cy="0"/>
-          <a:chOff x="0" y="0"/>
-          <a:chExt cx="0" cy="0"/>
-        </a:xfrm>
-      </p:grpSpPr>
-      <p:sp>
-        <p:nvSpPr>
           <p:cNvPr id="4" name="標題 3"/>
           <p:cNvSpPr>
             <a:spLocks noGrp="1"/>
@@ -13902,7 +13693,7 @@
             <a:fld id="{D9B6BDF2-6896-4B98-8776-C18582F63BA5}" type="slidenum">
               <a:rPr lang="zh-TW" altLang="en-US" smtClean="0"/>
               <a:pPr/>
-              <a:t>43</a:t>
+              <a:t>41</a:t>
             </a:fld>
             <a:endParaRPr lang="zh-TW" altLang="en-US"/>
           </a:p>
@@ -13921,7 +13712,7 @@
 </p:sld>
 </file>
 
-<file path=ppt/slides/slide44.xml><?xml version="1.0" encoding="utf-8"?>
+<file path=ppt/slides/slide42.xml><?xml version="1.0" encoding="utf-8"?>
 <p:sld xmlns:a="http://schemas.openxmlformats.org/drawingml/2006/main" xmlns:r="http://schemas.openxmlformats.org/officeDocument/2006/relationships" xmlns:p="http://schemas.openxmlformats.org/presentationml/2006/main">
   <p:cSld>
     <p:spTree>
@@ -14054,8 +13845,8 @@
         </p:nvSpPr>
         <p:spPr>
           <a:xfrm>
-            <a:off x="943429" y="858608"/>
-            <a:ext cx="4027716" cy="3394472"/>
+            <a:off x="806777" y="858608"/>
+            <a:ext cx="4164368" cy="3394472"/>
           </a:xfrm>
         </p:spPr>
         <p:txBody>
@@ -14173,7 +13964,7 @@
             <a:fld id="{D9B6BDF2-6896-4B98-8776-C18582F63BA5}" type="slidenum">
               <a:rPr lang="zh-TW" altLang="en-US" smtClean="0"/>
               <a:pPr/>
-              <a:t>44</a:t>
+              <a:t>42</a:t>
             </a:fld>
             <a:endParaRPr lang="zh-TW" altLang="en-US"/>
           </a:p>
@@ -14192,7 +13983,7 @@
 </p:sld>
 </file>
 
-<file path=ppt/slides/slide45.xml><?xml version="1.0" encoding="utf-8"?>
+<file path=ppt/slides/slide43.xml><?xml version="1.0" encoding="utf-8"?>
 <p:sld xmlns:a="http://schemas.openxmlformats.org/drawingml/2006/main" xmlns:r="http://schemas.openxmlformats.org/officeDocument/2006/relationships" xmlns:p="http://schemas.openxmlformats.org/presentationml/2006/main">
   <p:cSld>
     <p:spTree>
@@ -14249,8 +14040,8 @@
         </p:nvSpPr>
         <p:spPr>
           <a:xfrm>
-            <a:off x="986971" y="833596"/>
-            <a:ext cx="7170057" cy="2043675"/>
+            <a:off x="609600" y="779354"/>
+            <a:ext cx="8355013" cy="2043675"/>
           </a:xfrm>
         </p:spPr>
         <p:txBody>
@@ -14259,11 +14050,6 @@
           </a:bodyPr>
           <a:lstStyle/>
           <a:p>
-            <a:pPr>
-              <a:spcBef>
-                <a:spcPts val="0"/>
-              </a:spcBef>
-            </a:pPr>
             <a:r>
               <a:rPr lang="en-US" altLang="zh-TW" sz="2000" dirty="0">
                 <a:latin typeface="Times New Roman" panose="02020603050405020304" pitchFamily="18" charset="0"/>
@@ -14273,11 +14059,6 @@
             </a:r>
           </a:p>
           <a:p>
-            <a:pPr>
-              <a:spcBef>
-                <a:spcPts val="0"/>
-              </a:spcBef>
-            </a:pPr>
             <a:r>
               <a:rPr lang="en-US" altLang="zh-TW" sz="2000" dirty="0">
                 <a:latin typeface="Times New Roman" panose="02020603050405020304" pitchFamily="18" charset="0"/>
@@ -14287,11 +14068,7 @@
             </a:r>
           </a:p>
           <a:p>
-            <a:pPr lvl="1">
-              <a:spcBef>
-                <a:spcPts val="0"/>
-              </a:spcBef>
-            </a:pPr>
+            <a:pPr lvl="1"/>
             <a:r>
               <a:rPr lang="en-US" altLang="zh-TW" sz="1600" dirty="0">
                 <a:latin typeface="Times New Roman" panose="02020603050405020304" pitchFamily="18" charset="0"/>
@@ -14301,11 +14078,7 @@
             </a:r>
           </a:p>
           <a:p>
-            <a:pPr lvl="1">
-              <a:spcBef>
-                <a:spcPts val="0"/>
-              </a:spcBef>
-            </a:pPr>
+            <a:pPr lvl="1"/>
             <a:r>
               <a:rPr lang="en-US" altLang="zh-TW" sz="1600" dirty="0" err="1">
                 <a:latin typeface="Times New Roman" panose="02020603050405020304" pitchFamily="18" charset="0"/>
@@ -14322,11 +14095,7 @@
             </a:r>
           </a:p>
           <a:p>
-            <a:pPr lvl="1">
-              <a:spcBef>
-                <a:spcPts val="0"/>
-              </a:spcBef>
-            </a:pPr>
+            <a:pPr lvl="1"/>
             <a:r>
               <a:rPr lang="en-US" altLang="zh-TW" sz="1600" dirty="0">
                 <a:latin typeface="Times New Roman" panose="02020603050405020304" pitchFamily="18" charset="0"/>
@@ -14336,11 +14105,6 @@
             </a:r>
           </a:p>
           <a:p>
-            <a:pPr>
-              <a:spcBef>
-                <a:spcPts val="0"/>
-              </a:spcBef>
-            </a:pPr>
             <a:r>
               <a:rPr lang="en-US" altLang="zh-TW" sz="2000" dirty="0">
                 <a:latin typeface="Times New Roman" panose="02020603050405020304" pitchFamily="18" charset="0"/>
@@ -14444,7 +14208,7 @@
             <a:fld id="{D9B6BDF2-6896-4B98-8776-C18582F63BA5}" type="slidenum">
               <a:rPr lang="zh-TW" altLang="en-US" smtClean="0"/>
               <a:pPr/>
-              <a:t>45</a:t>
+              <a:t>43</a:t>
             </a:fld>
             <a:endParaRPr lang="zh-TW" altLang="en-US"/>
           </a:p>
@@ -14463,7 +14227,7 @@
 </p:sld>
 </file>
 
-<file path=ppt/slides/slide46.xml><?xml version="1.0" encoding="utf-8"?>
+<file path=ppt/slides/slide44.xml><?xml version="1.0" encoding="utf-8"?>
 <p:sld xmlns:a="http://schemas.openxmlformats.org/drawingml/2006/main" xmlns:r="http://schemas.openxmlformats.org/officeDocument/2006/relationships" xmlns:p="http://schemas.openxmlformats.org/presentationml/2006/main">
   <p:cSld>
     <p:spTree>
@@ -14492,8 +14256,8 @@
         </p:nvSpPr>
         <p:spPr>
           <a:xfrm>
-            <a:off x="880532" y="108349"/>
-            <a:ext cx="7795158" cy="519113"/>
+            <a:off x="956733" y="108349"/>
+            <a:ext cx="7718957" cy="519113"/>
           </a:xfrm>
         </p:spPr>
         <p:txBody>
@@ -14520,8 +14284,8 @@
         </p:nvSpPr>
         <p:spPr>
           <a:xfrm>
-            <a:off x="880532" y="769392"/>
-            <a:ext cx="6747935" cy="1048671"/>
+            <a:off x="1032933" y="787385"/>
+            <a:ext cx="7642756" cy="1048671"/>
           </a:xfrm>
         </p:spPr>
         <p:txBody>
@@ -14630,7 +14394,7 @@
             <a:fld id="{D9B6BDF2-6896-4B98-8776-C18582F63BA5}" type="slidenum">
               <a:rPr lang="zh-TW" altLang="en-US" smtClean="0"/>
               <a:pPr/>
-              <a:t>46</a:t>
+              <a:t>44</a:t>
             </a:fld>
             <a:endParaRPr lang="zh-TW" altLang="en-US"/>
           </a:p>
@@ -14649,7 +14413,7 @@
 </p:sld>
 </file>
 
-<file path=ppt/slides/slide47.xml><?xml version="1.0" encoding="utf-8"?>
+<file path=ppt/slides/slide45.xml><?xml version="1.0" encoding="utf-8"?>
 <p:sld xmlns:a="http://schemas.openxmlformats.org/drawingml/2006/main" xmlns:r="http://schemas.openxmlformats.org/officeDocument/2006/relationships" xmlns:p="http://schemas.openxmlformats.org/presentationml/2006/main">
   <p:cSld>
     <p:spTree>
@@ -14817,7 +14581,7 @@
             <a:fld id="{D9B6BDF2-6896-4B98-8776-C18582F63BA5}" type="slidenum">
               <a:rPr lang="zh-TW" altLang="en-US" smtClean="0"/>
               <a:pPr/>
-              <a:t>47</a:t>
+              <a:t>45</a:t>
             </a:fld>
             <a:endParaRPr lang="zh-TW" altLang="en-US"/>
           </a:p>
@@ -17546,8 +17310,8 @@
         </p:blipFill>
         <p:spPr bwMode="auto">
           <a:xfrm>
-            <a:off x="1729740" y="937387"/>
-            <a:ext cx="5768340" cy="3589191"/>
+            <a:off x="1898702" y="937387"/>
+            <a:ext cx="5543497" cy="3449288"/>
           </a:xfrm>
           <a:prstGeom prst="rect">
             <a:avLst/>

--- a/Slides/CSC6103/VT-01 Virtualization Introduction.pptx
+++ b/Slides/CSC6103/VT-01 Virtualization Introduction.pptx
@@ -4528,8 +4528,8 @@
         </p:nvSpPr>
         <p:spPr>
           <a:xfrm>
-            <a:off x="841829" y="108349"/>
-            <a:ext cx="7833861" cy="519113"/>
+            <a:off x="902305" y="108349"/>
+            <a:ext cx="7773385" cy="519113"/>
           </a:xfrm>
         </p:spPr>
         <p:txBody>
@@ -6027,8 +6027,8 @@
         </p:nvSpPr>
         <p:spPr>
           <a:xfrm>
-            <a:off x="1052286" y="108349"/>
-            <a:ext cx="7623404" cy="519113"/>
+            <a:off x="922867" y="108349"/>
+            <a:ext cx="7752823" cy="519113"/>
           </a:xfrm>
         </p:spPr>
         <p:txBody>

--- a/Slides/CSC6103/VT-01 Virtualization Introduction.pptx
+++ b/Slides/CSC6103/VT-01 Virtualization Introduction.pptx
@@ -4528,7 +4528,7 @@
         </p:nvSpPr>
         <p:spPr>
           <a:xfrm>
-            <a:off x="841829" y="108349"/>
+            <a:off x="926499" y="82948"/>
             <a:ext cx="7833861" cy="519113"/>
           </a:xfrm>
         </p:spPr>
@@ -4554,7 +4554,7 @@
         </p:nvSpPr>
         <p:spPr>
           <a:xfrm>
-            <a:off x="902305" y="806419"/>
+            <a:off x="1037772" y="806419"/>
             <a:ext cx="5314326" cy="2703984"/>
           </a:xfrm>
           <a:prstGeom prst="rect">
@@ -5786,7 +5786,7 @@
         </p:nvSpPr>
         <p:spPr>
           <a:xfrm>
-            <a:off x="914400" y="108349"/>
+            <a:off x="914400" y="82948"/>
             <a:ext cx="7761290" cy="519113"/>
           </a:xfrm>
         </p:spPr>
@@ -5814,8 +5814,8 @@
         </p:nvSpPr>
         <p:spPr>
           <a:xfrm>
-            <a:off x="1182914" y="844153"/>
-            <a:ext cx="5348515" cy="3671888"/>
+            <a:off x="1016000" y="844153"/>
+            <a:ext cx="5515429" cy="3671888"/>
           </a:xfrm>
         </p:spPr>
         <p:txBody>
@@ -6027,7 +6027,7 @@
         </p:nvSpPr>
         <p:spPr>
           <a:xfrm>
-            <a:off x="1052286" y="108349"/>
+            <a:off x="959149" y="82948"/>
             <a:ext cx="7623404" cy="519113"/>
           </a:xfrm>
         </p:spPr>
@@ -6461,7 +6461,7 @@
         <p:spPr>
           <a:xfrm>
             <a:off x="994230" y="844153"/>
-            <a:ext cx="7244798" cy="3360202"/>
+            <a:ext cx="7336970" cy="3202914"/>
           </a:xfrm>
         </p:spPr>
         <p:txBody>
@@ -6870,7 +6870,7 @@
           </p:nvCxnSpPr>
           <p:spPr>
             <a:xfrm flipV="1">
-              <a:off x="3323565" y="3921900"/>
+              <a:off x="3323565" y="3888823"/>
               <a:ext cx="0" cy="432048"/>
             </a:xfrm>
             <a:prstGeom prst="straightConnector1">
@@ -7006,8 +7006,8 @@
         </p:nvSpPr>
         <p:spPr>
           <a:xfrm>
-            <a:off x="892629" y="108349"/>
-            <a:ext cx="7783061" cy="519113"/>
+            <a:off x="880533" y="108349"/>
+            <a:ext cx="7795157" cy="519113"/>
           </a:xfrm>
         </p:spPr>
         <p:txBody>
@@ -7034,8 +7034,8 @@
         </p:nvSpPr>
         <p:spPr>
           <a:xfrm>
-            <a:off x="892630" y="844153"/>
-            <a:ext cx="7518400" cy="2798933"/>
+            <a:off x="982132" y="844153"/>
+            <a:ext cx="7428897" cy="2798933"/>
           </a:xfrm>
         </p:spPr>
         <p:txBody>
@@ -7138,7 +7138,7 @@
         </p:nvSpPr>
         <p:spPr>
           <a:xfrm>
-            <a:off x="885371" y="108349"/>
+            <a:off x="936173" y="82948"/>
             <a:ext cx="7790319" cy="519113"/>
           </a:xfrm>
         </p:spPr>
@@ -7309,7 +7309,7 @@
         </p:nvSpPr>
         <p:spPr>
           <a:xfrm>
-            <a:off x="885371" y="108349"/>
+            <a:off x="944640" y="82948"/>
             <a:ext cx="7790319" cy="519113"/>
           </a:xfrm>
         </p:spPr>
@@ -7572,7 +7572,7 @@
         </p:nvSpPr>
         <p:spPr>
           <a:xfrm>
-            <a:off x="914400" y="108349"/>
+            <a:off x="973669" y="82948"/>
             <a:ext cx="7761290" cy="519113"/>
           </a:xfrm>
         </p:spPr>
@@ -7968,13 +7968,13 @@
         </p:nvSpPr>
         <p:spPr>
           <a:xfrm>
-            <a:off x="1014686" y="0"/>
-            <a:ext cx="6172200" cy="756084"/>
+            <a:off x="904618" y="104537"/>
+            <a:ext cx="6791581" cy="490113"/>
           </a:xfrm>
         </p:spPr>
         <p:txBody>
           <a:bodyPr>
-            <a:normAutofit fontScale="90000"/>
+            <a:noAutofit/>
           </a:bodyPr>
           <a:lstStyle/>
           <a:p>
@@ -9829,8 +9829,8 @@
         </p:nvSpPr>
         <p:spPr>
           <a:xfrm>
-            <a:off x="856342" y="108349"/>
-            <a:ext cx="7819348" cy="519113"/>
+            <a:off x="931334" y="82948"/>
+            <a:ext cx="7795157" cy="519113"/>
           </a:xfrm>
         </p:spPr>
         <p:txBody>
@@ -10068,7 +10068,7 @@
         </p:nvSpPr>
         <p:spPr>
           <a:xfrm>
-            <a:off x="921657" y="108349"/>
+            <a:off x="972459" y="82948"/>
             <a:ext cx="7754034" cy="519113"/>
           </a:xfrm>
         </p:spPr>
@@ -10240,8 +10240,8 @@
         </p:nvSpPr>
         <p:spPr>
           <a:xfrm>
-            <a:off x="936171" y="108349"/>
-            <a:ext cx="7739519" cy="519113"/>
+            <a:off x="931333" y="108349"/>
+            <a:ext cx="7744357" cy="519113"/>
           </a:xfrm>
         </p:spPr>
         <p:txBody>
@@ -11107,7 +11107,7 @@
         </p:nvSpPr>
         <p:spPr>
           <a:xfrm>
-            <a:off x="878114" y="108349"/>
+            <a:off x="878114" y="82948"/>
             <a:ext cx="7797576" cy="519113"/>
           </a:xfrm>
         </p:spPr>
@@ -11248,8 +11248,8 @@
         </p:nvSpPr>
         <p:spPr>
           <a:xfrm>
-            <a:off x="899886" y="108349"/>
-            <a:ext cx="7775804" cy="519113"/>
+            <a:off x="904775" y="79474"/>
+            <a:ext cx="7770915" cy="519113"/>
           </a:xfrm>
         </p:spPr>
         <p:txBody>
@@ -11276,8 +11276,8 @@
         </p:nvSpPr>
         <p:spPr>
           <a:xfrm>
-            <a:off x="985156" y="870548"/>
-            <a:ext cx="6961415" cy="2184709"/>
+            <a:off x="1064849" y="870548"/>
+            <a:ext cx="6832964" cy="2184709"/>
           </a:xfrm>
         </p:spPr>
         <p:txBody>
@@ -11303,7 +11303,64 @@
                 <a:ea typeface="Yu Gothic Light" panose="020B0300000000000000" pitchFamily="34" charset="-128"/>
                 <a:cs typeface="Times New Roman" panose="02020603050405020304" pitchFamily="18" charset="0"/>
               </a:rPr>
-              <a:t>In computing, virtualization means to create a virtual version of a device or resource, such as a server, storage device, network or even an operating system where the framework divides the resource into one or more execution environments.</a:t>
+              <a:t>In computing, virtualization means to create a </a:t>
+            </a:r>
+            <a:r>
+              <a:rPr lang="en-US" altLang="zh-TW" sz="2000" dirty="0">
+                <a:solidFill>
+                  <a:srgbClr val="FF0000"/>
+                </a:solidFill>
+                <a:latin typeface="Times New Roman" panose="02020603050405020304" pitchFamily="18" charset="0"/>
+                <a:ea typeface="Yu Gothic Light" panose="020B0300000000000000" pitchFamily="34" charset="-128"/>
+                <a:cs typeface="Times New Roman" panose="02020603050405020304" pitchFamily="18" charset="0"/>
+              </a:rPr>
+              <a:t>virtual version </a:t>
+            </a:r>
+            <a:r>
+              <a:rPr lang="en-US" altLang="zh-TW" sz="2000" dirty="0">
+                <a:latin typeface="Times New Roman" panose="02020603050405020304" pitchFamily="18" charset="0"/>
+                <a:ea typeface="Yu Gothic Light" panose="020B0300000000000000" pitchFamily="34" charset="-128"/>
+                <a:cs typeface="Times New Roman" panose="02020603050405020304" pitchFamily="18" charset="0"/>
+              </a:rPr>
+              <a:t>of a </a:t>
+            </a:r>
+            <a:r>
+              <a:rPr lang="en-US" altLang="zh-TW" sz="2000" dirty="0">
+                <a:solidFill>
+                  <a:srgbClr val="FF0000"/>
+                </a:solidFill>
+                <a:latin typeface="Times New Roman" panose="02020603050405020304" pitchFamily="18" charset="0"/>
+                <a:ea typeface="Yu Gothic Light" panose="020B0300000000000000" pitchFamily="34" charset="-128"/>
+                <a:cs typeface="Times New Roman" panose="02020603050405020304" pitchFamily="18" charset="0"/>
+              </a:rPr>
+              <a:t>device </a:t>
+            </a:r>
+            <a:r>
+              <a:rPr lang="en-US" altLang="zh-TW" sz="2000" dirty="0">
+                <a:latin typeface="Times New Roman" panose="02020603050405020304" pitchFamily="18" charset="0"/>
+                <a:ea typeface="Yu Gothic Light" panose="020B0300000000000000" pitchFamily="34" charset="-128"/>
+                <a:cs typeface="Times New Roman" panose="02020603050405020304" pitchFamily="18" charset="0"/>
+              </a:rPr>
+              <a:t>or </a:t>
+            </a:r>
+            <a:r>
+              <a:rPr lang="en-US" altLang="zh-TW" sz="2000" dirty="0">
+                <a:solidFill>
+                  <a:srgbClr val="FF0000"/>
+                </a:solidFill>
+                <a:latin typeface="Times New Roman" panose="02020603050405020304" pitchFamily="18" charset="0"/>
+                <a:ea typeface="Yu Gothic Light" panose="020B0300000000000000" pitchFamily="34" charset="-128"/>
+                <a:cs typeface="Times New Roman" panose="02020603050405020304" pitchFamily="18" charset="0"/>
+              </a:rPr>
+              <a:t>resource</a:t>
+            </a:r>
+            <a:r>
+              <a:rPr lang="en-US" altLang="zh-TW" sz="2000" dirty="0">
+                <a:latin typeface="Times New Roman" panose="02020603050405020304" pitchFamily="18" charset="0"/>
+                <a:ea typeface="Yu Gothic Light" panose="020B0300000000000000" pitchFamily="34" charset="-128"/>
+                <a:cs typeface="Times New Roman" panose="02020603050405020304" pitchFamily="18" charset="0"/>
+              </a:rPr>
+              <a:t>, such as a server, storage device, network or even an operating system where the framework divides the resource into one or more execution environments.</a:t>
             </a:r>
             <a:endParaRPr lang="zh-TW" altLang="en-US" sz="2000" dirty="0">
               <a:latin typeface="Times New Roman" panose="02020603050405020304" pitchFamily="18" charset="0"/>
@@ -11390,8 +11447,8 @@
         </p:nvSpPr>
         <p:spPr>
           <a:xfrm>
-            <a:off x="856343" y="108349"/>
-            <a:ext cx="7819347" cy="519113"/>
+            <a:off x="922867" y="82948"/>
+            <a:ext cx="7752823" cy="519113"/>
           </a:xfrm>
         </p:spPr>
         <p:txBody>
@@ -11504,7 +11561,7 @@
         </p:nvSpPr>
         <p:spPr>
           <a:xfrm>
-            <a:off x="856342" y="861087"/>
+            <a:off x="856342" y="844153"/>
             <a:ext cx="4985657" cy="3702446"/>
           </a:xfrm>
         </p:spPr>
@@ -11678,7 +11735,7 @@
         </p:nvSpPr>
         <p:spPr>
           <a:xfrm>
-            <a:off x="965200" y="897391"/>
+            <a:off x="965200" y="821188"/>
             <a:ext cx="7106931" cy="1989742"/>
           </a:xfrm>
         </p:spPr>
@@ -12053,8 +12110,8 @@
         </p:nvSpPr>
         <p:spPr>
           <a:xfrm>
-            <a:off x="870857" y="91415"/>
-            <a:ext cx="7804833" cy="519113"/>
+            <a:off x="881086" y="91415"/>
+            <a:ext cx="7794604" cy="519113"/>
           </a:xfrm>
         </p:spPr>
         <p:txBody>
@@ -12229,8 +12286,8 @@
         </p:nvSpPr>
         <p:spPr>
           <a:xfrm>
-            <a:off x="878113" y="108349"/>
-            <a:ext cx="8003419" cy="519113"/>
+            <a:off x="927029" y="108349"/>
+            <a:ext cx="7954503" cy="519113"/>
           </a:xfrm>
         </p:spPr>
         <p:txBody>
@@ -12401,8 +12458,8 @@
         </p:nvSpPr>
         <p:spPr>
           <a:xfrm>
-            <a:off x="907143" y="108349"/>
-            <a:ext cx="7768547" cy="519113"/>
+            <a:off x="897467" y="108349"/>
+            <a:ext cx="7778223" cy="519113"/>
           </a:xfrm>
         </p:spPr>
         <p:txBody>
@@ -12544,8 +12601,8 @@
         </p:nvSpPr>
         <p:spPr>
           <a:xfrm>
-            <a:off x="921657" y="108349"/>
-            <a:ext cx="7754033" cy="519113"/>
+            <a:off x="948267" y="82948"/>
+            <a:ext cx="7727423" cy="519113"/>
           </a:xfrm>
         </p:spPr>
         <p:txBody>
@@ -12572,8 +12629,8 @@
         </p:nvSpPr>
         <p:spPr>
           <a:xfrm>
-            <a:off x="769256" y="844153"/>
-            <a:ext cx="7917543" cy="1209618"/>
+            <a:off x="948267" y="844153"/>
+            <a:ext cx="7738532" cy="1209618"/>
           </a:xfrm>
         </p:spPr>
         <p:txBody>
@@ -12895,8 +12952,8 @@
         </p:nvSpPr>
         <p:spPr>
           <a:xfrm>
-            <a:off x="965200" y="108349"/>
-            <a:ext cx="7710490" cy="519113"/>
+            <a:off x="914400" y="82948"/>
+            <a:ext cx="7761290" cy="519113"/>
           </a:xfrm>
         </p:spPr>
         <p:txBody>
@@ -13071,7 +13128,7 @@
         </p:nvSpPr>
         <p:spPr>
           <a:xfrm>
-            <a:off x="870857" y="108349"/>
+            <a:off x="930126" y="82948"/>
             <a:ext cx="7804833" cy="519113"/>
           </a:xfrm>
         </p:spPr>
@@ -13243,8 +13300,8 @@
         </p:nvSpPr>
         <p:spPr>
           <a:xfrm>
-            <a:off x="870856" y="108349"/>
-            <a:ext cx="7804833" cy="519113"/>
+            <a:off x="899160" y="79474"/>
+            <a:ext cx="7776529" cy="519113"/>
           </a:xfrm>
         </p:spPr>
         <p:txBody>
@@ -13282,7 +13339,7 @@
         </p:blipFill>
         <p:spPr bwMode="auto">
           <a:xfrm>
-            <a:off x="1374162" y="986836"/>
+            <a:off x="1496082" y="986836"/>
             <a:ext cx="5963835" cy="3563392"/>
           </a:xfrm>
           <a:prstGeom prst="rect">
@@ -13377,7 +13434,7 @@
         </p:nvSpPr>
         <p:spPr>
           <a:xfrm>
-            <a:off x="932318" y="108349"/>
+            <a:off x="966186" y="82948"/>
             <a:ext cx="7743372" cy="519113"/>
           </a:xfrm>
         </p:spPr>
@@ -13817,7 +13874,7 @@
         </p:nvSpPr>
         <p:spPr>
           <a:xfrm>
-            <a:off x="943429" y="108349"/>
+            <a:off x="968830" y="82948"/>
             <a:ext cx="7732261" cy="519113"/>
           </a:xfrm>
         </p:spPr>
@@ -14012,7 +14069,7 @@
         </p:nvSpPr>
         <p:spPr>
           <a:xfrm>
-            <a:off x="907143" y="108349"/>
+            <a:off x="941011" y="82948"/>
             <a:ext cx="7768547" cy="519113"/>
           </a:xfrm>
         </p:spPr>
@@ -14040,8 +14097,8 @@
         </p:nvSpPr>
         <p:spPr>
           <a:xfrm>
-            <a:off x="609600" y="779354"/>
-            <a:ext cx="8355013" cy="2043675"/>
+            <a:off x="977184" y="808195"/>
+            <a:ext cx="7696200" cy="2043675"/>
           </a:xfrm>
         </p:spPr>
         <p:txBody>
@@ -14050,6 +14107,11 @@
           </a:bodyPr>
           <a:lstStyle/>
           <a:p>
+            <a:pPr>
+              <a:spcBef>
+                <a:spcPts val="0"/>
+              </a:spcBef>
+            </a:pPr>
             <a:r>
               <a:rPr lang="en-US" altLang="zh-TW" sz="2000" dirty="0">
                 <a:latin typeface="Times New Roman" panose="02020603050405020304" pitchFamily="18" charset="0"/>
@@ -14059,6 +14121,11 @@
             </a:r>
           </a:p>
           <a:p>
+            <a:pPr>
+              <a:spcBef>
+                <a:spcPts val="0"/>
+              </a:spcBef>
+            </a:pPr>
             <a:r>
               <a:rPr lang="en-US" altLang="zh-TW" sz="2000" dirty="0">
                 <a:latin typeface="Times New Roman" panose="02020603050405020304" pitchFamily="18" charset="0"/>
@@ -14068,9 +14135,13 @@
             </a:r>
           </a:p>
           <a:p>
-            <a:pPr lvl="1"/>
-            <a:r>
-              <a:rPr lang="en-US" altLang="zh-TW" sz="1600" dirty="0">
+            <a:pPr lvl="1">
+              <a:spcBef>
+                <a:spcPts val="0"/>
+              </a:spcBef>
+            </a:pPr>
+            <a:r>
+              <a:rPr lang="en-US" altLang="zh-TW" sz="1800" i="1" dirty="0">
                 <a:latin typeface="Times New Roman" panose="02020603050405020304" pitchFamily="18" charset="0"/>
                 <a:cs typeface="Times New Roman" panose="02020603050405020304" pitchFamily="18" charset="0"/>
               </a:rPr>
@@ -14078,16 +14149,20 @@
             </a:r>
           </a:p>
           <a:p>
-            <a:pPr lvl="1"/>
-            <a:r>
-              <a:rPr lang="en-US" altLang="zh-TW" sz="1600" dirty="0" err="1">
+            <a:pPr lvl="1">
+              <a:spcBef>
+                <a:spcPts val="0"/>
+              </a:spcBef>
+            </a:pPr>
+            <a:r>
+              <a:rPr lang="en-US" altLang="zh-TW" sz="1800" i="1" dirty="0" err="1">
                 <a:latin typeface="Times New Roman" panose="02020603050405020304" pitchFamily="18" charset="0"/>
                 <a:cs typeface="Times New Roman" panose="02020603050405020304" pitchFamily="18" charset="0"/>
               </a:rPr>
               <a:t>Hyp</a:t>
             </a:r>
             <a:r>
-              <a:rPr lang="en-US" altLang="zh-TW" sz="1600" dirty="0">
+              <a:rPr lang="en-US" altLang="zh-TW" sz="1800" i="1" dirty="0">
                 <a:latin typeface="Times New Roman" panose="02020603050405020304" pitchFamily="18" charset="0"/>
                 <a:cs typeface="Times New Roman" panose="02020603050405020304" pitchFamily="18" charset="0"/>
               </a:rPr>
@@ -14095,9 +14170,13 @@
             </a:r>
           </a:p>
           <a:p>
-            <a:pPr lvl="1"/>
-            <a:r>
-              <a:rPr lang="en-US" altLang="zh-TW" sz="1600" dirty="0">
+            <a:pPr lvl="1">
+              <a:spcBef>
+                <a:spcPts val="0"/>
+              </a:spcBef>
+            </a:pPr>
+            <a:r>
+              <a:rPr lang="en-US" altLang="zh-TW" sz="1800" i="1" dirty="0">
                 <a:latin typeface="Times New Roman" panose="02020603050405020304" pitchFamily="18" charset="0"/>
                 <a:cs typeface="Times New Roman" panose="02020603050405020304" pitchFamily="18" charset="0"/>
               </a:rPr>
@@ -14105,6 +14184,11 @@
             </a:r>
           </a:p>
           <a:p>
+            <a:pPr>
+              <a:spcBef>
+                <a:spcPts val="0"/>
+              </a:spcBef>
+            </a:pPr>
             <a:r>
               <a:rPr lang="en-US" altLang="zh-TW" sz="2000" dirty="0">
                 <a:latin typeface="Times New Roman" panose="02020603050405020304" pitchFamily="18" charset="0"/>
@@ -14138,8 +14222,8 @@
         </p:blipFill>
         <p:spPr bwMode="auto">
           <a:xfrm>
-            <a:off x="2670629" y="2877271"/>
-            <a:ext cx="4263347" cy="1671144"/>
+            <a:off x="2777064" y="2987876"/>
+            <a:ext cx="4089176" cy="1602873"/>
           </a:xfrm>
           <a:prstGeom prst="rect">
             <a:avLst/>
@@ -14256,7 +14340,7 @@
         </p:nvSpPr>
         <p:spPr>
           <a:xfrm>
-            <a:off x="956733" y="108349"/>
+            <a:off x="965200" y="82948"/>
             <a:ext cx="7718957" cy="519113"/>
           </a:xfrm>
         </p:spPr>
@@ -14347,7 +14431,7 @@
         </p:blipFill>
         <p:spPr bwMode="auto">
           <a:xfrm>
-            <a:off x="2938151" y="1959994"/>
+            <a:off x="2938151" y="2002329"/>
             <a:ext cx="3034477" cy="2567190"/>
           </a:xfrm>
           <a:prstGeom prst="rect">
@@ -14442,7 +14526,7 @@
         </p:nvSpPr>
         <p:spPr>
           <a:xfrm>
-            <a:off x="896260" y="108349"/>
+            <a:off x="896260" y="82948"/>
             <a:ext cx="7779430" cy="519113"/>
           </a:xfrm>
         </p:spPr>
@@ -14629,8 +14713,8 @@
         </p:nvSpPr>
         <p:spPr>
           <a:xfrm>
-            <a:off x="907143" y="108349"/>
-            <a:ext cx="7768547" cy="519113"/>
+            <a:off x="904775" y="82948"/>
+            <a:ext cx="7770915" cy="519113"/>
           </a:xfrm>
         </p:spPr>
         <p:txBody>
@@ -14663,13 +14747,13 @@
               </a:ext>
             </a:extLst>
           </a:blip>
-          <a:srcRect t="8520"/>
+          <a:srcRect t="8520" b="2545"/>
           <a:stretch/>
         </p:blipFill>
         <p:spPr bwMode="auto">
           <a:xfrm>
             <a:off x="1349639" y="913523"/>
-            <a:ext cx="6271062" cy="3693886"/>
+            <a:ext cx="6271062" cy="3591099"/>
           </a:xfrm>
           <a:prstGeom prst="rect">
             <a:avLst/>
@@ -17433,8 +17517,8 @@
         </p:nvSpPr>
         <p:spPr>
           <a:xfrm>
-            <a:off x="856343" y="844153"/>
-            <a:ext cx="7511143" cy="2356247"/>
+            <a:off x="940405" y="920353"/>
+            <a:ext cx="7263190" cy="2356247"/>
           </a:xfrm>
         </p:spPr>
         <p:txBody>
@@ -17546,8 +17630,8 @@
         </p:nvSpPr>
         <p:spPr>
           <a:xfrm>
-            <a:off x="921657" y="108349"/>
-            <a:ext cx="7754033" cy="519113"/>
+            <a:off x="948267" y="82948"/>
+            <a:ext cx="7727423" cy="519113"/>
           </a:xfrm>
         </p:spPr>
         <p:txBody>

--- a/Slides/CSC6103/VT-01 Virtualization Introduction.pptx
+++ b/Slides/CSC6103/VT-01 Virtualization Introduction.pptx
@@ -7166,69 +7166,230 @@
         </p:nvSpPr>
         <p:spPr>
           <a:xfrm>
-            <a:off x="965200" y="844153"/>
-            <a:ext cx="7329714" cy="3671888"/>
+            <a:off x="840620" y="810286"/>
+            <a:ext cx="7462760" cy="3541581"/>
           </a:xfrm>
         </p:spPr>
         <p:txBody>
           <a:bodyPr/>
           <a:lstStyle/>
           <a:p>
-            <a:r>
-              <a:rPr lang="en-US" altLang="zh-TW" sz="2400" dirty="0">
-                <a:latin typeface="Times New Roman" panose="02020603050405020304" pitchFamily="18" charset="0"/>
-                <a:cs typeface="Times New Roman" panose="02020603050405020304" pitchFamily="18" charset="0"/>
-              </a:rPr>
-              <a:t>In their 1974 article "Formal Requirements for </a:t>
-            </a:r>
-            <a:r>
-              <a:rPr lang="en-US" altLang="zh-TW" sz="2400" dirty="0" err="1">
-                <a:latin typeface="Times New Roman" panose="02020603050405020304" pitchFamily="18" charset="0"/>
-                <a:cs typeface="Times New Roman" panose="02020603050405020304" pitchFamily="18" charset="0"/>
-              </a:rPr>
-              <a:t>Virtualizable</a:t>
-            </a:r>
-            <a:r>
-              <a:rPr lang="en-US" altLang="zh-TW" sz="2400" dirty="0">
-                <a:latin typeface="Times New Roman" panose="02020603050405020304" pitchFamily="18" charset="0"/>
-                <a:cs typeface="Times New Roman" panose="02020603050405020304" pitchFamily="18" charset="0"/>
-              </a:rPr>
-              <a:t> Third Generation Architectures" Gerald J. </a:t>
-            </a:r>
-            <a:r>
-              <a:rPr lang="en-US" altLang="zh-TW" sz="2400" dirty="0" err="1">
-                <a:latin typeface="Times New Roman" panose="02020603050405020304" pitchFamily="18" charset="0"/>
-                <a:cs typeface="Times New Roman" panose="02020603050405020304" pitchFamily="18" charset="0"/>
-              </a:rPr>
-              <a:t>Popek</a:t>
-            </a:r>
-            <a:r>
-              <a:rPr lang="en-US" altLang="zh-TW" sz="2400" dirty="0">
-                <a:latin typeface="Times New Roman" panose="02020603050405020304" pitchFamily="18" charset="0"/>
-                <a:cs typeface="Times New Roman" panose="02020603050405020304" pitchFamily="18" charset="0"/>
-              </a:rPr>
-              <a:t> and Robert P. Goldberg classified two types of hypervisor:</a:t>
-            </a:r>
-          </a:p>
-          <a:p>
-            <a:pPr lvl="1"/>
+            <a:pPr>
+              <a:spcBef>
+                <a:spcPts val="0"/>
+              </a:spcBef>
+            </a:pPr>
             <a:r>
               <a:rPr lang="en-US" altLang="zh-TW" sz="2000" dirty="0">
                 <a:latin typeface="Times New Roman" panose="02020603050405020304" pitchFamily="18" charset="0"/>
                 <a:cs typeface="Times New Roman" panose="02020603050405020304" pitchFamily="18" charset="0"/>
               </a:rPr>
-              <a:t>Type 1 hypervisor : Bare metal type</a:t>
-            </a:r>
-          </a:p>
-          <a:p>
-            <a:pPr lvl="1"/>
+              <a:t>In their 1974 article "Formal Requirements for </a:t>
+            </a:r>
+            <a:r>
+              <a:rPr lang="en-US" altLang="zh-TW" sz="2000" dirty="0" err="1">
+                <a:latin typeface="Times New Roman" panose="02020603050405020304" pitchFamily="18" charset="0"/>
+                <a:cs typeface="Times New Roman" panose="02020603050405020304" pitchFamily="18" charset="0"/>
+              </a:rPr>
+              <a:t>Virtualizable</a:t>
+            </a:r>
             <a:r>
               <a:rPr lang="en-US" altLang="zh-TW" sz="2000" dirty="0">
                 <a:latin typeface="Times New Roman" panose="02020603050405020304" pitchFamily="18" charset="0"/>
                 <a:cs typeface="Times New Roman" panose="02020603050405020304" pitchFamily="18" charset="0"/>
               </a:rPr>
-              <a:t>Type 2 hypervisor : Hosted type</a:t>
-            </a:r>
+              <a:t> Third Generation Architectures" Gerald J. </a:t>
+            </a:r>
+            <a:r>
+              <a:rPr lang="en-US" altLang="zh-TW" sz="2000" dirty="0" err="1">
+                <a:latin typeface="Times New Roman" panose="02020603050405020304" pitchFamily="18" charset="0"/>
+                <a:cs typeface="Times New Roman" panose="02020603050405020304" pitchFamily="18" charset="0"/>
+              </a:rPr>
+              <a:t>Popek</a:t>
+            </a:r>
+            <a:r>
+              <a:rPr lang="en-US" altLang="zh-TW" sz="2000" dirty="0">
+                <a:latin typeface="Times New Roman" panose="02020603050405020304" pitchFamily="18" charset="0"/>
+                <a:cs typeface="Times New Roman" panose="02020603050405020304" pitchFamily="18" charset="0"/>
+              </a:rPr>
+              <a:t> and Robert P. Goldberg classified two types of hypervisor</a:t>
+            </a:r>
+          </a:p>
+          <a:p>
+            <a:pPr lvl="1">
+              <a:spcBef>
+                <a:spcPts val="0"/>
+              </a:spcBef>
+            </a:pPr>
+            <a:r>
+              <a:rPr lang="en-US" altLang="zh-TW" sz="2000" dirty="0"/>
+              <a:t>Type 1 hypervisor (Bare metal type) </a:t>
+            </a:r>
+          </a:p>
+          <a:p>
+            <a:pPr lvl="2">
+              <a:spcBef>
+                <a:spcPts val="0"/>
+              </a:spcBef>
+            </a:pPr>
+            <a:r>
+              <a:rPr lang="en-US" dirty="0">
+                <a:solidFill>
+                  <a:srgbClr val="444444"/>
+                </a:solidFill>
+                <a:latin typeface="Times New Roman" panose="02020603050405020304" pitchFamily="18" charset="0"/>
+                <a:cs typeface="Times New Roman" panose="02020603050405020304" pitchFamily="18" charset="0"/>
+              </a:rPr>
+              <a:t>H</a:t>
+            </a:r>
+            <a:r>
+              <a:rPr lang="en-US" b="0" i="0" dirty="0">
+                <a:solidFill>
+                  <a:srgbClr val="444444"/>
+                </a:solidFill>
+                <a:effectLst/>
+                <a:latin typeface="Times New Roman" panose="02020603050405020304" pitchFamily="18" charset="0"/>
+                <a:cs typeface="Times New Roman" panose="02020603050405020304" pitchFamily="18" charset="0"/>
+              </a:rPr>
+              <a:t>ypervisors that run directly atop a physical system</a:t>
+            </a:r>
+            <a:r>
+              <a:rPr lang="en-US" dirty="0">
+                <a:latin typeface="Times New Roman" panose="02020603050405020304" pitchFamily="18" charset="0"/>
+                <a:cs typeface="Times New Roman" panose="02020603050405020304" pitchFamily="18" charset="0"/>
+              </a:rPr>
+              <a:t>, such as </a:t>
+            </a:r>
+            <a:r>
+              <a:rPr lang="en-US" b="0" i="0" dirty="0">
+                <a:solidFill>
+                  <a:srgbClr val="333333"/>
+                </a:solidFill>
+                <a:effectLst/>
+                <a:latin typeface="Times New Roman" panose="02020603050405020304" pitchFamily="18" charset="0"/>
+                <a:cs typeface="Times New Roman" panose="02020603050405020304" pitchFamily="18" charset="0"/>
+              </a:rPr>
+              <a:t>VMware </a:t>
+            </a:r>
+            <a:r>
+              <a:rPr lang="en-US" b="0" i="0" dirty="0" err="1">
+                <a:solidFill>
+                  <a:srgbClr val="333333"/>
+                </a:solidFill>
+                <a:effectLst/>
+                <a:latin typeface="Times New Roman" panose="02020603050405020304" pitchFamily="18" charset="0"/>
+                <a:cs typeface="Times New Roman" panose="02020603050405020304" pitchFamily="18" charset="0"/>
+              </a:rPr>
+              <a:t>ESXi</a:t>
+            </a:r>
+            <a:r>
+              <a:rPr lang="en-US" b="0" i="0" dirty="0">
+                <a:solidFill>
+                  <a:srgbClr val="333333"/>
+                </a:solidFill>
+                <a:effectLst/>
+                <a:latin typeface="Times New Roman" panose="02020603050405020304" pitchFamily="18" charset="0"/>
+                <a:cs typeface="Times New Roman" panose="02020603050405020304" pitchFamily="18" charset="0"/>
+              </a:rPr>
+              <a:t>, Microsoft Hyper-V, KVM, etc.</a:t>
+            </a:r>
+            <a:endParaRPr lang="en-US" altLang="zh-TW" dirty="0">
+              <a:latin typeface="Times New Roman" panose="02020603050405020304" pitchFamily="18" charset="0"/>
+              <a:cs typeface="Times New Roman" panose="02020603050405020304" pitchFamily="18" charset="0"/>
+            </a:endParaRPr>
+          </a:p>
+          <a:p>
+            <a:pPr lvl="1">
+              <a:spcBef>
+                <a:spcPts val="0"/>
+              </a:spcBef>
+            </a:pPr>
+            <a:r>
+              <a:rPr lang="en-US" altLang="zh-TW" sz="2000" dirty="0"/>
+              <a:t>Type 2 hypervisor (Hosted type) </a:t>
+            </a:r>
+          </a:p>
+          <a:p>
+            <a:pPr lvl="2">
+              <a:spcBef>
+                <a:spcPts val="0"/>
+              </a:spcBef>
+            </a:pPr>
+            <a:r>
+              <a:rPr lang="en-US" b="0" i="0" dirty="0">
+                <a:solidFill>
+                  <a:srgbClr val="35353A"/>
+                </a:solidFill>
+                <a:effectLst/>
+                <a:latin typeface="Times New Roman" panose="02020603050405020304" pitchFamily="18" charset="0"/>
+                <a:cs typeface="Times New Roman" panose="02020603050405020304" pitchFamily="18" charset="0"/>
+              </a:rPr>
+              <a:t>Hypervisor is a virtual machine </a:t>
+            </a:r>
+            <a:r>
+              <a:rPr lang="en-US" b="0" i="0" dirty="0">
+                <a:effectLst/>
+                <a:latin typeface="Times New Roman" panose="02020603050405020304" pitchFamily="18" charset="0"/>
+                <a:cs typeface="Times New Roman" panose="02020603050405020304" pitchFamily="18" charset="0"/>
+              </a:rPr>
+              <a:t>(</a:t>
+            </a:r>
+            <a:r>
+              <a:rPr lang="en-US" dirty="0">
+                <a:latin typeface="Times New Roman" panose="02020603050405020304" pitchFamily="18" charset="0"/>
+                <a:cs typeface="Times New Roman" panose="02020603050405020304" pitchFamily="18" charset="0"/>
+              </a:rPr>
+              <a:t>VM</a:t>
+            </a:r>
+            <a:r>
+              <a:rPr lang="en-US" b="0" i="0" dirty="0">
+                <a:effectLst/>
+                <a:latin typeface="Times New Roman" panose="02020603050405020304" pitchFamily="18" charset="0"/>
+                <a:cs typeface="Times New Roman" panose="02020603050405020304" pitchFamily="18" charset="0"/>
+              </a:rPr>
+              <a:t>) manager that is installed as a software application on an existing operating system (</a:t>
+            </a:r>
+            <a:r>
+              <a:rPr lang="en-US" dirty="0">
+                <a:latin typeface="Times New Roman" panose="02020603050405020304" pitchFamily="18" charset="0"/>
+                <a:cs typeface="Times New Roman" panose="02020603050405020304" pitchFamily="18" charset="0"/>
+              </a:rPr>
+              <a:t>OS</a:t>
+            </a:r>
+            <a:r>
+              <a:rPr lang="en-US" b="0" i="0" dirty="0">
+                <a:effectLst/>
+                <a:latin typeface="Times New Roman" panose="02020603050405020304" pitchFamily="18" charset="0"/>
+                <a:cs typeface="Times New Roman" panose="02020603050405020304" pitchFamily="18" charset="0"/>
+              </a:rPr>
+              <a:t>)</a:t>
+            </a:r>
+            <a:endParaRPr lang="en-US" altLang="zh-TW" dirty="0">
+              <a:latin typeface="Times New Roman" panose="02020603050405020304" pitchFamily="18" charset="0"/>
+              <a:cs typeface="Times New Roman" panose="02020603050405020304" pitchFamily="18" charset="0"/>
+            </a:endParaRPr>
+          </a:p>
+          <a:p>
+            <a:pPr lvl="3">
+              <a:spcBef>
+                <a:spcPts val="0"/>
+              </a:spcBef>
+            </a:pPr>
+            <a:r>
+              <a:rPr lang="en-US" sz="2000" b="0" i="0" dirty="0">
+                <a:solidFill>
+                  <a:srgbClr val="333333"/>
+                </a:solidFill>
+                <a:effectLst/>
+                <a:latin typeface="Times New Roman" panose="02020603050405020304" pitchFamily="18" charset="0"/>
+                <a:cs typeface="Times New Roman" panose="02020603050405020304" pitchFamily="18" charset="0"/>
+              </a:rPr>
+              <a:t>Oracle VM VirtualBox, VMware Workstation, Microsoft Virtual PC, etc.</a:t>
+            </a:r>
+            <a:endParaRPr lang="en-US" altLang="zh-TW" sz="2000" dirty="0">
+              <a:latin typeface="Times New Roman" panose="02020603050405020304" pitchFamily="18" charset="0"/>
+              <a:cs typeface="Times New Roman" panose="02020603050405020304" pitchFamily="18" charset="0"/>
+            </a:endParaRPr>
           </a:p>
         </p:txBody>
       </p:sp>
@@ -7998,8 +8159,8 @@
         </p:nvSpPr>
         <p:spPr>
           <a:xfrm>
-            <a:off x="798286" y="844153"/>
-            <a:ext cx="7779657" cy="3671888"/>
+            <a:off x="904618" y="844153"/>
+            <a:ext cx="7673325" cy="3671888"/>
           </a:xfrm>
         </p:spPr>
         <p:txBody>
@@ -17694,22 +17855,13 @@
           <a:p>
             <a:pPr algn="l"/>
             <a:r>
-              <a:rPr lang="en-US" altLang="zh-TW" sz="2000">
-                <a:latin typeface="Times New Roman" panose="02020603050405020304" pitchFamily="18" charset="0"/>
-                <a:ea typeface="新細明體" charset="-120"/>
-                <a:cs typeface="Times New Roman" panose="02020603050405020304" pitchFamily="18" charset="0"/>
-                <a:sym typeface="Lucida Grande" charset="0"/>
-              </a:rPr>
-              <a:t>Gartner predicted </a:t>
-            </a:r>
-            <a:r>
               <a:rPr lang="en-US" altLang="zh-TW" sz="2000" dirty="0">
                 <a:latin typeface="Times New Roman" panose="02020603050405020304" pitchFamily="18" charset="0"/>
                 <a:ea typeface="新細明體" charset="-120"/>
                 <a:cs typeface="Times New Roman" panose="02020603050405020304" pitchFamily="18" charset="0"/>
                 <a:sym typeface="Lucida Grande" charset="0"/>
               </a:rPr>
-              <a:t>that by 2012, more than </a:t>
+              <a:t>Gartner predicted that by 2012, more than </a:t>
             </a:r>
             <a:r>
               <a:rPr lang="en-US" altLang="zh-TW" sz="2000" dirty="0">

--- a/Slides/CSC6103/VT-01 Virtualization Introduction.pptx
+++ b/Slides/CSC6103/VT-01 Virtualization Introduction.pptx
@@ -264,7 +264,7 @@
             <a:fld id="{45BDCE37-E9BE-4280-8D68-34E43D66CEDB}" type="datetimeFigureOut">
               <a:rPr lang="zh-TW" altLang="en-US" smtClean="0"/>
               <a:pPr/>
-              <a:t>2026/9/9</a:t>
+              <a:t>2026/9/10</a:t>
             </a:fld>
             <a:endParaRPr lang="zh-TW" altLang="en-US"/>
           </a:p>
@@ -431,7 +431,7 @@
             <a:fld id="{FBFBA883-381C-409E-9635-BB54B21745E4}" type="datetimeFigureOut">
               <a:rPr lang="zh-TW" altLang="en-US" smtClean="0"/>
               <a:pPr/>
-              <a:t>2026/9/9</a:t>
+              <a:t>2026/9/10</a:t>
             </a:fld>
             <a:endParaRPr lang="zh-TW" altLang="en-US"/>
           </a:p>
@@ -8159,8 +8159,8 @@
         </p:nvSpPr>
         <p:spPr>
           <a:xfrm>
-            <a:off x="904618" y="844153"/>
-            <a:ext cx="7673325" cy="3671888"/>
+            <a:off x="775078" y="844153"/>
+            <a:ext cx="7782182" cy="3671888"/>
           </a:xfrm>
         </p:spPr>
         <p:txBody>
@@ -8365,7 +8365,7 @@
         </p:nvGrpSpPr>
         <p:grpSpPr>
           <a:xfrm>
-            <a:off x="1363327" y="818191"/>
+            <a:off x="1363327" y="871531"/>
             <a:ext cx="6274816" cy="3671986"/>
             <a:chOff x="1458686" y="1380954"/>
             <a:chExt cx="6274816" cy="3671986"/>
@@ -11677,7 +11677,7 @@
           </p:cNvPicPr>
           <p:nvPr/>
         </p:nvPicPr>
-        <p:blipFill>
+        <p:blipFill rotWithShape="1">
           <a:blip r:embed="rId2">
             <a:extLst>
               <a:ext uri="{28A0092B-C50C-407E-A947-70E740481C1C}">
@@ -11685,15 +11685,13 @@
               </a:ext>
             </a:extLst>
           </a:blip>
-          <a:srcRect/>
-          <a:stretch>
-            <a:fillRect/>
-          </a:stretch>
+          <a:srcRect r="2729"/>
+          <a:stretch/>
         </p:blipFill>
         <p:spPr bwMode="auto">
           <a:xfrm>
-            <a:off x="5852109" y="1498600"/>
-            <a:ext cx="3271103" cy="2175933"/>
+            <a:off x="6062132" y="1390648"/>
+            <a:ext cx="3081867" cy="2175933"/>
           </a:xfrm>
           <a:prstGeom prst="rect">
             <a:avLst/>
@@ -11722,16 +11720,21 @@
         </p:nvSpPr>
         <p:spPr>
           <a:xfrm>
-            <a:off x="856342" y="844153"/>
-            <a:ext cx="4985657" cy="3702446"/>
+            <a:off x="238834" y="908265"/>
+            <a:ext cx="5885981" cy="3326970"/>
           </a:xfrm>
         </p:spPr>
         <p:txBody>
           <a:bodyPr>
-            <a:normAutofit lnSpcReduction="10000"/>
+            <a:noAutofit/>
           </a:bodyPr>
           <a:lstStyle/>
           <a:p>
+            <a:pPr>
+              <a:spcBef>
+                <a:spcPts val="0"/>
+              </a:spcBef>
+            </a:pPr>
             <a:r>
               <a:rPr lang="en-US" altLang="zh-TW" sz="1800" dirty="0">
                 <a:latin typeface="Times New Roman" panose="02020603050405020304" pitchFamily="18" charset="0"/>
@@ -11751,10 +11754,29 @@
                 <a:latin typeface="Times New Roman" panose="02020603050405020304" pitchFamily="18" charset="0"/>
                 <a:cs typeface="Times New Roman" panose="02020603050405020304" pitchFamily="18" charset="0"/>
               </a:rPr>
-              <a:t> is a flexible, multi-layer software network switch. Typically used in virtualization environments as the network switching component in the hypervisor.</a:t>
-            </a:r>
-          </a:p>
-          <a:p>
+              <a:t> is a flexible, multi-layer software network switch </a:t>
+            </a:r>
+          </a:p>
+          <a:p>
+            <a:pPr lvl="1">
+              <a:spcBef>
+                <a:spcPts val="0"/>
+              </a:spcBef>
+            </a:pPr>
+            <a:r>
+              <a:rPr lang="en-US" altLang="zh-TW" sz="1600" dirty="0">
+                <a:latin typeface="Times New Roman" panose="02020603050405020304" pitchFamily="18" charset="0"/>
+                <a:cs typeface="Times New Roman" panose="02020603050405020304" pitchFamily="18" charset="0"/>
+              </a:rPr>
+              <a:t>Typically used in virtualization environments as the network switching component in the hypervisor.</a:t>
+            </a:r>
+          </a:p>
+          <a:p>
+            <a:pPr>
+              <a:spcBef>
+                <a:spcPts val="0"/>
+              </a:spcBef>
+            </a:pPr>
             <a:r>
               <a:rPr lang="en-US" altLang="zh-TW" sz="1800" dirty="0">
                 <a:latin typeface="Times New Roman" panose="02020603050405020304" pitchFamily="18" charset="0"/>
@@ -11792,6 +11814,11 @@
             </a:r>
           </a:p>
           <a:p>
+            <a:pPr>
+              <a:spcBef>
+                <a:spcPts val="0"/>
+              </a:spcBef>
+            </a:pPr>
             <a:r>
               <a:rPr lang="en-US" altLang="zh-TW" sz="1800" dirty="0">
                 <a:latin typeface="Times New Roman" panose="02020603050405020304" pitchFamily="18" charset="0"/>
@@ -11811,10 +11838,15 @@
                 <a:latin typeface="Times New Roman" panose="02020603050405020304" pitchFamily="18" charset="0"/>
                 <a:cs typeface="Times New Roman" panose="02020603050405020304" pitchFamily="18" charset="0"/>
               </a:rPr>
-              <a:t> is attractive because it provides the ability for a single controller to manage your virtual network across all your servers20</a:t>
-            </a:r>
-          </a:p>
-          <a:p>
+              <a:t> is attractive because it provides the ability for a single controller to manage your virtual network across all your servers</a:t>
+            </a:r>
+          </a:p>
+          <a:p>
+            <a:pPr>
+              <a:spcBef>
+                <a:spcPts val="0"/>
+              </a:spcBef>
+            </a:pPr>
             <a:endParaRPr lang="zh-TW" altLang="en-US" sz="1800" dirty="0">
               <a:latin typeface="Times New Roman" panose="02020603050405020304" pitchFamily="18" charset="0"/>
               <a:cs typeface="Times New Roman" panose="02020603050405020304" pitchFamily="18" charset="0"/>
@@ -12309,7 +12341,7 @@
         </p:nvSpPr>
         <p:spPr>
           <a:xfrm>
-            <a:off x="881086" y="829649"/>
+            <a:off x="974220" y="863515"/>
             <a:ext cx="7381827" cy="1196023"/>
           </a:xfrm>
         </p:spPr>
@@ -12458,10 +12490,10 @@
           <a:lstStyle/>
           <a:p>
             <a:r>
-              <a:rPr lang="en-US" altLang="zh-TW" sz="3200" dirty="0"/>
+              <a:rPr lang="en-US" altLang="zh-TW" sz="3400" dirty="0"/>
               <a:t>Performance Comparison - GPU vs. CPU</a:t>
             </a:r>
-            <a:endParaRPr lang="zh-TW" altLang="en-US" sz="3200" dirty="0"/>
+            <a:endParaRPr lang="zh-TW" altLang="en-US" sz="3400" dirty="0"/>
           </a:p>
         </p:txBody>
       </p:sp>
@@ -13143,8 +13175,8 @@
         </p:nvSpPr>
         <p:spPr>
           <a:xfrm>
-            <a:off x="1069772" y="853881"/>
-            <a:ext cx="7004456" cy="3333490"/>
+            <a:off x="1069771" y="853881"/>
+            <a:ext cx="7320695" cy="3333490"/>
           </a:xfrm>
         </p:spPr>
         <p:txBody>
@@ -13167,7 +13199,7 @@
                 <a:latin typeface="Times New Roman" panose="02020603050405020304" pitchFamily="18" charset="0"/>
                 <a:cs typeface="Times New Roman" panose="02020603050405020304" pitchFamily="18" charset="0"/>
               </a:rPr>
-              <a:t>It has following features:</a:t>
+              <a:t>It has following features</a:t>
             </a:r>
           </a:p>
           <a:p>
@@ -13319,8 +13351,8 @@
         </p:nvSpPr>
         <p:spPr>
           <a:xfrm>
-            <a:off x="934356" y="785123"/>
-            <a:ext cx="6990443" cy="1435561"/>
+            <a:off x="1024466" y="785123"/>
+            <a:ext cx="7306733" cy="1435561"/>
           </a:xfrm>
         </p:spPr>
         <p:txBody>
@@ -13629,8 +13661,8 @@
         </p:nvSpPr>
         <p:spPr>
           <a:xfrm>
-            <a:off x="700314" y="833874"/>
-            <a:ext cx="7743372" cy="1152106"/>
+            <a:off x="1032932" y="833874"/>
+            <a:ext cx="7552268" cy="1104994"/>
           </a:xfrm>
         </p:spPr>
         <p:txBody>
@@ -13639,6 +13671,11 @@
           </a:bodyPr>
           <a:lstStyle/>
           <a:p>
+            <a:pPr>
+              <a:spcBef>
+                <a:spcPts val="0"/>
+              </a:spcBef>
+            </a:pPr>
             <a:r>
               <a:rPr lang="en-US" altLang="zh-TW" sz="2200" dirty="0" err="1">
                 <a:latin typeface="Times New Roman" panose="02020603050405020304" pitchFamily="18" charset="0"/>
@@ -13683,7 +13720,7 @@
         </p:blipFill>
         <p:spPr bwMode="auto">
           <a:xfrm>
-            <a:off x="2663371" y="2078644"/>
+            <a:off x="2883127" y="2078644"/>
             <a:ext cx="3947886" cy="2467428"/>
           </a:xfrm>
           <a:prstGeom prst="rect">
@@ -14064,7 +14101,7 @@
         <p:spPr>
           <a:xfrm>
             <a:off x="806777" y="858608"/>
-            <a:ext cx="4164368" cy="3394472"/>
+            <a:ext cx="4164368" cy="3196925"/>
           </a:xfrm>
         </p:spPr>
         <p:txBody>
@@ -14715,18 +14752,23 @@
         </p:nvSpPr>
         <p:spPr>
           <a:xfrm>
-            <a:off x="896260" y="848150"/>
-            <a:ext cx="6434473" cy="697623"/>
+            <a:off x="896260" y="831216"/>
+            <a:ext cx="6859207" cy="799398"/>
           </a:xfrm>
         </p:spPr>
         <p:txBody>
           <a:bodyPr>
-            <a:normAutofit fontScale="70000" lnSpcReduction="20000"/>
+            <a:noAutofit/>
           </a:bodyPr>
           <a:lstStyle/>
           <a:p>
-            <a:r>
-              <a:rPr lang="en-US" altLang="zh-TW" dirty="0">
+            <a:pPr>
+              <a:spcBef>
+                <a:spcPts val="0"/>
+              </a:spcBef>
+            </a:pPr>
+            <a:r>
+              <a:rPr lang="en-US" altLang="zh-TW" sz="2200" dirty="0">
                 <a:latin typeface="Times New Roman" panose="02020603050405020304" pitchFamily="18" charset="0"/>
                 <a:cs typeface="Times New Roman" panose="02020603050405020304" pitchFamily="18" charset="0"/>
               </a:rPr>
@@ -14734,8 +14776,13 @@
             </a:r>
           </a:p>
           <a:p>
-            <a:r>
-              <a:rPr lang="en-US" altLang="zh-TW" dirty="0">
+            <a:pPr>
+              <a:spcBef>
+                <a:spcPts val="0"/>
+              </a:spcBef>
+            </a:pPr>
+            <a:r>
+              <a:rPr lang="en-US" altLang="zh-TW" sz="2200" dirty="0">
                 <a:latin typeface="Times New Roman" panose="02020603050405020304" pitchFamily="18" charset="0"/>
                 <a:cs typeface="Times New Roman" panose="02020603050405020304" pitchFamily="18" charset="0"/>
               </a:rPr>

--- a/Slides/CSC6103/VT-01 Virtualization Introduction.pptx
+++ b/Slides/CSC6103/VT-01 Virtualization Introduction.pptx
@@ -264,7 +264,7 @@
             <a:fld id="{45BDCE37-E9BE-4280-8D68-34E43D66CEDB}" type="datetimeFigureOut">
               <a:rPr lang="zh-TW" altLang="en-US" smtClean="0"/>
               <a:pPr/>
-              <a:t>2026/9/10</a:t>
+              <a:t>2026/9/11</a:t>
             </a:fld>
             <a:endParaRPr lang="zh-TW" altLang="en-US"/>
           </a:p>
@@ -431,7 +431,7 @@
             <a:fld id="{FBFBA883-381C-409E-9635-BB54B21745E4}" type="datetimeFigureOut">
               <a:rPr lang="zh-TW" altLang="en-US" smtClean="0"/>
               <a:pPr/>
-              <a:t>2026/9/10</a:t>
+              <a:t>2026/9/11</a:t>
             </a:fld>
             <a:endParaRPr lang="zh-TW" altLang="en-US"/>
           </a:p>
@@ -7251,17 +7251,32 @@
                 <a:latin typeface="Times New Roman" panose="02020603050405020304" pitchFamily="18" charset="0"/>
                 <a:cs typeface="Times New Roman" panose="02020603050405020304" pitchFamily="18" charset="0"/>
               </a:rPr>
-              <a:t>ypervisors that run directly atop a physical system</a:t>
-            </a:r>
-            <a:r>
-              <a:rPr lang="en-US" dirty="0">
+              <a:t>ypervisors that run directly atop a </a:t>
+            </a:r>
+            <a:r>
+              <a:rPr lang="en-US" b="0" i="0">
+                <a:solidFill>
+                  <a:srgbClr val="444444"/>
+                </a:solidFill>
+                <a:effectLst/>
                 <a:latin typeface="Times New Roman" panose="02020603050405020304" pitchFamily="18" charset="0"/>
                 <a:cs typeface="Times New Roman" panose="02020603050405020304" pitchFamily="18" charset="0"/>
               </a:rPr>
-              <a:t>, such as </a:t>
-            </a:r>
-            <a:r>
-              <a:rPr lang="en-US" b="0" i="0" dirty="0">
+              <a:t>physical system</a:t>
+            </a:r>
+            <a:endParaRPr lang="en-US" dirty="0">
+              <a:latin typeface="Times New Roman" panose="02020603050405020304" pitchFamily="18" charset="0"/>
+              <a:cs typeface="Times New Roman" panose="02020603050405020304" pitchFamily="18" charset="0"/>
+            </a:endParaRPr>
+          </a:p>
+          <a:p>
+            <a:pPr lvl="3">
+              <a:spcBef>
+                <a:spcPts val="0"/>
+              </a:spcBef>
+            </a:pPr>
+            <a:r>
+              <a:rPr lang="en-US" sz="2000" b="0" i="0" dirty="0">
                 <a:solidFill>
                   <a:srgbClr val="333333"/>
                 </a:solidFill>
@@ -7272,7 +7287,7 @@
               <a:t>VMware </a:t>
             </a:r>
             <a:r>
-              <a:rPr lang="en-US" b="0" i="0" dirty="0" err="1">
+              <a:rPr lang="en-US" sz="2000" b="0" i="0" dirty="0" err="1">
                 <a:solidFill>
                   <a:srgbClr val="333333"/>
                 </a:solidFill>
@@ -7283,7 +7298,7 @@
               <a:t>ESXi</a:t>
             </a:r>
             <a:r>
-              <a:rPr lang="en-US" b="0" i="0" dirty="0">
+              <a:rPr lang="en-US" sz="2000" b="0" i="0" dirty="0">
                 <a:solidFill>
                   <a:srgbClr val="333333"/>
                 </a:solidFill>
@@ -7293,7 +7308,7 @@
               </a:rPr>
               <a:t>, Microsoft Hyper-V, KVM, etc.</a:t>
             </a:r>
-            <a:endParaRPr lang="en-US" altLang="zh-TW" dirty="0">
+            <a:endParaRPr lang="en-US" altLang="zh-TW" sz="2000" dirty="0">
               <a:latin typeface="Times New Roman" panose="02020603050405020304" pitchFamily="18" charset="0"/>
               <a:cs typeface="Times New Roman" panose="02020603050405020304" pitchFamily="18" charset="0"/>
             </a:endParaRPr>
@@ -8159,8 +8174,8 @@
         </p:nvSpPr>
         <p:spPr>
           <a:xfrm>
-            <a:off x="775078" y="844153"/>
-            <a:ext cx="7782182" cy="3671888"/>
+            <a:off x="904618" y="844153"/>
+            <a:ext cx="7673325" cy="3671888"/>
           </a:xfrm>
         </p:spPr>
         <p:txBody>
@@ -8365,7 +8380,7 @@
         </p:nvGrpSpPr>
         <p:grpSpPr>
           <a:xfrm>
-            <a:off x="1363327" y="871531"/>
+            <a:off x="1363327" y="818191"/>
             <a:ext cx="6274816" cy="3671986"/>
             <a:chOff x="1458686" y="1380954"/>
             <a:chExt cx="6274816" cy="3671986"/>
@@ -11677,7 +11692,7 @@
           </p:cNvPicPr>
           <p:nvPr/>
         </p:nvPicPr>
-        <p:blipFill rotWithShape="1">
+        <p:blipFill>
           <a:blip r:embed="rId2">
             <a:extLst>
               <a:ext uri="{28A0092B-C50C-407E-A947-70E740481C1C}">
@@ -11685,13 +11700,15 @@
               </a:ext>
             </a:extLst>
           </a:blip>
-          <a:srcRect r="2729"/>
-          <a:stretch/>
+          <a:srcRect/>
+          <a:stretch>
+            <a:fillRect/>
+          </a:stretch>
         </p:blipFill>
         <p:spPr bwMode="auto">
           <a:xfrm>
-            <a:off x="6062132" y="1390648"/>
-            <a:ext cx="3081867" cy="2175933"/>
+            <a:off x="5852109" y="1498600"/>
+            <a:ext cx="3271103" cy="2175933"/>
           </a:xfrm>
           <a:prstGeom prst="rect">
             <a:avLst/>
@@ -11720,21 +11737,16 @@
         </p:nvSpPr>
         <p:spPr>
           <a:xfrm>
-            <a:off x="238834" y="908265"/>
-            <a:ext cx="5885981" cy="3326970"/>
+            <a:off x="856342" y="844153"/>
+            <a:ext cx="4985657" cy="3702446"/>
           </a:xfrm>
         </p:spPr>
         <p:txBody>
           <a:bodyPr>
-            <a:noAutofit/>
+            <a:normAutofit lnSpcReduction="10000"/>
           </a:bodyPr>
           <a:lstStyle/>
           <a:p>
-            <a:pPr>
-              <a:spcBef>
-                <a:spcPts val="0"/>
-              </a:spcBef>
-            </a:pPr>
             <a:r>
               <a:rPr lang="en-US" altLang="zh-TW" sz="1800" dirty="0">
                 <a:latin typeface="Times New Roman" panose="02020603050405020304" pitchFamily="18" charset="0"/>
@@ -11754,29 +11766,10 @@
                 <a:latin typeface="Times New Roman" panose="02020603050405020304" pitchFamily="18" charset="0"/>
                 <a:cs typeface="Times New Roman" panose="02020603050405020304" pitchFamily="18" charset="0"/>
               </a:rPr>
-              <a:t> is a flexible, multi-layer software network switch </a:t>
-            </a:r>
-          </a:p>
-          <a:p>
-            <a:pPr lvl="1">
-              <a:spcBef>
-                <a:spcPts val="0"/>
-              </a:spcBef>
-            </a:pPr>
-            <a:r>
-              <a:rPr lang="en-US" altLang="zh-TW" sz="1600" dirty="0">
-                <a:latin typeface="Times New Roman" panose="02020603050405020304" pitchFamily="18" charset="0"/>
-                <a:cs typeface="Times New Roman" panose="02020603050405020304" pitchFamily="18" charset="0"/>
-              </a:rPr>
-              <a:t>Typically used in virtualization environments as the network switching component in the hypervisor.</a:t>
-            </a:r>
-          </a:p>
-          <a:p>
-            <a:pPr>
-              <a:spcBef>
-                <a:spcPts val="0"/>
-              </a:spcBef>
-            </a:pPr>
+              <a:t> is a flexible, multi-layer software network switch. Typically used in virtualization environments as the network switching component in the hypervisor.</a:t>
+            </a:r>
+          </a:p>
+          <a:p>
             <a:r>
               <a:rPr lang="en-US" altLang="zh-TW" sz="1800" dirty="0">
                 <a:latin typeface="Times New Roman" panose="02020603050405020304" pitchFamily="18" charset="0"/>
@@ -11814,11 +11807,6 @@
             </a:r>
           </a:p>
           <a:p>
-            <a:pPr>
-              <a:spcBef>
-                <a:spcPts val="0"/>
-              </a:spcBef>
-            </a:pPr>
             <a:r>
               <a:rPr lang="en-US" altLang="zh-TW" sz="1800" dirty="0">
                 <a:latin typeface="Times New Roman" panose="02020603050405020304" pitchFamily="18" charset="0"/>
@@ -11838,15 +11826,10 @@
                 <a:latin typeface="Times New Roman" panose="02020603050405020304" pitchFamily="18" charset="0"/>
                 <a:cs typeface="Times New Roman" panose="02020603050405020304" pitchFamily="18" charset="0"/>
               </a:rPr>
-              <a:t> is attractive because it provides the ability for a single controller to manage your virtual network across all your servers</a:t>
-            </a:r>
-          </a:p>
-          <a:p>
-            <a:pPr>
-              <a:spcBef>
-                <a:spcPts val="0"/>
-              </a:spcBef>
-            </a:pPr>
+              <a:t> is attractive because it provides the ability for a single controller to manage your virtual network across all your servers20</a:t>
+            </a:r>
+          </a:p>
+          <a:p>
             <a:endParaRPr lang="zh-TW" altLang="en-US" sz="1800" dirty="0">
               <a:latin typeface="Times New Roman" panose="02020603050405020304" pitchFamily="18" charset="0"/>
               <a:cs typeface="Times New Roman" panose="02020603050405020304" pitchFamily="18" charset="0"/>
@@ -12341,7 +12324,7 @@
         </p:nvSpPr>
         <p:spPr>
           <a:xfrm>
-            <a:off x="974220" y="863515"/>
+            <a:off x="881086" y="829649"/>
             <a:ext cx="7381827" cy="1196023"/>
           </a:xfrm>
         </p:spPr>
@@ -12490,10 +12473,10 @@
           <a:lstStyle/>
           <a:p>
             <a:r>
-              <a:rPr lang="en-US" altLang="zh-TW" sz="3400" dirty="0"/>
+              <a:rPr lang="en-US" altLang="zh-TW" sz="3200" dirty="0"/>
               <a:t>Performance Comparison - GPU vs. CPU</a:t>
             </a:r>
-            <a:endParaRPr lang="zh-TW" altLang="en-US" sz="3400" dirty="0"/>
+            <a:endParaRPr lang="zh-TW" altLang="en-US" sz="3200" dirty="0"/>
           </a:p>
         </p:txBody>
       </p:sp>
@@ -13175,8 +13158,8 @@
         </p:nvSpPr>
         <p:spPr>
           <a:xfrm>
-            <a:off x="1069771" y="853881"/>
-            <a:ext cx="7320695" cy="3333490"/>
+            <a:off x="1069772" y="853881"/>
+            <a:ext cx="7004456" cy="3333490"/>
           </a:xfrm>
         </p:spPr>
         <p:txBody>
@@ -13199,7 +13182,7 @@
                 <a:latin typeface="Times New Roman" panose="02020603050405020304" pitchFamily="18" charset="0"/>
                 <a:cs typeface="Times New Roman" panose="02020603050405020304" pitchFamily="18" charset="0"/>
               </a:rPr>
-              <a:t>It has following features</a:t>
+              <a:t>It has following features:</a:t>
             </a:r>
           </a:p>
           <a:p>
@@ -13351,8 +13334,8 @@
         </p:nvSpPr>
         <p:spPr>
           <a:xfrm>
-            <a:off x="1024466" y="785123"/>
-            <a:ext cx="7306733" cy="1435561"/>
+            <a:off x="934356" y="785123"/>
+            <a:ext cx="6990443" cy="1435561"/>
           </a:xfrm>
         </p:spPr>
         <p:txBody>
@@ -13661,8 +13644,8 @@
         </p:nvSpPr>
         <p:spPr>
           <a:xfrm>
-            <a:off x="1032932" y="833874"/>
-            <a:ext cx="7552268" cy="1104994"/>
+            <a:off x="700314" y="833874"/>
+            <a:ext cx="7743372" cy="1152106"/>
           </a:xfrm>
         </p:spPr>
         <p:txBody>
@@ -13671,11 +13654,6 @@
           </a:bodyPr>
           <a:lstStyle/>
           <a:p>
-            <a:pPr>
-              <a:spcBef>
-                <a:spcPts val="0"/>
-              </a:spcBef>
-            </a:pPr>
             <a:r>
               <a:rPr lang="en-US" altLang="zh-TW" sz="2200" dirty="0" err="1">
                 <a:latin typeface="Times New Roman" panose="02020603050405020304" pitchFamily="18" charset="0"/>
@@ -13720,7 +13698,7 @@
         </p:blipFill>
         <p:spPr bwMode="auto">
           <a:xfrm>
-            <a:off x="2883127" y="2078644"/>
+            <a:off x="2663371" y="2078644"/>
             <a:ext cx="3947886" cy="2467428"/>
           </a:xfrm>
           <a:prstGeom prst="rect">
@@ -14101,7 +14079,7 @@
         <p:spPr>
           <a:xfrm>
             <a:off x="806777" y="858608"/>
-            <a:ext cx="4164368" cy="3196925"/>
+            <a:ext cx="4164368" cy="3394472"/>
           </a:xfrm>
         </p:spPr>
         <p:txBody>
@@ -14752,23 +14730,18 @@
         </p:nvSpPr>
         <p:spPr>
           <a:xfrm>
-            <a:off x="896260" y="831216"/>
-            <a:ext cx="6859207" cy="799398"/>
+            <a:off x="896260" y="848150"/>
+            <a:ext cx="6434473" cy="697623"/>
           </a:xfrm>
         </p:spPr>
         <p:txBody>
           <a:bodyPr>
-            <a:noAutofit/>
+            <a:normAutofit fontScale="70000" lnSpcReduction="20000"/>
           </a:bodyPr>
           <a:lstStyle/>
           <a:p>
-            <a:pPr>
-              <a:spcBef>
-                <a:spcPts val="0"/>
-              </a:spcBef>
-            </a:pPr>
-            <a:r>
-              <a:rPr lang="en-US" altLang="zh-TW" sz="2200" dirty="0">
+            <a:r>
+              <a:rPr lang="en-US" altLang="zh-TW" dirty="0">
                 <a:latin typeface="Times New Roman" panose="02020603050405020304" pitchFamily="18" charset="0"/>
                 <a:cs typeface="Times New Roman" panose="02020603050405020304" pitchFamily="18" charset="0"/>
               </a:rPr>
@@ -14776,13 +14749,8 @@
             </a:r>
           </a:p>
           <a:p>
-            <a:pPr>
-              <a:spcBef>
-                <a:spcPts val="0"/>
-              </a:spcBef>
-            </a:pPr>
-            <a:r>
-              <a:rPr lang="en-US" altLang="zh-TW" sz="2200" dirty="0">
+            <a:r>
+              <a:rPr lang="en-US" altLang="zh-TW" dirty="0">
                 <a:latin typeface="Times New Roman" panose="02020603050405020304" pitchFamily="18" charset="0"/>
                 <a:cs typeface="Times New Roman" panose="02020603050405020304" pitchFamily="18" charset="0"/>
               </a:rPr>
